--- a/pitch/YojnaConnect-TechPitch.pptx
+++ b/pitch/YojnaConnect-TechPitch.pptx
@@ -3198,7 +3198,7 @@
         <p:spPr>
           <a:xfrm>
             <a:off x="0" y="0"/>
-            <a:ext cx="164592" cy="6858000"/>
+            <a:ext cx="146304" cy="6858000"/>
           </a:xfrm>
           <a:prstGeom prst="rect">
             <a:avLst/>
@@ -3240,8 +3240,8 @@
         </p:nvSpPr>
         <p:spPr>
           <a:xfrm>
-            <a:off x="640080" y="1371600"/>
-            <a:ext cx="2377440" cy="347472"/>
+            <a:off x="640080" y="1417320"/>
+            <a:ext cx="2286000" cy="329184"/>
           </a:xfrm>
           <a:prstGeom prst="roundRect">
             <a:avLst>
@@ -3281,7 +3281,7 @@
                 </a:solidFill>
                 <a:latin typeface="Calibri"/>
               </a:rPr>
-              <a:t>LIVE PRODUCT DEMO</a:t>
+              <a:t>LIVE PRODUCT</a:t>
             </a:r>
           </a:p>
         </p:txBody>
@@ -3294,8 +3294,8 @@
         </p:nvSpPr>
         <p:spPr>
           <a:xfrm>
-            <a:off x="640080" y="1920240"/>
-            <a:ext cx="10058400" cy="1097280"/>
+            <a:off x="640080" y="1965960"/>
+            <a:ext cx="10972800" cy="822960"/>
           </a:xfrm>
           <a:prstGeom prst="rect">
             <a:avLst/>
@@ -3310,7 +3310,7 @@
           <a:p>
             <a:pPr algn="l"/>
             <a:r>
-              <a:rPr sz="5400" b="1">
+              <a:rPr sz="4800" b="1">
                 <a:solidFill>
                   <a:srgbClr val="F8FAFC"/>
                 </a:solidFill>
@@ -3329,8 +3329,8 @@
         </p:nvSpPr>
         <p:spPr>
           <a:xfrm>
-            <a:off x="640080" y="2926080"/>
-            <a:ext cx="10058400" cy="731520"/>
+            <a:off x="640080" y="2880360"/>
+            <a:ext cx="10972800" cy="457200"/>
           </a:xfrm>
           <a:prstGeom prst="rect">
             <a:avLst/>
@@ -3345,7 +3345,7 @@
           <a:p>
             <a:pPr algn="l"/>
             <a:r>
-              <a:rPr sz="2600" b="0">
+              <a:rPr sz="2400" b="0">
                 <a:solidFill>
                   <a:srgbClr val="2DD4BF"/>
                 </a:solidFill>
@@ -3364,8 +3364,8 @@
         </p:nvSpPr>
         <p:spPr>
           <a:xfrm>
-            <a:off x="640080" y="3749039"/>
-            <a:ext cx="10058400" cy="548640"/>
+            <a:off x="640080" y="3520440"/>
+            <a:ext cx="10972800" cy="365760"/>
           </a:xfrm>
           <a:prstGeom prst="rect">
             <a:avLst/>
@@ -3380,13 +3380,13 @@
           <a:p>
             <a:pPr algn="l"/>
             <a:r>
-              <a:rPr sz="1800" b="0">
+              <a:rPr sz="1600" b="0">
                 <a:solidFill>
                   <a:srgbClr val="94A3B8"/>
                 </a:solidFill>
                 <a:latin typeface="Calibri"/>
               </a:rPr>
-              <a:t>Age-aware · Bilingual · REST + MySQL · Production URL live</a:t>
+              <a:t>Age-aware  ·  Bilingual EN/HI  ·  React + Express + MySQL  ·  Production live</a:t>
             </a:r>
           </a:p>
         </p:txBody>
@@ -3399,8 +3399,8 @@
         </p:nvSpPr>
         <p:spPr>
           <a:xfrm>
-            <a:off x="640080" y="4754880"/>
-            <a:ext cx="10058400" cy="365760"/>
+            <a:off x="640080" y="4297680"/>
+            <a:ext cx="10972800" cy="365760"/>
           </a:xfrm>
           <a:prstGeom prst="rect">
             <a:avLst/>
@@ -3434,8 +3434,8 @@
         </p:nvSpPr>
         <p:spPr>
           <a:xfrm>
-            <a:off x="640080" y="5303520"/>
-            <a:ext cx="10058400" cy="320040"/>
+            <a:off x="640080" y="4937760"/>
+            <a:ext cx="10972800" cy="320040"/>
           </a:xfrm>
           <a:prstGeom prst="rect">
             <a:avLst/>
@@ -3456,7 +3456,7 @@
                 </a:solidFill>
                 <a:latin typeface="Calibri"/>
               </a:rPr>
-              <a:t>Technical Deep-Dive Pitch  ·  Tamil Nadu / Enterprise Review</a:t>
+              <a:t>Technical Pitch for Tamil Nadu / Enterprise Review</a:t>
             </a:r>
           </a:p>
         </p:txBody>
@@ -3469,8 +3469,8 @@
         </p:nvSpPr>
         <p:spPr>
           <a:xfrm>
-            <a:off x="457200" y="6446520"/>
-            <a:ext cx="9144000" cy="274320"/>
+            <a:off x="457200" y="6473952"/>
+            <a:ext cx="9601200" cy="256032"/>
           </a:xfrm>
           <a:prstGeom prst="rect">
             <a:avLst/>
@@ -3490,7 +3490,7 @@
                 </a:solidFill>
                 <a:latin typeface="Calibri"/>
               </a:rPr>
-              <a:t>YojanaConnect  ·  Live: yojnaconnect.prakharkr.online  ·  Confidential pitch</a:t>
+              <a:t>YojanaConnect  |  https://yojnaconnect.prakharkr.online/schemes  |  Technical Pitch</a:t>
             </a:r>
           </a:p>
         </p:txBody>
@@ -3503,8 +3503,8 @@
         </p:nvSpPr>
         <p:spPr>
           <a:xfrm>
-            <a:off x="10789920" y="6446520"/>
-            <a:ext cx="1097280" cy="274320"/>
+            <a:off x="10698480" y="6473952"/>
+            <a:ext cx="1188720" cy="256032"/>
           </a:xfrm>
           <a:prstGeom prst="rect">
             <a:avLst/>
@@ -3525,7 +3525,7 @@
                 </a:solidFill>
                 <a:latin typeface="Calibri"/>
               </a:rPr>
-              <a:t>01 / 16</a:t>
+              <a:t>01/16</a:t>
             </a:r>
           </a:p>
         </p:txBody>
@@ -3643,7 +3643,7 @@
         <p:spPr>
           <a:xfrm>
             <a:off x="457200" y="274320"/>
-            <a:ext cx="10972800" cy="411480"/>
+            <a:ext cx="10972800" cy="365760"/>
           </a:xfrm>
           <a:prstGeom prst="rect">
             <a:avLst/>
@@ -3664,67 +3664,34 @@
                 </a:solidFill>
                 <a:latin typeface="Calibri"/>
               </a:rPr>
-              <a:t>API Surface — Contract Design</a:t>
-            </a:r>
-          </a:p>
-        </p:txBody>
-      </p:sp>
-      <p:sp>
-        <p:nvSpPr>
-          <p:cNvPr id="5" name="TextBox 4"/>
-          <p:cNvSpPr txBox="1"/>
-          <p:nvPr/>
-        </p:nvSpPr>
-        <p:spPr>
-          <a:xfrm>
-            <a:off x="457200" y="777240"/>
-            <a:ext cx="10972800" cy="274320"/>
-          </a:xfrm>
-          <a:prstGeom prst="rect">
-            <a:avLst/>
-          </a:prstGeom>
-          <a:noFill/>
-        </p:spPr>
-        <p:txBody>
-          <a:bodyPr wrap="square">
-            <a:spAutoFit/>
-          </a:bodyPr>
-          <a:lstStyle/>
-          <a:p>
-            <a:pPr algn="l"/>
-            <a:r>
-              <a:rPr sz="1400" b="0">
-                <a:solidFill>
-                  <a:srgbClr val="94A3B8"/>
-                </a:solidFill>
-                <a:latin typeface="Calibri"/>
-              </a:rPr>
-              <a:t>Read-optimized REST — clean for CSC apps, WhatsApp bots, or state portals later</a:t>
-            </a:r>
-          </a:p>
-        </p:txBody>
-      </p:sp>
-      <p:sp>
-        <p:nvSpPr>
-          <p:cNvPr id="6" name="Rounded Rectangle 5"/>
+              <a:t>Technology Stack</a:t>
+            </a:r>
+          </a:p>
+        </p:txBody>
+      </p:sp>
+      <p:sp>
+        <p:nvSpPr>
+          <p:cNvPr id="5" name="Rounded Rectangle 4"/>
           <p:cNvSpPr/>
           <p:nvPr/>
         </p:nvSpPr>
         <p:spPr>
           <a:xfrm>
-            <a:off x="548640" y="1261872"/>
-            <a:ext cx="822960" cy="365760"/>
+            <a:off x="411480" y="1051560"/>
+            <a:ext cx="3703320" cy="4892040"/>
           </a:xfrm>
           <a:prstGeom prst="roundRect">
             <a:avLst>
-              <a:gd name="adj" fmla="val 50000"/>
+              <a:gd name="adj" fmla="val 8000"/>
             </a:avLst>
           </a:prstGeom>
           <a:solidFill>
-            <a:srgbClr val="34D399"/>
+            <a:srgbClr val="162A45"/>
           </a:solidFill>
           <a:ln>
-            <a:noFill/>
+            <a:solidFill>
+              <a:srgbClr val="2A3F5F"/>
+            </a:solidFill>
           </a:ln>
         </p:spPr>
         <p:style>
@@ -3742,18 +3709,44 @@
           </a:fontRef>
         </p:style>
         <p:txBody>
-          <a:bodyPr rtlCol="0" anchor="ctr" wrap="none"/>
+          <a:bodyPr rtlCol="0" anchor="ctr"/>
           <a:lstStyle/>
           <a:p>
             <a:pPr algn="ctr"/>
-            <a:r>
-              <a:rPr sz="1100" b="1">
-                <a:solidFill>
-                  <a:srgbClr val="0B1628"/>
-                </a:solidFill>
-                <a:latin typeface="Calibri"/>
-              </a:rPr>
-              <a:t>GET</a:t>
+          </a:p>
+        </p:txBody>
+      </p:sp>
+      <p:sp>
+        <p:nvSpPr>
+          <p:cNvPr id="6" name="TextBox 5"/>
+          <p:cNvSpPr txBox="1"/>
+          <p:nvPr/>
+        </p:nvSpPr>
+        <p:spPr>
+          <a:xfrm>
+            <a:off x="640080" y="1234440"/>
+            <a:ext cx="3200400" cy="365760"/>
+          </a:xfrm>
+          <a:prstGeom prst="rect">
+            <a:avLst/>
+          </a:prstGeom>
+          <a:noFill/>
+        </p:spPr>
+        <p:txBody>
+          <a:bodyPr wrap="square">
+            <a:spAutoFit/>
+          </a:bodyPr>
+          <a:lstStyle/>
+          <a:p>
+            <a:pPr algn="l"/>
+            <a:r>
+              <a:rPr sz="1800" b="1">
+                <a:solidFill>
+                  <a:srgbClr val="FF8C42"/>
+                </a:solidFill>
+                <a:latin typeface="Calibri"/>
+              </a:rPr>
+              <a:t>Frontend</a:t>
             </a:r>
           </a:p>
         </p:txBody>
@@ -3766,8 +3759,8 @@
         </p:nvSpPr>
         <p:spPr>
           <a:xfrm>
-            <a:off x="1554480" y="1280160"/>
-            <a:ext cx="5029200" cy="365760"/>
+            <a:off x="731520" y="1783080"/>
+            <a:ext cx="3108960" cy="365760"/>
           </a:xfrm>
           <a:prstGeom prst="rect">
             <a:avLst/>
@@ -3782,13 +3775,13 @@
           <a:p>
             <a:pPr algn="l"/>
             <a:r>
-              <a:rPr sz="1500" b="1">
-                <a:solidFill>
-                  <a:srgbClr val="2DD4BF"/>
-                </a:solidFill>
-                <a:latin typeface="Calibri"/>
-              </a:rPr>
-              <a:t>/api/healthz</a:t>
+              <a:rPr sz="1400" b="0">
+                <a:solidFill>
+                  <a:srgbClr val="CBD5E1"/>
+                </a:solidFill>
+                <a:latin typeface="Calibri"/>
+              </a:rPr>
+              <a:t>&gt;  React 19</a:t>
             </a:r>
           </a:p>
         </p:txBody>
@@ -3801,8 +3794,8 @@
         </p:nvSpPr>
         <p:spPr>
           <a:xfrm>
-            <a:off x="6675120" y="1280160"/>
-            <a:ext cx="4846320" cy="365760"/>
+            <a:off x="731520" y="2240280"/>
+            <a:ext cx="3108960" cy="365760"/>
           </a:xfrm>
           <a:prstGeom prst="rect">
             <a:avLst/>
@@ -3823,32 +3816,244 @@
                 </a:solidFill>
                 <a:latin typeface="Calibri"/>
               </a:rPr>
-              <a:t>Liveness probe</a:t>
-            </a:r>
-          </a:p>
-        </p:txBody>
-      </p:sp>
-      <p:sp>
-        <p:nvSpPr>
-          <p:cNvPr id="9" name="Rounded Rectangle 8"/>
+              <a:t>&gt;  TypeScript</a:t>
+            </a:r>
+          </a:p>
+        </p:txBody>
+      </p:sp>
+      <p:sp>
+        <p:nvSpPr>
+          <p:cNvPr id="9" name="TextBox 8"/>
+          <p:cNvSpPr txBox="1"/>
+          <p:nvPr/>
+        </p:nvSpPr>
+        <p:spPr>
+          <a:xfrm>
+            <a:off x="731520" y="2697480"/>
+            <a:ext cx="3108960" cy="365760"/>
+          </a:xfrm>
+          <a:prstGeom prst="rect">
+            <a:avLst/>
+          </a:prstGeom>
+          <a:noFill/>
+        </p:spPr>
+        <p:txBody>
+          <a:bodyPr wrap="square">
+            <a:spAutoFit/>
+          </a:bodyPr>
+          <a:lstStyle/>
+          <a:p>
+            <a:pPr algn="l"/>
+            <a:r>
+              <a:rPr sz="1400" b="0">
+                <a:solidFill>
+                  <a:srgbClr val="CBD5E1"/>
+                </a:solidFill>
+                <a:latin typeface="Calibri"/>
+              </a:rPr>
+              <a:t>&gt;  Vite</a:t>
+            </a:r>
+          </a:p>
+        </p:txBody>
+      </p:sp>
+      <p:sp>
+        <p:nvSpPr>
+          <p:cNvPr id="10" name="TextBox 9"/>
+          <p:cNvSpPr txBox="1"/>
+          <p:nvPr/>
+        </p:nvSpPr>
+        <p:spPr>
+          <a:xfrm>
+            <a:off x="731520" y="3154680"/>
+            <a:ext cx="3108960" cy="365760"/>
+          </a:xfrm>
+          <a:prstGeom prst="rect">
+            <a:avLst/>
+          </a:prstGeom>
+          <a:noFill/>
+        </p:spPr>
+        <p:txBody>
+          <a:bodyPr wrap="square">
+            <a:spAutoFit/>
+          </a:bodyPr>
+          <a:lstStyle/>
+          <a:p>
+            <a:pPr algn="l"/>
+            <a:r>
+              <a:rPr sz="1400" b="0">
+                <a:solidFill>
+                  <a:srgbClr val="CBD5E1"/>
+                </a:solidFill>
+                <a:latin typeface="Calibri"/>
+              </a:rPr>
+              <a:t>&gt;  TanStack Query</a:t>
+            </a:r>
+          </a:p>
+        </p:txBody>
+      </p:sp>
+      <p:sp>
+        <p:nvSpPr>
+          <p:cNvPr id="11" name="TextBox 10"/>
+          <p:cNvSpPr txBox="1"/>
+          <p:nvPr/>
+        </p:nvSpPr>
+        <p:spPr>
+          <a:xfrm>
+            <a:off x="731520" y="3611880"/>
+            <a:ext cx="3108960" cy="365760"/>
+          </a:xfrm>
+          <a:prstGeom prst="rect">
+            <a:avLst/>
+          </a:prstGeom>
+          <a:noFill/>
+        </p:spPr>
+        <p:txBody>
+          <a:bodyPr wrap="square">
+            <a:spAutoFit/>
+          </a:bodyPr>
+          <a:lstStyle/>
+          <a:p>
+            <a:pPr algn="l"/>
+            <a:r>
+              <a:rPr sz="1400" b="0">
+                <a:solidFill>
+                  <a:srgbClr val="CBD5E1"/>
+                </a:solidFill>
+                <a:latin typeface="Calibri"/>
+              </a:rPr>
+              <a:t>&gt;  Wouter</a:t>
+            </a:r>
+          </a:p>
+        </p:txBody>
+      </p:sp>
+      <p:sp>
+        <p:nvSpPr>
+          <p:cNvPr id="12" name="TextBox 11"/>
+          <p:cNvSpPr txBox="1"/>
+          <p:nvPr/>
+        </p:nvSpPr>
+        <p:spPr>
+          <a:xfrm>
+            <a:off x="731520" y="4069080"/>
+            <a:ext cx="3108960" cy="365760"/>
+          </a:xfrm>
+          <a:prstGeom prst="rect">
+            <a:avLst/>
+          </a:prstGeom>
+          <a:noFill/>
+        </p:spPr>
+        <p:txBody>
+          <a:bodyPr wrap="square">
+            <a:spAutoFit/>
+          </a:bodyPr>
+          <a:lstStyle/>
+          <a:p>
+            <a:pPr algn="l"/>
+            <a:r>
+              <a:rPr sz="1400" b="0">
+                <a:solidFill>
+                  <a:srgbClr val="CBD5E1"/>
+                </a:solidFill>
+                <a:latin typeface="Calibri"/>
+              </a:rPr>
+              <a:t>&gt;  i18next</a:t>
+            </a:r>
+          </a:p>
+        </p:txBody>
+      </p:sp>
+      <p:sp>
+        <p:nvSpPr>
+          <p:cNvPr id="13" name="TextBox 12"/>
+          <p:cNvSpPr txBox="1"/>
+          <p:nvPr/>
+        </p:nvSpPr>
+        <p:spPr>
+          <a:xfrm>
+            <a:off x="731520" y="4526280"/>
+            <a:ext cx="3108960" cy="365760"/>
+          </a:xfrm>
+          <a:prstGeom prst="rect">
+            <a:avLst/>
+          </a:prstGeom>
+          <a:noFill/>
+        </p:spPr>
+        <p:txBody>
+          <a:bodyPr wrap="square">
+            <a:spAutoFit/>
+          </a:bodyPr>
+          <a:lstStyle/>
+          <a:p>
+            <a:pPr algn="l"/>
+            <a:r>
+              <a:rPr sz="1400" b="0">
+                <a:solidFill>
+                  <a:srgbClr val="CBD5E1"/>
+                </a:solidFill>
+                <a:latin typeface="Calibri"/>
+              </a:rPr>
+              <a:t>&gt;  Framer Motion</a:t>
+            </a:r>
+          </a:p>
+        </p:txBody>
+      </p:sp>
+      <p:sp>
+        <p:nvSpPr>
+          <p:cNvPr id="14" name="TextBox 13"/>
+          <p:cNvSpPr txBox="1"/>
+          <p:nvPr/>
+        </p:nvSpPr>
+        <p:spPr>
+          <a:xfrm>
+            <a:off x="731520" y="4983480"/>
+            <a:ext cx="3108960" cy="365760"/>
+          </a:xfrm>
+          <a:prstGeom prst="rect">
+            <a:avLst/>
+          </a:prstGeom>
+          <a:noFill/>
+        </p:spPr>
+        <p:txBody>
+          <a:bodyPr wrap="square">
+            <a:spAutoFit/>
+          </a:bodyPr>
+          <a:lstStyle/>
+          <a:p>
+            <a:pPr algn="l"/>
+            <a:r>
+              <a:rPr sz="1400" b="0">
+                <a:solidFill>
+                  <a:srgbClr val="CBD5E1"/>
+                </a:solidFill>
+                <a:latin typeface="Calibri"/>
+              </a:rPr>
+              <a:t>&gt;  Tailwind CSS v4</a:t>
+            </a:r>
+          </a:p>
+        </p:txBody>
+      </p:sp>
+      <p:sp>
+        <p:nvSpPr>
+          <p:cNvPr id="15" name="Rounded Rectangle 14"/>
           <p:cNvSpPr/>
           <p:nvPr/>
         </p:nvSpPr>
         <p:spPr>
           <a:xfrm>
-            <a:off x="548640" y="1901952"/>
-            <a:ext cx="822960" cy="365760"/>
+            <a:off x="4297680" y="1051560"/>
+            <a:ext cx="3703320" cy="4892040"/>
           </a:xfrm>
           <a:prstGeom prst="roundRect">
             <a:avLst>
-              <a:gd name="adj" fmla="val 50000"/>
+              <a:gd name="adj" fmla="val 8000"/>
             </a:avLst>
           </a:prstGeom>
           <a:solidFill>
-            <a:srgbClr val="34D399"/>
+            <a:srgbClr val="162A45"/>
           </a:solidFill>
           <a:ln>
-            <a:noFill/>
+            <a:solidFill>
+              <a:srgbClr val="2A3F5F"/>
+            </a:solidFill>
           </a:ln>
         </p:spPr>
         <p:style>
@@ -3866,32 +4071,23 @@
           </a:fontRef>
         </p:style>
         <p:txBody>
-          <a:bodyPr rtlCol="0" anchor="ctr" wrap="none"/>
+          <a:bodyPr rtlCol="0" anchor="ctr"/>
           <a:lstStyle/>
           <a:p>
             <a:pPr algn="ctr"/>
-            <a:r>
-              <a:rPr sz="1100" b="1">
-                <a:solidFill>
-                  <a:srgbClr val="0B1628"/>
-                </a:solidFill>
-                <a:latin typeface="Calibri"/>
-              </a:rPr>
-              <a:t>GET</a:t>
-            </a:r>
-          </a:p>
-        </p:txBody>
-      </p:sp>
-      <p:sp>
-        <p:nvSpPr>
-          <p:cNvPr id="10" name="TextBox 9"/>
-          <p:cNvSpPr txBox="1"/>
-          <p:nvPr/>
-        </p:nvSpPr>
-        <p:spPr>
-          <a:xfrm>
-            <a:off x="1554480" y="1920240"/>
-            <a:ext cx="5029200" cy="365760"/>
+          </a:p>
+        </p:txBody>
+      </p:sp>
+      <p:sp>
+        <p:nvSpPr>
+          <p:cNvPr id="16" name="TextBox 15"/>
+          <p:cNvSpPr txBox="1"/>
+          <p:nvPr/>
+        </p:nvSpPr>
+        <p:spPr>
+          <a:xfrm>
+            <a:off x="4526280" y="1234440"/>
+            <a:ext cx="3200400" cy="365760"/>
           </a:xfrm>
           <a:prstGeom prst="rect">
             <a:avLst/>
@@ -3906,27 +4102,27 @@
           <a:p>
             <a:pPr algn="l"/>
             <a:r>
-              <a:rPr sz="1500" b="1">
-                <a:solidFill>
-                  <a:srgbClr val="2DD4BF"/>
-                </a:solidFill>
-                <a:latin typeface="Calibri"/>
-              </a:rPr>
-              <a:t>/api/schemes</a:t>
-            </a:r>
-          </a:p>
-        </p:txBody>
-      </p:sp>
-      <p:sp>
-        <p:nvSpPr>
-          <p:cNvPr id="11" name="TextBox 10"/>
-          <p:cNvSpPr txBox="1"/>
-          <p:nvPr/>
-        </p:nvSpPr>
-        <p:spPr>
-          <a:xfrm>
-            <a:off x="6675120" y="1920240"/>
-            <a:ext cx="4846320" cy="365760"/>
+              <a:rPr sz="1800" b="1">
+                <a:solidFill>
+                  <a:srgbClr val="FF8C42"/>
+                </a:solidFill>
+                <a:latin typeface="Calibri"/>
+              </a:rPr>
+              <a:t>Backend</a:t>
+            </a:r>
+          </a:p>
+        </p:txBody>
+      </p:sp>
+      <p:sp>
+        <p:nvSpPr>
+          <p:cNvPr id="17" name="TextBox 16"/>
+          <p:cNvSpPr txBox="1"/>
+          <p:nvPr/>
+        </p:nvSpPr>
+        <p:spPr>
+          <a:xfrm>
+            <a:off x="4617720" y="1783080"/>
+            <a:ext cx="3108960" cy="365760"/>
           </a:xfrm>
           <a:prstGeom prst="rect">
             <a:avLst/>
@@ -3947,32 +4143,279 @@
                 </a:solidFill>
                 <a:latin typeface="Calibri"/>
               </a:rPr>
-              <a:t>Filtered list (age, sector, income, search, state)</a:t>
-            </a:r>
-          </a:p>
-        </p:txBody>
-      </p:sp>
-      <p:sp>
-        <p:nvSpPr>
-          <p:cNvPr id="12" name="Rounded Rectangle 11"/>
+              <a:t>&gt;  Node.js</a:t>
+            </a:r>
+          </a:p>
+        </p:txBody>
+      </p:sp>
+      <p:sp>
+        <p:nvSpPr>
+          <p:cNvPr id="18" name="TextBox 17"/>
+          <p:cNvSpPr txBox="1"/>
+          <p:nvPr/>
+        </p:nvSpPr>
+        <p:spPr>
+          <a:xfrm>
+            <a:off x="4617720" y="2240280"/>
+            <a:ext cx="3108960" cy="365760"/>
+          </a:xfrm>
+          <a:prstGeom prst="rect">
+            <a:avLst/>
+          </a:prstGeom>
+          <a:noFill/>
+        </p:spPr>
+        <p:txBody>
+          <a:bodyPr wrap="square">
+            <a:spAutoFit/>
+          </a:bodyPr>
+          <a:lstStyle/>
+          <a:p>
+            <a:pPr algn="l"/>
+            <a:r>
+              <a:rPr sz="1400" b="0">
+                <a:solidFill>
+                  <a:srgbClr val="CBD5E1"/>
+                </a:solidFill>
+                <a:latin typeface="Calibri"/>
+              </a:rPr>
+              <a:t>&gt;  Express 5</a:t>
+            </a:r>
+          </a:p>
+        </p:txBody>
+      </p:sp>
+      <p:sp>
+        <p:nvSpPr>
+          <p:cNvPr id="19" name="TextBox 18"/>
+          <p:cNvSpPr txBox="1"/>
+          <p:nvPr/>
+        </p:nvSpPr>
+        <p:spPr>
+          <a:xfrm>
+            <a:off x="4617720" y="2697480"/>
+            <a:ext cx="3108960" cy="365760"/>
+          </a:xfrm>
+          <a:prstGeom prst="rect">
+            <a:avLst/>
+          </a:prstGeom>
+          <a:noFill/>
+        </p:spPr>
+        <p:txBody>
+          <a:bodyPr wrap="square">
+            <a:spAutoFit/>
+          </a:bodyPr>
+          <a:lstStyle/>
+          <a:p>
+            <a:pPr algn="l"/>
+            <a:r>
+              <a:rPr sz="1400" b="0">
+                <a:solidFill>
+                  <a:srgbClr val="CBD5E1"/>
+                </a:solidFill>
+                <a:latin typeface="Calibri"/>
+              </a:rPr>
+              <a:t>&gt;  mysql2 pool</a:t>
+            </a:r>
+          </a:p>
+        </p:txBody>
+      </p:sp>
+      <p:sp>
+        <p:nvSpPr>
+          <p:cNvPr id="20" name="TextBox 19"/>
+          <p:cNvSpPr txBox="1"/>
+          <p:nvPr/>
+        </p:nvSpPr>
+        <p:spPr>
+          <a:xfrm>
+            <a:off x="4617720" y="3154680"/>
+            <a:ext cx="3108960" cy="365760"/>
+          </a:xfrm>
+          <a:prstGeom prst="rect">
+            <a:avLst/>
+          </a:prstGeom>
+          <a:noFill/>
+        </p:spPr>
+        <p:txBody>
+          <a:bodyPr wrap="square">
+            <a:spAutoFit/>
+          </a:bodyPr>
+          <a:lstStyle/>
+          <a:p>
+            <a:pPr algn="l"/>
+            <a:r>
+              <a:rPr sz="1400" b="0">
+                <a:solidFill>
+                  <a:srgbClr val="CBD5E1"/>
+                </a:solidFill>
+                <a:latin typeface="Calibri"/>
+              </a:rPr>
+              <a:t>&gt;  dotenv</a:t>
+            </a:r>
+          </a:p>
+        </p:txBody>
+      </p:sp>
+      <p:sp>
+        <p:nvSpPr>
+          <p:cNvPr id="21" name="TextBox 20"/>
+          <p:cNvSpPr txBox="1"/>
+          <p:nvPr/>
+        </p:nvSpPr>
+        <p:spPr>
+          <a:xfrm>
+            <a:off x="4617720" y="3611880"/>
+            <a:ext cx="3108960" cy="365760"/>
+          </a:xfrm>
+          <a:prstGeom prst="rect">
+            <a:avLst/>
+          </a:prstGeom>
+          <a:noFill/>
+        </p:spPr>
+        <p:txBody>
+          <a:bodyPr wrap="square">
+            <a:spAutoFit/>
+          </a:bodyPr>
+          <a:lstStyle/>
+          <a:p>
+            <a:pPr algn="l"/>
+            <a:r>
+              <a:rPr sz="1400" b="0">
+                <a:solidFill>
+                  <a:srgbClr val="CBD5E1"/>
+                </a:solidFill>
+                <a:latin typeface="Calibri"/>
+              </a:rPr>
+              <a:t>&gt;  CORS</a:t>
+            </a:r>
+          </a:p>
+        </p:txBody>
+      </p:sp>
+      <p:sp>
+        <p:nvSpPr>
+          <p:cNvPr id="22" name="TextBox 21"/>
+          <p:cNvSpPr txBox="1"/>
+          <p:nvPr/>
+        </p:nvSpPr>
+        <p:spPr>
+          <a:xfrm>
+            <a:off x="4617720" y="4069080"/>
+            <a:ext cx="3108960" cy="365760"/>
+          </a:xfrm>
+          <a:prstGeom prst="rect">
+            <a:avLst/>
+          </a:prstGeom>
+          <a:noFill/>
+        </p:spPr>
+        <p:txBody>
+          <a:bodyPr wrap="square">
+            <a:spAutoFit/>
+          </a:bodyPr>
+          <a:lstStyle/>
+          <a:p>
+            <a:pPr algn="l"/>
+            <a:r>
+              <a:rPr sz="1400" b="0">
+                <a:solidFill>
+                  <a:srgbClr val="CBD5E1"/>
+                </a:solidFill>
+                <a:latin typeface="Calibri"/>
+              </a:rPr>
+              <a:t>&gt;  REST JSON API</a:t>
+            </a:r>
+          </a:p>
+        </p:txBody>
+      </p:sp>
+      <p:sp>
+        <p:nvSpPr>
+          <p:cNvPr id="23" name="TextBox 22"/>
+          <p:cNvSpPr txBox="1"/>
+          <p:nvPr/>
+        </p:nvSpPr>
+        <p:spPr>
+          <a:xfrm>
+            <a:off x="4617720" y="4526280"/>
+            <a:ext cx="3108960" cy="365760"/>
+          </a:xfrm>
+          <a:prstGeom prst="rect">
+            <a:avLst/>
+          </a:prstGeom>
+          <a:noFill/>
+        </p:spPr>
+        <p:txBody>
+          <a:bodyPr wrap="square">
+            <a:spAutoFit/>
+          </a:bodyPr>
+          <a:lstStyle/>
+          <a:p>
+            <a:pPr algn="l"/>
+            <a:r>
+              <a:rPr sz="1400" b="0">
+                <a:solidFill>
+                  <a:srgbClr val="CBD5E1"/>
+                </a:solidFill>
+                <a:latin typeface="Calibri"/>
+              </a:rPr>
+              <a:t>&gt;  pnpm monorepo</a:t>
+            </a:r>
+          </a:p>
+        </p:txBody>
+      </p:sp>
+      <p:sp>
+        <p:nvSpPr>
+          <p:cNvPr id="24" name="TextBox 23"/>
+          <p:cNvSpPr txBox="1"/>
+          <p:nvPr/>
+        </p:nvSpPr>
+        <p:spPr>
+          <a:xfrm>
+            <a:off x="4617720" y="4983480"/>
+            <a:ext cx="3108960" cy="365760"/>
+          </a:xfrm>
+          <a:prstGeom prst="rect">
+            <a:avLst/>
+          </a:prstGeom>
+          <a:noFill/>
+        </p:spPr>
+        <p:txBody>
+          <a:bodyPr wrap="square">
+            <a:spAutoFit/>
+          </a:bodyPr>
+          <a:lstStyle/>
+          <a:p>
+            <a:pPr algn="l"/>
+            <a:r>
+              <a:rPr sz="1400" b="0">
+                <a:solidFill>
+                  <a:srgbClr val="CBD5E1"/>
+                </a:solidFill>
+                <a:latin typeface="Calibri"/>
+              </a:rPr>
+              <a:t>&gt;  Typed API client</a:t>
+            </a:r>
+          </a:p>
+        </p:txBody>
+      </p:sp>
+      <p:sp>
+        <p:nvSpPr>
+          <p:cNvPr id="25" name="Rounded Rectangle 24"/>
           <p:cNvSpPr/>
           <p:nvPr/>
         </p:nvSpPr>
         <p:spPr>
           <a:xfrm>
-            <a:off x="548640" y="2542032"/>
-            <a:ext cx="822960" cy="365760"/>
+            <a:off x="8183880" y="1051560"/>
+            <a:ext cx="3703320" cy="4892040"/>
           </a:xfrm>
           <a:prstGeom prst="roundRect">
             <a:avLst>
-              <a:gd name="adj" fmla="val 50000"/>
+              <a:gd name="adj" fmla="val 8000"/>
             </a:avLst>
           </a:prstGeom>
           <a:solidFill>
-            <a:srgbClr val="34D399"/>
+            <a:srgbClr val="162A45"/>
           </a:solidFill>
           <a:ln>
-            <a:noFill/>
+            <a:solidFill>
+              <a:srgbClr val="2A3F5F"/>
+            </a:solidFill>
           </a:ln>
         </p:spPr>
         <p:style>
@@ -3990,32 +4433,23 @@
           </a:fontRef>
         </p:style>
         <p:txBody>
-          <a:bodyPr rtlCol="0" anchor="ctr" wrap="none"/>
+          <a:bodyPr rtlCol="0" anchor="ctr"/>
           <a:lstStyle/>
           <a:p>
             <a:pPr algn="ctr"/>
-            <a:r>
-              <a:rPr sz="1100" b="1">
-                <a:solidFill>
-                  <a:srgbClr val="0B1628"/>
-                </a:solidFill>
-                <a:latin typeface="Calibri"/>
-              </a:rPr>
-              <a:t>GET</a:t>
-            </a:r>
-          </a:p>
-        </p:txBody>
-      </p:sp>
-      <p:sp>
-        <p:nvSpPr>
-          <p:cNvPr id="13" name="TextBox 12"/>
-          <p:cNvSpPr txBox="1"/>
-          <p:nvPr/>
-        </p:nvSpPr>
-        <p:spPr>
-          <a:xfrm>
-            <a:off x="1554480" y="2560320"/>
-            <a:ext cx="5029200" cy="365760"/>
+          </a:p>
+        </p:txBody>
+      </p:sp>
+      <p:sp>
+        <p:nvSpPr>
+          <p:cNvPr id="26" name="TextBox 25"/>
+          <p:cNvSpPr txBox="1"/>
+          <p:nvPr/>
+        </p:nvSpPr>
+        <p:spPr>
+          <a:xfrm>
+            <a:off x="8412480" y="1234440"/>
+            <a:ext cx="3200400" cy="365760"/>
           </a:xfrm>
           <a:prstGeom prst="rect">
             <a:avLst/>
@@ -4030,27 +4464,27 @@
           <a:p>
             <a:pPr algn="l"/>
             <a:r>
-              <a:rPr sz="1500" b="1">
-                <a:solidFill>
-                  <a:srgbClr val="2DD4BF"/>
-                </a:solidFill>
-                <a:latin typeface="Calibri"/>
-              </a:rPr>
-              <a:t>/api/schemes/:id</a:t>
-            </a:r>
-          </a:p>
-        </p:txBody>
-      </p:sp>
-      <p:sp>
-        <p:nvSpPr>
-          <p:cNvPr id="14" name="TextBox 13"/>
-          <p:cNvSpPr txBox="1"/>
-          <p:nvPr/>
-        </p:nvSpPr>
-        <p:spPr>
-          <a:xfrm>
-            <a:off x="6675120" y="2560320"/>
-            <a:ext cx="4846320" cy="365760"/>
+              <a:rPr sz="1800" b="1">
+                <a:solidFill>
+                  <a:srgbClr val="FF8C42"/>
+                </a:solidFill>
+                <a:latin typeface="Calibri"/>
+              </a:rPr>
+              <a:t>Data and Ops</a:t>
+            </a:r>
+          </a:p>
+        </p:txBody>
+      </p:sp>
+      <p:sp>
+        <p:nvSpPr>
+          <p:cNvPr id="27" name="TextBox 26"/>
+          <p:cNvSpPr txBox="1"/>
+          <p:nvPr/>
+        </p:nvSpPr>
+        <p:spPr>
+          <a:xfrm>
+            <a:off x="8503920" y="1783080"/>
+            <a:ext cx="3108960" cy="365760"/>
           </a:xfrm>
           <a:prstGeom prst="rect">
             <a:avLst/>
@@ -4071,75 +4505,21 @@
                 </a:solidFill>
                 <a:latin typeface="Calibri"/>
               </a:rPr>
-              <a:t>Full scheme document</a:t>
-            </a:r>
-          </a:p>
-        </p:txBody>
-      </p:sp>
-      <p:sp>
-        <p:nvSpPr>
-          <p:cNvPr id="15" name="Rounded Rectangle 14"/>
-          <p:cNvSpPr/>
-          <p:nvPr/>
-        </p:nvSpPr>
-        <p:spPr>
-          <a:xfrm>
-            <a:off x="548640" y="3182111"/>
-            <a:ext cx="822960" cy="365760"/>
-          </a:xfrm>
-          <a:prstGeom prst="roundRect">
-            <a:avLst>
-              <a:gd name="adj" fmla="val 50000"/>
-            </a:avLst>
-          </a:prstGeom>
-          <a:solidFill>
-            <a:srgbClr val="34D399"/>
-          </a:solidFill>
-          <a:ln>
-            <a:noFill/>
-          </a:ln>
-        </p:spPr>
-        <p:style>
-          <a:lnRef idx="1">
-            <a:schemeClr val="accent1"/>
-          </a:lnRef>
-          <a:fillRef idx="3">
-            <a:schemeClr val="accent1"/>
-          </a:fillRef>
-          <a:effectRef idx="2">
-            <a:schemeClr val="accent1"/>
-          </a:effectRef>
-          <a:fontRef idx="minor">
-            <a:schemeClr val="lt1"/>
-          </a:fontRef>
-        </p:style>
-        <p:txBody>
-          <a:bodyPr rtlCol="0" anchor="ctr" wrap="none"/>
-          <a:lstStyle/>
-          <a:p>
-            <a:pPr algn="ctr"/>
-            <a:r>
-              <a:rPr sz="1100" b="1">
-                <a:solidFill>
-                  <a:srgbClr val="0B1628"/>
-                </a:solidFill>
-                <a:latin typeface="Calibri"/>
-              </a:rPr>
-              <a:t>GET</a:t>
-            </a:r>
-          </a:p>
-        </p:txBody>
-      </p:sp>
-      <p:sp>
-        <p:nvSpPr>
-          <p:cNvPr id="16" name="TextBox 15"/>
-          <p:cNvSpPr txBox="1"/>
-          <p:nvPr/>
-        </p:nvSpPr>
-        <p:spPr>
-          <a:xfrm>
-            <a:off x="1554480" y="3200399"/>
-            <a:ext cx="5029200" cy="365760"/>
+              <a:t>&gt;  MySQL 8 JSON</a:t>
+            </a:r>
+          </a:p>
+        </p:txBody>
+      </p:sp>
+      <p:sp>
+        <p:nvSpPr>
+          <p:cNvPr id="28" name="TextBox 27"/>
+          <p:cNvSpPr txBox="1"/>
+          <p:nvPr/>
+        </p:nvSpPr>
+        <p:spPr>
+          <a:xfrm>
+            <a:off x="8503920" y="2240280"/>
+            <a:ext cx="3108960" cy="365760"/>
           </a:xfrm>
           <a:prstGeom prst="rect">
             <a:avLst/>
@@ -4154,27 +4534,27 @@
           <a:p>
             <a:pPr algn="l"/>
             <a:r>
-              <a:rPr sz="1500" b="1">
-                <a:solidFill>
-                  <a:srgbClr val="2DD4BF"/>
-                </a:solidFill>
-                <a:latin typeface="Calibri"/>
-              </a:rPr>
-              <a:t>/api/schemes/:id/related</a:t>
-            </a:r>
-          </a:p>
-        </p:txBody>
-      </p:sp>
-      <p:sp>
-        <p:nvSpPr>
-          <p:cNvPr id="17" name="TextBox 16"/>
-          <p:cNvSpPr txBox="1"/>
-          <p:nvPr/>
-        </p:nvSpPr>
-        <p:spPr>
-          <a:xfrm>
-            <a:off x="6675120" y="3200399"/>
-            <a:ext cx="4846320" cy="365760"/>
+              <a:rPr sz="1400" b="0">
+                <a:solidFill>
+                  <a:srgbClr val="CBD5E1"/>
+                </a:solidFill>
+                <a:latin typeface="Calibri"/>
+              </a:rPr>
+              <a:t>&gt;  Seed SQL catalog</a:t>
+            </a:r>
+          </a:p>
+        </p:txBody>
+      </p:sp>
+      <p:sp>
+        <p:nvSpPr>
+          <p:cNvPr id="29" name="TextBox 28"/>
+          <p:cNvSpPr txBox="1"/>
+          <p:nvPr/>
+        </p:nvSpPr>
+        <p:spPr>
+          <a:xfrm>
+            <a:off x="8503920" y="2697480"/>
+            <a:ext cx="3108960" cy="365760"/>
           </a:xfrm>
           <a:prstGeom prst="rect">
             <a:avLst/>
@@ -4195,75 +4575,21 @@
                 </a:solidFill>
                 <a:latin typeface="Calibri"/>
               </a:rPr>
-              <a:t>Related / popular adjacency</a:t>
-            </a:r>
-          </a:p>
-        </p:txBody>
-      </p:sp>
-      <p:sp>
-        <p:nvSpPr>
-          <p:cNvPr id="18" name="Rounded Rectangle 17"/>
-          <p:cNvSpPr/>
-          <p:nvPr/>
-        </p:nvSpPr>
-        <p:spPr>
-          <a:xfrm>
-            <a:off x="548640" y="3822192"/>
-            <a:ext cx="822960" cy="365760"/>
-          </a:xfrm>
-          <a:prstGeom prst="roundRect">
-            <a:avLst>
-              <a:gd name="adj" fmla="val 50000"/>
-            </a:avLst>
-          </a:prstGeom>
-          <a:solidFill>
-            <a:srgbClr val="34D399"/>
-          </a:solidFill>
-          <a:ln>
-            <a:noFill/>
-          </a:ln>
-        </p:spPr>
-        <p:style>
-          <a:lnRef idx="1">
-            <a:schemeClr val="accent1"/>
-          </a:lnRef>
-          <a:fillRef idx="3">
-            <a:schemeClr val="accent1"/>
-          </a:fillRef>
-          <a:effectRef idx="2">
-            <a:schemeClr val="accent1"/>
-          </a:effectRef>
-          <a:fontRef idx="minor">
-            <a:schemeClr val="lt1"/>
-          </a:fontRef>
-        </p:style>
-        <p:txBody>
-          <a:bodyPr rtlCol="0" anchor="ctr" wrap="none"/>
-          <a:lstStyle/>
-          <a:p>
-            <a:pPr algn="ctr"/>
-            <a:r>
-              <a:rPr sz="1100" b="1">
-                <a:solidFill>
-                  <a:srgbClr val="0B1628"/>
-                </a:solidFill>
-                <a:latin typeface="Calibri"/>
-              </a:rPr>
-              <a:t>GET</a:t>
-            </a:r>
-          </a:p>
-        </p:txBody>
-      </p:sp>
-      <p:sp>
-        <p:nvSpPr>
-          <p:cNvPr id="19" name="TextBox 18"/>
-          <p:cNvSpPr txBox="1"/>
-          <p:nvPr/>
-        </p:nvSpPr>
-        <p:spPr>
-          <a:xfrm>
-            <a:off x="1554480" y="3840480"/>
-            <a:ext cx="5029200" cy="365760"/>
+              <a:t>&gt;  Nginx reverse proxy</a:t>
+            </a:r>
+          </a:p>
+        </p:txBody>
+      </p:sp>
+      <p:sp>
+        <p:nvSpPr>
+          <p:cNvPr id="30" name="TextBox 29"/>
+          <p:cNvSpPr txBox="1"/>
+          <p:nvPr/>
+        </p:nvSpPr>
+        <p:spPr>
+          <a:xfrm>
+            <a:off x="8503920" y="3154680"/>
+            <a:ext cx="3108960" cy="365760"/>
           </a:xfrm>
           <a:prstGeom prst="rect">
             <a:avLst/>
@@ -4278,27 +4604,27 @@
           <a:p>
             <a:pPr algn="l"/>
             <a:r>
-              <a:rPr sz="1500" b="1">
-                <a:solidFill>
-                  <a:srgbClr val="2DD4BF"/>
-                </a:solidFill>
-                <a:latin typeface="Calibri"/>
-              </a:rPr>
-              <a:t>/api/schemes/popular</a:t>
-            </a:r>
-          </a:p>
-        </p:txBody>
-      </p:sp>
-      <p:sp>
-        <p:nvSpPr>
-          <p:cNvPr id="20" name="TextBox 19"/>
-          <p:cNvSpPr txBox="1"/>
-          <p:nvPr/>
-        </p:nvSpPr>
-        <p:spPr>
-          <a:xfrm>
-            <a:off x="6675120" y="3840480"/>
-            <a:ext cx="4846320" cy="365760"/>
+              <a:rPr sz="1400" b="0">
+                <a:solidFill>
+                  <a:srgbClr val="CBD5E1"/>
+                </a:solidFill>
+                <a:latin typeface="Calibri"/>
+              </a:rPr>
+              <a:t>&gt;  Static SPA build</a:t>
+            </a:r>
+          </a:p>
+        </p:txBody>
+      </p:sp>
+      <p:sp>
+        <p:nvSpPr>
+          <p:cNvPr id="31" name="TextBox 30"/>
+          <p:cNvSpPr txBox="1"/>
+          <p:nvPr/>
+        </p:nvSpPr>
+        <p:spPr>
+          <a:xfrm>
+            <a:off x="8503920" y="3611880"/>
+            <a:ext cx="3108960" cy="365760"/>
           </a:xfrm>
           <a:prstGeom prst="rect">
             <a:avLst/>
@@ -4319,75 +4645,21 @@
                 </a:solidFill>
                 <a:latin typeface="Calibri"/>
               </a:rPr>
-              <a:t>Top-N by popularity_score</a:t>
-            </a:r>
-          </a:p>
-        </p:txBody>
-      </p:sp>
-      <p:sp>
-        <p:nvSpPr>
-          <p:cNvPr id="21" name="Rounded Rectangle 20"/>
-          <p:cNvSpPr/>
-          <p:nvPr/>
-        </p:nvSpPr>
-        <p:spPr>
-          <a:xfrm>
-            <a:off x="548640" y="4462272"/>
-            <a:ext cx="822960" cy="365760"/>
-          </a:xfrm>
-          <a:prstGeom prst="roundRect">
-            <a:avLst>
-              <a:gd name="adj" fmla="val 50000"/>
-            </a:avLst>
-          </a:prstGeom>
-          <a:solidFill>
-            <a:srgbClr val="34D399"/>
-          </a:solidFill>
-          <a:ln>
-            <a:noFill/>
-          </a:ln>
-        </p:spPr>
-        <p:style>
-          <a:lnRef idx="1">
-            <a:schemeClr val="accent1"/>
-          </a:lnRef>
-          <a:fillRef idx="3">
-            <a:schemeClr val="accent1"/>
-          </a:fillRef>
-          <a:effectRef idx="2">
-            <a:schemeClr val="accent1"/>
-          </a:effectRef>
-          <a:fontRef idx="minor">
-            <a:schemeClr val="lt1"/>
-          </a:fontRef>
-        </p:style>
-        <p:txBody>
-          <a:bodyPr rtlCol="0" anchor="ctr" wrap="none"/>
-          <a:lstStyle/>
-          <a:p>
-            <a:pPr algn="ctr"/>
-            <a:r>
-              <a:rPr sz="1100" b="1">
-                <a:solidFill>
-                  <a:srgbClr val="0B1628"/>
-                </a:solidFill>
-                <a:latin typeface="Calibri"/>
-              </a:rPr>
-              <a:t>GET</a:t>
-            </a:r>
-          </a:p>
-        </p:txBody>
-      </p:sp>
-      <p:sp>
-        <p:nvSpPr>
-          <p:cNvPr id="22" name="TextBox 21"/>
-          <p:cNvSpPr txBox="1"/>
-          <p:nvPr/>
-        </p:nvSpPr>
-        <p:spPr>
-          <a:xfrm>
-            <a:off x="1554480" y="4480560"/>
-            <a:ext cx="5029200" cy="365760"/>
+              <a:t>&gt;  Healthz endpoint</a:t>
+            </a:r>
+          </a:p>
+        </p:txBody>
+      </p:sp>
+      <p:sp>
+        <p:nvSpPr>
+          <p:cNvPr id="32" name="TextBox 31"/>
+          <p:cNvSpPr txBox="1"/>
+          <p:nvPr/>
+        </p:nvSpPr>
+        <p:spPr>
+          <a:xfrm>
+            <a:off x="8503920" y="4069080"/>
+            <a:ext cx="3108960" cy="365760"/>
           </a:xfrm>
           <a:prstGeom prst="rect">
             <a:avLst/>
@@ -4402,27 +4674,27 @@
           <a:p>
             <a:pPr algn="l"/>
             <a:r>
-              <a:rPr sz="1500" b="1">
-                <a:solidFill>
-                  <a:srgbClr val="2DD4BF"/>
-                </a:solidFill>
-                <a:latin typeface="Calibri"/>
-              </a:rPr>
-              <a:t>/api/schemes/stats</a:t>
-            </a:r>
-          </a:p>
-        </p:txBody>
-      </p:sp>
-      <p:sp>
-        <p:nvSpPr>
-          <p:cNvPr id="23" name="TextBox 22"/>
-          <p:cNvSpPr txBox="1"/>
-          <p:nvPr/>
-        </p:nvSpPr>
-        <p:spPr>
-          <a:xfrm>
-            <a:off x="6675120" y="4480560"/>
-            <a:ext cx="4846320" cy="365760"/>
+              <a:rPr sz="1400" b="0">
+                <a:solidFill>
+                  <a:srgbClr val="CBD5E1"/>
+                </a:solidFill>
+                <a:latin typeface="Calibri"/>
+              </a:rPr>
+              <a:t>&gt;  Env-based config</a:t>
+            </a:r>
+          </a:p>
+        </p:txBody>
+      </p:sp>
+      <p:sp>
+        <p:nvSpPr>
+          <p:cNvPr id="33" name="TextBox 32"/>
+          <p:cNvSpPr txBox="1"/>
+          <p:nvPr/>
+        </p:nvSpPr>
+        <p:spPr>
+          <a:xfrm>
+            <a:off x="8503920" y="4526280"/>
+            <a:ext cx="3108960" cy="365760"/>
           </a:xfrm>
           <a:prstGeom prst="rect">
             <a:avLst/>
@@ -4443,75 +4715,21 @@
                 </a:solidFill>
                 <a:latin typeface="Calibri"/>
               </a:rPr>
-              <a:t>Aggregate KPIs for dashboard</a:t>
-            </a:r>
-          </a:p>
-        </p:txBody>
-      </p:sp>
-      <p:sp>
-        <p:nvSpPr>
-          <p:cNvPr id="24" name="Rounded Rectangle 23"/>
-          <p:cNvSpPr/>
-          <p:nvPr/>
-        </p:nvSpPr>
-        <p:spPr>
-          <a:xfrm>
-            <a:off x="548640" y="5102351"/>
-            <a:ext cx="822960" cy="365760"/>
-          </a:xfrm>
-          <a:prstGeom prst="roundRect">
-            <a:avLst>
-              <a:gd name="adj" fmla="val 50000"/>
-            </a:avLst>
-          </a:prstGeom>
-          <a:solidFill>
-            <a:srgbClr val="34D399"/>
-          </a:solidFill>
-          <a:ln>
-            <a:noFill/>
-          </a:ln>
-        </p:spPr>
-        <p:style>
-          <a:lnRef idx="1">
-            <a:schemeClr val="accent1"/>
-          </a:lnRef>
-          <a:fillRef idx="3">
-            <a:schemeClr val="accent1"/>
-          </a:fillRef>
-          <a:effectRef idx="2">
-            <a:schemeClr val="accent1"/>
-          </a:effectRef>
-          <a:fontRef idx="minor">
-            <a:schemeClr val="lt1"/>
-          </a:fontRef>
-        </p:style>
-        <p:txBody>
-          <a:bodyPr rtlCol="0" anchor="ctr" wrap="none"/>
-          <a:lstStyle/>
-          <a:p>
-            <a:pPr algn="ctr"/>
-            <a:r>
-              <a:rPr sz="1100" b="1">
-                <a:solidFill>
-                  <a:srgbClr val="0B1628"/>
-                </a:solidFill>
-                <a:latin typeface="Calibri"/>
-              </a:rPr>
-              <a:t>GET</a:t>
-            </a:r>
-          </a:p>
-        </p:txBody>
-      </p:sp>
-      <p:sp>
-        <p:nvSpPr>
-          <p:cNvPr id="25" name="TextBox 24"/>
-          <p:cNvSpPr txBox="1"/>
-          <p:nvPr/>
-        </p:nvSpPr>
-        <p:spPr>
-          <a:xfrm>
-            <a:off x="1554480" y="5120639"/>
-            <a:ext cx="5029200" cy="365760"/>
+              <a:t>&gt;  HTTPS live deploy</a:t>
+            </a:r>
+          </a:p>
+        </p:txBody>
+      </p:sp>
+      <p:sp>
+        <p:nvSpPr>
+          <p:cNvPr id="34" name="TextBox 33"/>
+          <p:cNvSpPr txBox="1"/>
+          <p:nvPr/>
+        </p:nvSpPr>
+        <p:spPr>
+          <a:xfrm>
+            <a:off x="8503920" y="4983480"/>
+            <a:ext cx="3108960" cy="365760"/>
           </a:xfrm>
           <a:prstGeom prst="rect">
             <a:avLst/>
@@ -4526,62 +4744,27 @@
           <a:p>
             <a:pPr algn="l"/>
             <a:r>
-              <a:rPr sz="1500" b="1">
-                <a:solidFill>
-                  <a:srgbClr val="2DD4BF"/>
-                </a:solidFill>
-                <a:latin typeface="Calibri"/>
-              </a:rPr>
-              <a:t>/api/sectors</a:t>
-            </a:r>
-          </a:p>
-        </p:txBody>
-      </p:sp>
-      <p:sp>
-        <p:nvSpPr>
-          <p:cNvPr id="26" name="TextBox 25"/>
-          <p:cNvSpPr txBox="1"/>
-          <p:nvPr/>
-        </p:nvSpPr>
-        <p:spPr>
-          <a:xfrm>
-            <a:off x="6675120" y="5120639"/>
-            <a:ext cx="4846320" cy="365760"/>
-          </a:xfrm>
-          <a:prstGeom prst="rect">
-            <a:avLst/>
-          </a:prstGeom>
-          <a:noFill/>
-        </p:spPr>
-        <p:txBody>
-          <a:bodyPr wrap="square">
-            <a:spAutoFit/>
-          </a:bodyPr>
-          <a:lstStyle/>
-          <a:p>
-            <a:pPr algn="l"/>
-            <a:r>
               <a:rPr sz="1400" b="0">
                 <a:solidFill>
                   <a:srgbClr val="CBD5E1"/>
                 </a:solidFill>
                 <a:latin typeface="Calibri"/>
               </a:rPr>
-              <a:t>Sector taxonomy (+ age filter)</a:t>
-            </a:r>
-          </a:p>
-        </p:txBody>
-      </p:sp>
-      <p:sp>
-        <p:nvSpPr>
-          <p:cNvPr id="27" name="TextBox 26"/>
-          <p:cNvSpPr txBox="1"/>
-          <p:nvPr/>
-        </p:nvSpPr>
-        <p:spPr>
-          <a:xfrm>
-            <a:off x="457200" y="6446520"/>
-            <a:ext cx="9144000" cy="274320"/>
+              <a:t>&gt;  Mobile-first UX</a:t>
+            </a:r>
+          </a:p>
+        </p:txBody>
+      </p:sp>
+      <p:sp>
+        <p:nvSpPr>
+          <p:cNvPr id="35" name="TextBox 34"/>
+          <p:cNvSpPr txBox="1"/>
+          <p:nvPr/>
+        </p:nvSpPr>
+        <p:spPr>
+          <a:xfrm>
+            <a:off x="457200" y="6473952"/>
+            <a:ext cx="9601200" cy="256032"/>
           </a:xfrm>
           <a:prstGeom prst="rect">
             <a:avLst/>
@@ -4601,21 +4784,21 @@
                 </a:solidFill>
                 <a:latin typeface="Calibri"/>
               </a:rPr>
-              <a:t>YojanaConnect  ·  Live: yojnaconnect.prakharkr.online  ·  Confidential pitch</a:t>
-            </a:r>
-          </a:p>
-        </p:txBody>
-      </p:sp>
-      <p:sp>
-        <p:nvSpPr>
-          <p:cNvPr id="28" name="TextBox 27"/>
-          <p:cNvSpPr txBox="1"/>
-          <p:nvPr/>
-        </p:nvSpPr>
-        <p:spPr>
-          <a:xfrm>
-            <a:off x="10789920" y="6446520"/>
-            <a:ext cx="1097280" cy="274320"/>
+              <a:t>YojanaConnect  |  https://yojnaconnect.prakharkr.online/schemes  |  Technical Pitch</a:t>
+            </a:r>
+          </a:p>
+        </p:txBody>
+      </p:sp>
+      <p:sp>
+        <p:nvSpPr>
+          <p:cNvPr id="36" name="TextBox 35"/>
+          <p:cNvSpPr txBox="1"/>
+          <p:nvPr/>
+        </p:nvSpPr>
+        <p:spPr>
+          <a:xfrm>
+            <a:off x="10698480" y="6473952"/>
+            <a:ext cx="1188720" cy="256032"/>
           </a:xfrm>
           <a:prstGeom prst="rect">
             <a:avLst/>
@@ -4636,7 +4819,7 @@
                 </a:solidFill>
                 <a:latin typeface="Calibri"/>
               </a:rPr>
-              <a:t>10 / 16</a:t>
+              <a:t>10/16</a:t>
             </a:r>
           </a:p>
         </p:txBody>
@@ -4754,7 +4937,7 @@
         <p:spPr>
           <a:xfrm>
             <a:off x="457200" y="274320"/>
-            <a:ext cx="10972800" cy="411480"/>
+            <a:ext cx="10972800" cy="365760"/>
           </a:xfrm>
           <a:prstGeom prst="rect">
             <a:avLst/>
@@ -4769,40 +4952,73 @@
           <a:p>
             <a:pPr algn="l"/>
             <a:r>
-              <a:rPr sz="2600" b="1">
+              <a:rPr sz="2800" b="1">
                 <a:solidFill>
                   <a:srgbClr val="F8FAFC"/>
                 </a:solidFill>
                 <a:latin typeface="Calibri"/>
               </a:rPr>
-              <a:t>Data Model — Flexible Scheme Knowledge Base</a:t>
-            </a:r>
-          </a:p>
-        </p:txBody>
-      </p:sp>
-      <p:sp>
-        <p:nvSpPr>
-          <p:cNvPr id="5" name="Rounded Rectangle 4"/>
+              <a:t>API Surface</a:t>
+            </a:r>
+          </a:p>
+        </p:txBody>
+      </p:sp>
+      <p:sp>
+        <p:nvSpPr>
+          <p:cNvPr id="5" name="TextBox 4"/>
+          <p:cNvSpPr txBox="1"/>
+          <p:nvPr/>
+        </p:nvSpPr>
+        <p:spPr>
+          <a:xfrm>
+            <a:off x="457200" y="777240"/>
+            <a:ext cx="10972800" cy="274320"/>
+          </a:xfrm>
+          <a:prstGeom prst="rect">
+            <a:avLst/>
+          </a:prstGeom>
+          <a:noFill/>
+        </p:spPr>
+        <p:txBody>
+          <a:bodyPr wrap="square">
+            <a:spAutoFit/>
+          </a:bodyPr>
+          <a:lstStyle/>
+          <a:p>
+            <a:pPr algn="l"/>
+            <a:r>
+              <a:rPr sz="1400" b="0">
+                <a:solidFill>
+                  <a:srgbClr val="94A3B8"/>
+                </a:solidFill>
+                <a:latin typeface="Calibri"/>
+              </a:rPr>
+              <a:t>Read-optimized REST endpoints ready for web, CSC apps, or future WhatsApp bots</a:t>
+            </a:r>
+          </a:p>
+        </p:txBody>
+      </p:sp>
+      <p:sp>
+        <p:nvSpPr>
+          <p:cNvPr id="6" name="Rounded Rectangle 5"/>
           <p:cNvSpPr/>
           <p:nvPr/>
         </p:nvSpPr>
         <p:spPr>
           <a:xfrm>
-            <a:off x="457200" y="1051560"/>
-            <a:ext cx="5577840" cy="4846320"/>
+            <a:off x="548640" y="1261872"/>
+            <a:ext cx="822960" cy="365760"/>
           </a:xfrm>
           <a:prstGeom prst="roundRect">
             <a:avLst>
-              <a:gd name="adj" fmla="val 8000"/>
+              <a:gd name="adj" fmla="val 50000"/>
             </a:avLst>
           </a:prstGeom>
           <a:solidFill>
-            <a:srgbClr val="162A45"/>
+            <a:srgbClr val="34D399"/>
           </a:solidFill>
           <a:ln>
-            <a:solidFill>
-              <a:srgbClr val="2A3F5F"/>
-            </a:solidFill>
+            <a:noFill/>
           </a:ln>
         </p:spPr>
         <p:style>
@@ -4820,22 +5036,31 @@
           </a:fontRef>
         </p:style>
         <p:txBody>
-          <a:bodyPr rtlCol="0" anchor="ctr"/>
+          <a:bodyPr rtlCol="0" anchor="ctr" wrap="none"/>
           <a:lstStyle/>
           <a:p>
             <a:pPr algn="ctr"/>
-          </a:p>
-        </p:txBody>
-      </p:sp>
-      <p:sp>
-        <p:nvSpPr>
-          <p:cNvPr id="6" name="TextBox 5"/>
-          <p:cNvSpPr txBox="1"/>
-          <p:nvPr/>
-        </p:nvSpPr>
-        <p:spPr>
-          <a:xfrm>
-            <a:off x="731520" y="1234440"/>
+            <a:r>
+              <a:rPr sz="1100" b="1">
+                <a:solidFill>
+                  <a:srgbClr val="0B1628"/>
+                </a:solidFill>
+                <a:latin typeface="Calibri"/>
+              </a:rPr>
+              <a:t>GET</a:t>
+            </a:r>
+          </a:p>
+        </p:txBody>
+      </p:sp>
+      <p:sp>
+        <p:nvSpPr>
+          <p:cNvPr id="7" name="TextBox 6"/>
+          <p:cNvSpPr txBox="1"/>
+          <p:nvPr/>
+        </p:nvSpPr>
+        <p:spPr>
+          <a:xfrm>
+            <a:off x="1554480" y="1280160"/>
             <a:ext cx="5029200" cy="365760"/>
           </a:xfrm>
           <a:prstGeom prst="rect">
@@ -4851,44 +5076,40 @@
           <a:p>
             <a:pPr algn="l"/>
             <a:r>
-              <a:rPr sz="1800" b="1">
-                <a:solidFill>
-                  <a:srgbClr val="FF8C42"/>
-                </a:solidFill>
-                <a:latin typeface="Calibri"/>
-              </a:rPr>
-              <a:t>schemes</a:t>
-            </a:r>
-          </a:p>
-        </p:txBody>
-      </p:sp>
-      <p:sp>
-        <p:nvSpPr>
-          <p:cNvPr id="7" name="TextBox 6"/>
-          <p:cNvSpPr txBox="1"/>
-          <p:nvPr/>
-        </p:nvSpPr>
-        <p:spPr>
-          <a:xfrm>
-            <a:off x="731520" y="1737360"/>
-            <a:ext cx="5029200" cy="3931920"/>
-          </a:xfrm>
-          <a:prstGeom prst="rect">
-            <a:avLst/>
-          </a:prstGeom>
-          <a:noFill/>
-        </p:spPr>
-        <p:txBody>
-          <a:bodyPr wrap="square">
-            <a:spAutoFit/>
-          </a:bodyPr>
-          <a:lstStyle/>
-          <a:p>
-            <a:pPr algn="l">
-              <a:spcAft>
-                <a:spcPts val="600"/>
-              </a:spcAft>
-            </a:pPr>
+              <a:rPr sz="1500" b="1">
+                <a:solidFill>
+                  <a:srgbClr val="2DD4BF"/>
+                </a:solidFill>
+                <a:latin typeface="Calibri"/>
+              </a:rPr>
+              <a:t>/api/healthz</a:t>
+            </a:r>
+          </a:p>
+        </p:txBody>
+      </p:sp>
+      <p:sp>
+        <p:nvSpPr>
+          <p:cNvPr id="8" name="TextBox 7"/>
+          <p:cNvSpPr txBox="1"/>
+          <p:nvPr/>
+        </p:nvSpPr>
+        <p:spPr>
+          <a:xfrm>
+            <a:off x="6675120" y="1280160"/>
+            <a:ext cx="4846320" cy="365760"/>
+          </a:xfrm>
+          <a:prstGeom prst="rect">
+            <a:avLst/>
+          </a:prstGeom>
+          <a:noFill/>
+        </p:spPr>
+        <p:txBody>
+          <a:bodyPr wrap="square">
+            <a:spAutoFit/>
+          </a:bodyPr>
+          <a:lstStyle/>
+          <a:p>
+            <a:pPr algn="l"/>
             <a:r>
               <a:rPr sz="1400" b="0">
                 <a:solidFill>
@@ -4896,130 +5117,32 @@
                 </a:solidFill>
                 <a:latin typeface="Calibri"/>
               </a:rPr>
-              <a:t>id · name · name_hindi · ministry</a:t>
-            </a:r>
-          </a:p>
-          <a:p>
-            <a:pPr algn="l">
-              <a:spcAft>
-                <a:spcPts val="600"/>
-              </a:spcAft>
-            </a:pPr>
-            <a:r>
-              <a:rPr sz="1400" b="0">
-                <a:solidFill>
-                  <a:srgbClr val="CBD5E1"/>
-                </a:solidFill>
-                <a:latin typeface="Calibri"/>
-              </a:rPr>
-              <a:t>age_groups (JSON) · sectors (JSON)</a:t>
-            </a:r>
-          </a:p>
-          <a:p>
-            <a:pPr algn="l">
-              <a:spcAft>
-                <a:spcPts val="600"/>
-              </a:spcAft>
-            </a:pPr>
-            <a:r>
-              <a:rPr sz="1400" b="0">
-                <a:solidFill>
-                  <a:srgbClr val="CBD5E1"/>
-                </a:solidFill>
-                <a:latin typeface="Calibri"/>
-              </a:rPr>
-              <a:t>income_limit · categories · benefit</a:t>
-            </a:r>
-          </a:p>
-          <a:p>
-            <a:pPr algn="l">
-              <a:spcAft>
-                <a:spcPts val="600"/>
-              </a:spcAft>
-            </a:pPr>
-            <a:r>
-              <a:rPr sz="1400" b="0">
-                <a:solidFill>
-                  <a:srgbClr val="CBD5E1"/>
-                </a:solidFill>
-                <a:latin typeface="Calibri"/>
-              </a:rPr>
-              <a:t>eligibility / documents (JSON arrays)</a:t>
-            </a:r>
-          </a:p>
-          <a:p>
-            <a:pPr algn="l">
-              <a:spcAft>
-                <a:spcPts val="600"/>
-              </a:spcAft>
-            </a:pPr>
-            <a:r>
-              <a:rPr sz="1400" b="0">
-                <a:solidFill>
-                  <a:srgbClr val="CBD5E1"/>
-                </a:solidFill>
-                <a:latin typeface="Calibri"/>
-              </a:rPr>
-              <a:t>how_to_apply · official_link · deadline</a:t>
-            </a:r>
-          </a:p>
-          <a:p>
-            <a:pPr algn="l">
-              <a:spcAft>
-                <a:spcPts val="600"/>
-              </a:spcAft>
-            </a:pPr>
-            <a:r>
-              <a:rPr sz="1400" b="0">
-                <a:solidFill>
-                  <a:srgbClr val="CBD5E1"/>
-                </a:solidFill>
-                <a:latin typeface="Calibri"/>
-              </a:rPr>
-              <a:t>terms_and_conditions · tags</a:t>
-            </a:r>
-          </a:p>
-          <a:p>
-            <a:pPr algn="l">
-              <a:spcAft>
-                <a:spcPts val="600"/>
-              </a:spcAft>
-            </a:pPr>
-            <a:r>
-              <a:rPr sz="1400" b="0">
-                <a:solidFill>
-                  <a:srgbClr val="CBD5E1"/>
-                </a:solidFill>
-                <a:latin typeface="Calibri"/>
-              </a:rPr>
-              <a:t>is_state · state · popularity_score</a:t>
-            </a:r>
-          </a:p>
-        </p:txBody>
-      </p:sp>
-      <p:sp>
-        <p:nvSpPr>
-          <p:cNvPr id="8" name="Rounded Rectangle 7"/>
+              <a:t>Health / liveness probe</a:t>
+            </a:r>
+          </a:p>
+        </p:txBody>
+      </p:sp>
+      <p:sp>
+        <p:nvSpPr>
+          <p:cNvPr id="9" name="Rounded Rectangle 8"/>
           <p:cNvSpPr/>
           <p:nvPr/>
         </p:nvSpPr>
         <p:spPr>
           <a:xfrm>
-            <a:off x="6309360" y="1051560"/>
-            <a:ext cx="5394960" cy="2194560"/>
+            <a:off x="548640" y="1901952"/>
+            <a:ext cx="822960" cy="365760"/>
           </a:xfrm>
           <a:prstGeom prst="roundRect">
             <a:avLst>
-              <a:gd name="adj" fmla="val 8000"/>
+              <a:gd name="adj" fmla="val 50000"/>
             </a:avLst>
           </a:prstGeom>
           <a:solidFill>
-            <a:srgbClr val="162A45"/>
+            <a:srgbClr val="34D399"/>
           </a:solidFill>
           <a:ln>
-            <a:solidFill>
-              <a:srgbClr val="2A3F5F"/>
-            </a:solidFill>
+            <a:noFill/>
           </a:ln>
         </p:spPr>
         <p:style>
@@ -5037,22 +5160,66 @@
           </a:fontRef>
         </p:style>
         <p:txBody>
-          <a:bodyPr rtlCol="0" anchor="ctr"/>
+          <a:bodyPr rtlCol="0" anchor="ctr" wrap="none"/>
           <a:lstStyle/>
           <a:p>
             <a:pPr algn="ctr"/>
-          </a:p>
-        </p:txBody>
-      </p:sp>
-      <p:sp>
-        <p:nvSpPr>
-          <p:cNvPr id="9" name="TextBox 8"/>
-          <p:cNvSpPr txBox="1"/>
-          <p:nvPr/>
-        </p:nvSpPr>
-        <p:spPr>
-          <a:xfrm>
-            <a:off x="6583680" y="1234440"/>
+            <a:r>
+              <a:rPr sz="1100" b="1">
+                <a:solidFill>
+                  <a:srgbClr val="0B1628"/>
+                </a:solidFill>
+                <a:latin typeface="Calibri"/>
+              </a:rPr>
+              <a:t>GET</a:t>
+            </a:r>
+          </a:p>
+        </p:txBody>
+      </p:sp>
+      <p:sp>
+        <p:nvSpPr>
+          <p:cNvPr id="10" name="TextBox 9"/>
+          <p:cNvSpPr txBox="1"/>
+          <p:nvPr/>
+        </p:nvSpPr>
+        <p:spPr>
+          <a:xfrm>
+            <a:off x="1554480" y="1920240"/>
+            <a:ext cx="5029200" cy="365760"/>
+          </a:xfrm>
+          <a:prstGeom prst="rect">
+            <a:avLst/>
+          </a:prstGeom>
+          <a:noFill/>
+        </p:spPr>
+        <p:txBody>
+          <a:bodyPr wrap="square">
+            <a:spAutoFit/>
+          </a:bodyPr>
+          <a:lstStyle/>
+          <a:p>
+            <a:pPr algn="l"/>
+            <a:r>
+              <a:rPr sz="1500" b="1">
+                <a:solidFill>
+                  <a:srgbClr val="2DD4BF"/>
+                </a:solidFill>
+                <a:latin typeface="Calibri"/>
+              </a:rPr>
+              <a:t>/api/schemes</a:t>
+            </a:r>
+          </a:p>
+        </p:txBody>
+      </p:sp>
+      <p:sp>
+        <p:nvSpPr>
+          <p:cNvPr id="11" name="TextBox 10"/>
+          <p:cNvSpPr txBox="1"/>
+          <p:nvPr/>
+        </p:nvSpPr>
+        <p:spPr>
+          <a:xfrm>
+            <a:off x="6675120" y="1920240"/>
             <a:ext cx="4846320" cy="365760"/>
           </a:xfrm>
           <a:prstGeom prst="rect">
@@ -5068,95 +5235,38 @@
           <a:p>
             <a:pPr algn="l"/>
             <a:r>
-              <a:rPr sz="1800" b="1">
-                <a:solidFill>
-                  <a:srgbClr val="2DD4BF"/>
-                </a:solidFill>
-                <a:latin typeface="Calibri"/>
-              </a:rPr>
-              <a:t>sectors</a:t>
-            </a:r>
-          </a:p>
-        </p:txBody>
-      </p:sp>
-      <p:sp>
-        <p:nvSpPr>
-          <p:cNvPr id="10" name="TextBox 9"/>
-          <p:cNvSpPr txBox="1"/>
-          <p:nvPr/>
-        </p:nvSpPr>
-        <p:spPr>
-          <a:xfrm>
-            <a:off x="6583680" y="1737360"/>
-            <a:ext cx="4846320" cy="1280160"/>
-          </a:xfrm>
-          <a:prstGeom prst="rect">
-            <a:avLst/>
-          </a:prstGeom>
-          <a:noFill/>
-        </p:spPr>
-        <p:txBody>
-          <a:bodyPr wrap="square">
-            <a:spAutoFit/>
-          </a:bodyPr>
-          <a:lstStyle/>
-          <a:p>
-            <a:pPr algn="l">
-              <a:spcAft>
-                <a:spcPts val="600"/>
-              </a:spcAft>
-            </a:pPr>
-            <a:r>
               <a:rPr sz="1400" b="0">
                 <a:solidFill>
                   <a:srgbClr val="CBD5E1"/>
                 </a:solidFill>
                 <a:latin typeface="Calibri"/>
               </a:rPr>
-              <a:t>sector_id · name · name_hindi</a:t>
-            </a:r>
-          </a:p>
-          <a:p>
-            <a:pPr algn="l">
-              <a:spcAft>
-                <a:spcPts val="600"/>
-              </a:spcAft>
-            </a:pPr>
-            <a:r>
-              <a:rPr sz="1400" b="0">
-                <a:solidFill>
-                  <a:srgbClr val="CBD5E1"/>
-                </a:solidFill>
-                <a:latin typeface="Calibri"/>
-              </a:rPr>
-              <a:t>age_groups (JSON) · icon</a:t>
-            </a:r>
-          </a:p>
-        </p:txBody>
-      </p:sp>
-      <p:sp>
-        <p:nvSpPr>
-          <p:cNvPr id="11" name="Rounded Rectangle 10"/>
+              <a:t>Filtered list by age, sector, income, search, state</a:t>
+            </a:r>
+          </a:p>
+        </p:txBody>
+      </p:sp>
+      <p:sp>
+        <p:nvSpPr>
+          <p:cNvPr id="12" name="Rounded Rectangle 11"/>
           <p:cNvSpPr/>
           <p:nvPr/>
         </p:nvSpPr>
         <p:spPr>
           <a:xfrm>
-            <a:off x="6309360" y="3474720"/>
-            <a:ext cx="5394960" cy="2423160"/>
+            <a:off x="548640" y="2542032"/>
+            <a:ext cx="822960" cy="365760"/>
           </a:xfrm>
           <a:prstGeom prst="roundRect">
             <a:avLst>
-              <a:gd name="adj" fmla="val 8000"/>
+              <a:gd name="adj" fmla="val 50000"/>
             </a:avLst>
           </a:prstGeom>
           <a:solidFill>
-            <a:srgbClr val="162A45"/>
+            <a:srgbClr val="34D399"/>
           </a:solidFill>
           <a:ln>
-            <a:solidFill>
-              <a:srgbClr val="2A3F5F"/>
-            </a:solidFill>
+            <a:noFill/>
           </a:ln>
         </p:spPr>
         <p:style>
@@ -5174,22 +5284,66 @@
           </a:fontRef>
         </p:style>
         <p:txBody>
-          <a:bodyPr rtlCol="0" anchor="ctr"/>
+          <a:bodyPr rtlCol="0" anchor="ctr" wrap="none"/>
           <a:lstStyle/>
           <a:p>
             <a:pPr algn="ctr"/>
-          </a:p>
-        </p:txBody>
-      </p:sp>
-      <p:sp>
-        <p:nvSpPr>
-          <p:cNvPr id="12" name="TextBox 11"/>
-          <p:cNvSpPr txBox="1"/>
-          <p:nvPr/>
-        </p:nvSpPr>
-        <p:spPr>
-          <a:xfrm>
-            <a:off x="6583680" y="3657600"/>
+            <a:r>
+              <a:rPr sz="1100" b="1">
+                <a:solidFill>
+                  <a:srgbClr val="0B1628"/>
+                </a:solidFill>
+                <a:latin typeface="Calibri"/>
+              </a:rPr>
+              <a:t>GET</a:t>
+            </a:r>
+          </a:p>
+        </p:txBody>
+      </p:sp>
+      <p:sp>
+        <p:nvSpPr>
+          <p:cNvPr id="13" name="TextBox 12"/>
+          <p:cNvSpPr txBox="1"/>
+          <p:nvPr/>
+        </p:nvSpPr>
+        <p:spPr>
+          <a:xfrm>
+            <a:off x="1554480" y="2560320"/>
+            <a:ext cx="5029200" cy="365760"/>
+          </a:xfrm>
+          <a:prstGeom prst="rect">
+            <a:avLst/>
+          </a:prstGeom>
+          <a:noFill/>
+        </p:spPr>
+        <p:txBody>
+          <a:bodyPr wrap="square">
+            <a:spAutoFit/>
+          </a:bodyPr>
+          <a:lstStyle/>
+          <a:p>
+            <a:pPr algn="l"/>
+            <a:r>
+              <a:rPr sz="1500" b="1">
+                <a:solidFill>
+                  <a:srgbClr val="2DD4BF"/>
+                </a:solidFill>
+                <a:latin typeface="Calibri"/>
+              </a:rPr>
+              <a:t>/api/schemes/:id</a:t>
+            </a:r>
+          </a:p>
+        </p:txBody>
+      </p:sp>
+      <p:sp>
+        <p:nvSpPr>
+          <p:cNvPr id="14" name="TextBox 13"/>
+          <p:cNvSpPr txBox="1"/>
+          <p:nvPr/>
+        </p:nvSpPr>
+        <p:spPr>
+          <a:xfrm>
+            <a:off x="6675120" y="2560320"/>
             <a:ext cx="4846320" cy="365760"/>
           </a:xfrm>
           <a:prstGeom prst="rect">
@@ -5205,98 +5359,523 @@
           <a:p>
             <a:pPr algn="l"/>
             <a:r>
-              <a:rPr sz="1600" b="1">
-                <a:solidFill>
-                  <a:srgbClr val="34D399"/>
-                </a:solidFill>
-                <a:latin typeface="Calibri"/>
-              </a:rPr>
-              <a:t>Why JSON columns?</a:t>
-            </a:r>
-          </a:p>
-        </p:txBody>
-      </p:sp>
-      <p:sp>
-        <p:nvSpPr>
-          <p:cNvPr id="13" name="TextBox 12"/>
-          <p:cNvSpPr txBox="1"/>
-          <p:nvPr/>
-        </p:nvSpPr>
-        <p:spPr>
-          <a:xfrm>
-            <a:off x="6583680" y="4160520"/>
-            <a:ext cx="4846320" cy="1463040"/>
-          </a:xfrm>
-          <a:prstGeom prst="rect">
-            <a:avLst/>
-          </a:prstGeom>
-          <a:noFill/>
-        </p:spPr>
-        <p:txBody>
-          <a:bodyPr wrap="square">
-            <a:spAutoFit/>
-          </a:bodyPr>
-          <a:lstStyle/>
-          <a:p>
-            <a:pPr algn="l">
-              <a:spcAft>
-                <a:spcPts val="600"/>
-              </a:spcAft>
-            </a:pPr>
-            <a:r>
-              <a:rPr sz="1300" b="0">
+              <a:rPr sz="1400" b="0">
                 <a:solidFill>
                   <a:srgbClr val="CBD5E1"/>
                 </a:solidFill>
                 <a:latin typeface="Calibri"/>
               </a:rPr>
-              <a:t>Multi-value age/sector tags without join explosion</a:t>
-            </a:r>
-          </a:p>
-          <a:p>
-            <a:pPr algn="l">
-              <a:spcAft>
-                <a:spcPts val="600"/>
-              </a:spcAft>
-            </a:pPr>
-            <a:r>
-              <a:rPr sz="1300" b="0">
+              <a:t>Full scheme document</a:t>
+            </a:r>
+          </a:p>
+        </p:txBody>
+      </p:sp>
+      <p:sp>
+        <p:nvSpPr>
+          <p:cNvPr id="15" name="Rounded Rectangle 14"/>
+          <p:cNvSpPr/>
+          <p:nvPr/>
+        </p:nvSpPr>
+        <p:spPr>
+          <a:xfrm>
+            <a:off x="548640" y="3182111"/>
+            <a:ext cx="822960" cy="365760"/>
+          </a:xfrm>
+          <a:prstGeom prst="roundRect">
+            <a:avLst>
+              <a:gd name="adj" fmla="val 50000"/>
+            </a:avLst>
+          </a:prstGeom>
+          <a:solidFill>
+            <a:srgbClr val="34D399"/>
+          </a:solidFill>
+          <a:ln>
+            <a:noFill/>
+          </a:ln>
+        </p:spPr>
+        <p:style>
+          <a:lnRef idx="1">
+            <a:schemeClr val="accent1"/>
+          </a:lnRef>
+          <a:fillRef idx="3">
+            <a:schemeClr val="accent1"/>
+          </a:fillRef>
+          <a:effectRef idx="2">
+            <a:schemeClr val="accent1"/>
+          </a:effectRef>
+          <a:fontRef idx="minor">
+            <a:schemeClr val="lt1"/>
+          </a:fontRef>
+        </p:style>
+        <p:txBody>
+          <a:bodyPr rtlCol="0" anchor="ctr" wrap="none"/>
+          <a:lstStyle/>
+          <a:p>
+            <a:pPr algn="ctr"/>
+            <a:r>
+              <a:rPr sz="1100" b="1">
+                <a:solidFill>
+                  <a:srgbClr val="0B1628"/>
+                </a:solidFill>
+                <a:latin typeface="Calibri"/>
+              </a:rPr>
+              <a:t>GET</a:t>
+            </a:r>
+          </a:p>
+        </p:txBody>
+      </p:sp>
+      <p:sp>
+        <p:nvSpPr>
+          <p:cNvPr id="16" name="TextBox 15"/>
+          <p:cNvSpPr txBox="1"/>
+          <p:nvPr/>
+        </p:nvSpPr>
+        <p:spPr>
+          <a:xfrm>
+            <a:off x="1554480" y="3200399"/>
+            <a:ext cx="5029200" cy="365760"/>
+          </a:xfrm>
+          <a:prstGeom prst="rect">
+            <a:avLst/>
+          </a:prstGeom>
+          <a:noFill/>
+        </p:spPr>
+        <p:txBody>
+          <a:bodyPr wrap="square">
+            <a:spAutoFit/>
+          </a:bodyPr>
+          <a:lstStyle/>
+          <a:p>
+            <a:pPr algn="l"/>
+            <a:r>
+              <a:rPr sz="1500" b="1">
+                <a:solidFill>
+                  <a:srgbClr val="2DD4BF"/>
+                </a:solidFill>
+                <a:latin typeface="Calibri"/>
+              </a:rPr>
+              <a:t>/api/schemes/:id/related</a:t>
+            </a:r>
+          </a:p>
+        </p:txBody>
+      </p:sp>
+      <p:sp>
+        <p:nvSpPr>
+          <p:cNvPr id="17" name="TextBox 16"/>
+          <p:cNvSpPr txBox="1"/>
+          <p:nvPr/>
+        </p:nvSpPr>
+        <p:spPr>
+          <a:xfrm>
+            <a:off x="6675120" y="3200399"/>
+            <a:ext cx="4846320" cy="365760"/>
+          </a:xfrm>
+          <a:prstGeom prst="rect">
+            <a:avLst/>
+          </a:prstGeom>
+          <a:noFill/>
+        </p:spPr>
+        <p:txBody>
+          <a:bodyPr wrap="square">
+            <a:spAutoFit/>
+          </a:bodyPr>
+          <a:lstStyle/>
+          <a:p>
+            <a:pPr algn="l"/>
+            <a:r>
+              <a:rPr sz="1400" b="0">
                 <a:solidFill>
                   <a:srgbClr val="CBD5E1"/>
                 </a:solidFill>
                 <a:latin typeface="Calibri"/>
               </a:rPr>
-              <a:t>Fast iteration for scheme metadata</a:t>
-            </a:r>
-          </a:p>
-          <a:p>
-            <a:pPr algn="l">
-              <a:spcAft>
-                <a:spcPts val="600"/>
-              </a:spcAft>
-            </a:pPr>
-            <a:r>
-              <a:rPr sz="1300" b="0">
+              <a:t>Related scheme suggestions</a:t>
+            </a:r>
+          </a:p>
+        </p:txBody>
+      </p:sp>
+      <p:sp>
+        <p:nvSpPr>
+          <p:cNvPr id="18" name="Rounded Rectangle 17"/>
+          <p:cNvSpPr/>
+          <p:nvPr/>
+        </p:nvSpPr>
+        <p:spPr>
+          <a:xfrm>
+            <a:off x="548640" y="3822192"/>
+            <a:ext cx="822960" cy="365760"/>
+          </a:xfrm>
+          <a:prstGeom prst="roundRect">
+            <a:avLst>
+              <a:gd name="adj" fmla="val 50000"/>
+            </a:avLst>
+          </a:prstGeom>
+          <a:solidFill>
+            <a:srgbClr val="34D399"/>
+          </a:solidFill>
+          <a:ln>
+            <a:noFill/>
+          </a:ln>
+        </p:spPr>
+        <p:style>
+          <a:lnRef idx="1">
+            <a:schemeClr val="accent1"/>
+          </a:lnRef>
+          <a:fillRef idx="3">
+            <a:schemeClr val="accent1"/>
+          </a:fillRef>
+          <a:effectRef idx="2">
+            <a:schemeClr val="accent1"/>
+          </a:effectRef>
+          <a:fontRef idx="minor">
+            <a:schemeClr val="lt1"/>
+          </a:fontRef>
+        </p:style>
+        <p:txBody>
+          <a:bodyPr rtlCol="0" anchor="ctr" wrap="none"/>
+          <a:lstStyle/>
+          <a:p>
+            <a:pPr algn="ctr"/>
+            <a:r>
+              <a:rPr sz="1100" b="1">
+                <a:solidFill>
+                  <a:srgbClr val="0B1628"/>
+                </a:solidFill>
+                <a:latin typeface="Calibri"/>
+              </a:rPr>
+              <a:t>GET</a:t>
+            </a:r>
+          </a:p>
+        </p:txBody>
+      </p:sp>
+      <p:sp>
+        <p:nvSpPr>
+          <p:cNvPr id="19" name="TextBox 18"/>
+          <p:cNvSpPr txBox="1"/>
+          <p:nvPr/>
+        </p:nvSpPr>
+        <p:spPr>
+          <a:xfrm>
+            <a:off x="1554480" y="3840480"/>
+            <a:ext cx="5029200" cy="365760"/>
+          </a:xfrm>
+          <a:prstGeom prst="rect">
+            <a:avLst/>
+          </a:prstGeom>
+          <a:noFill/>
+        </p:spPr>
+        <p:txBody>
+          <a:bodyPr wrap="square">
+            <a:spAutoFit/>
+          </a:bodyPr>
+          <a:lstStyle/>
+          <a:p>
+            <a:pPr algn="l"/>
+            <a:r>
+              <a:rPr sz="1500" b="1">
+                <a:solidFill>
+                  <a:srgbClr val="2DD4BF"/>
+                </a:solidFill>
+                <a:latin typeface="Calibri"/>
+              </a:rPr>
+              <a:t>/api/schemes/popular</a:t>
+            </a:r>
+          </a:p>
+        </p:txBody>
+      </p:sp>
+      <p:sp>
+        <p:nvSpPr>
+          <p:cNvPr id="20" name="TextBox 19"/>
+          <p:cNvSpPr txBox="1"/>
+          <p:nvPr/>
+        </p:nvSpPr>
+        <p:spPr>
+          <a:xfrm>
+            <a:off x="6675120" y="3840480"/>
+            <a:ext cx="4846320" cy="365760"/>
+          </a:xfrm>
+          <a:prstGeom prst="rect">
+            <a:avLst/>
+          </a:prstGeom>
+          <a:noFill/>
+        </p:spPr>
+        <p:txBody>
+          <a:bodyPr wrap="square">
+            <a:spAutoFit/>
+          </a:bodyPr>
+          <a:lstStyle/>
+          <a:p>
+            <a:pPr algn="l"/>
+            <a:r>
+              <a:rPr sz="1400" b="0">
                 <a:solidFill>
                   <a:srgbClr val="CBD5E1"/>
                 </a:solidFill>
                 <a:latin typeface="Calibri"/>
               </a:rPr>
-              <a:t>Queryable via MySQL JSON_CONTAINS</a:t>
-            </a:r>
-          </a:p>
-        </p:txBody>
-      </p:sp>
-      <p:sp>
-        <p:nvSpPr>
-          <p:cNvPr id="14" name="TextBox 13"/>
-          <p:cNvSpPr txBox="1"/>
-          <p:nvPr/>
-        </p:nvSpPr>
-        <p:spPr>
-          <a:xfrm>
-            <a:off x="457200" y="6446520"/>
-            <a:ext cx="9144000" cy="274320"/>
+              <a:t>Top schemes by popularity score</a:t>
+            </a:r>
+          </a:p>
+        </p:txBody>
+      </p:sp>
+      <p:sp>
+        <p:nvSpPr>
+          <p:cNvPr id="21" name="Rounded Rectangle 20"/>
+          <p:cNvSpPr/>
+          <p:nvPr/>
+        </p:nvSpPr>
+        <p:spPr>
+          <a:xfrm>
+            <a:off x="548640" y="4462272"/>
+            <a:ext cx="822960" cy="365760"/>
+          </a:xfrm>
+          <a:prstGeom prst="roundRect">
+            <a:avLst>
+              <a:gd name="adj" fmla="val 50000"/>
+            </a:avLst>
+          </a:prstGeom>
+          <a:solidFill>
+            <a:srgbClr val="34D399"/>
+          </a:solidFill>
+          <a:ln>
+            <a:noFill/>
+          </a:ln>
+        </p:spPr>
+        <p:style>
+          <a:lnRef idx="1">
+            <a:schemeClr val="accent1"/>
+          </a:lnRef>
+          <a:fillRef idx="3">
+            <a:schemeClr val="accent1"/>
+          </a:fillRef>
+          <a:effectRef idx="2">
+            <a:schemeClr val="accent1"/>
+          </a:effectRef>
+          <a:fontRef idx="minor">
+            <a:schemeClr val="lt1"/>
+          </a:fontRef>
+        </p:style>
+        <p:txBody>
+          <a:bodyPr rtlCol="0" anchor="ctr" wrap="none"/>
+          <a:lstStyle/>
+          <a:p>
+            <a:pPr algn="ctr"/>
+            <a:r>
+              <a:rPr sz="1100" b="1">
+                <a:solidFill>
+                  <a:srgbClr val="0B1628"/>
+                </a:solidFill>
+                <a:latin typeface="Calibri"/>
+              </a:rPr>
+              <a:t>GET</a:t>
+            </a:r>
+          </a:p>
+        </p:txBody>
+      </p:sp>
+      <p:sp>
+        <p:nvSpPr>
+          <p:cNvPr id="22" name="TextBox 21"/>
+          <p:cNvSpPr txBox="1"/>
+          <p:nvPr/>
+        </p:nvSpPr>
+        <p:spPr>
+          <a:xfrm>
+            <a:off x="1554480" y="4480560"/>
+            <a:ext cx="5029200" cy="365760"/>
+          </a:xfrm>
+          <a:prstGeom prst="rect">
+            <a:avLst/>
+          </a:prstGeom>
+          <a:noFill/>
+        </p:spPr>
+        <p:txBody>
+          <a:bodyPr wrap="square">
+            <a:spAutoFit/>
+          </a:bodyPr>
+          <a:lstStyle/>
+          <a:p>
+            <a:pPr algn="l"/>
+            <a:r>
+              <a:rPr sz="1500" b="1">
+                <a:solidFill>
+                  <a:srgbClr val="2DD4BF"/>
+                </a:solidFill>
+                <a:latin typeface="Calibri"/>
+              </a:rPr>
+              <a:t>/api/schemes/stats</a:t>
+            </a:r>
+          </a:p>
+        </p:txBody>
+      </p:sp>
+      <p:sp>
+        <p:nvSpPr>
+          <p:cNvPr id="23" name="TextBox 22"/>
+          <p:cNvSpPr txBox="1"/>
+          <p:nvPr/>
+        </p:nvSpPr>
+        <p:spPr>
+          <a:xfrm>
+            <a:off x="6675120" y="4480560"/>
+            <a:ext cx="4846320" cy="365760"/>
+          </a:xfrm>
+          <a:prstGeom prst="rect">
+            <a:avLst/>
+          </a:prstGeom>
+          <a:noFill/>
+        </p:spPr>
+        <p:txBody>
+          <a:bodyPr wrap="square">
+            <a:spAutoFit/>
+          </a:bodyPr>
+          <a:lstStyle/>
+          <a:p>
+            <a:pPr algn="l"/>
+            <a:r>
+              <a:rPr sz="1400" b="0">
+                <a:solidFill>
+                  <a:srgbClr val="CBD5E1"/>
+                </a:solidFill>
+                <a:latin typeface="Calibri"/>
+              </a:rPr>
+              <a:t>Total, central, and state counts</a:t>
+            </a:r>
+          </a:p>
+        </p:txBody>
+      </p:sp>
+      <p:sp>
+        <p:nvSpPr>
+          <p:cNvPr id="24" name="Rounded Rectangle 23"/>
+          <p:cNvSpPr/>
+          <p:nvPr/>
+        </p:nvSpPr>
+        <p:spPr>
+          <a:xfrm>
+            <a:off x="548640" y="5102351"/>
+            <a:ext cx="822960" cy="365760"/>
+          </a:xfrm>
+          <a:prstGeom prst="roundRect">
+            <a:avLst>
+              <a:gd name="adj" fmla="val 50000"/>
+            </a:avLst>
+          </a:prstGeom>
+          <a:solidFill>
+            <a:srgbClr val="34D399"/>
+          </a:solidFill>
+          <a:ln>
+            <a:noFill/>
+          </a:ln>
+        </p:spPr>
+        <p:style>
+          <a:lnRef idx="1">
+            <a:schemeClr val="accent1"/>
+          </a:lnRef>
+          <a:fillRef idx="3">
+            <a:schemeClr val="accent1"/>
+          </a:fillRef>
+          <a:effectRef idx="2">
+            <a:schemeClr val="accent1"/>
+          </a:effectRef>
+          <a:fontRef idx="minor">
+            <a:schemeClr val="lt1"/>
+          </a:fontRef>
+        </p:style>
+        <p:txBody>
+          <a:bodyPr rtlCol="0" anchor="ctr" wrap="none"/>
+          <a:lstStyle/>
+          <a:p>
+            <a:pPr algn="ctr"/>
+            <a:r>
+              <a:rPr sz="1100" b="1">
+                <a:solidFill>
+                  <a:srgbClr val="0B1628"/>
+                </a:solidFill>
+                <a:latin typeface="Calibri"/>
+              </a:rPr>
+              <a:t>GET</a:t>
+            </a:r>
+          </a:p>
+        </p:txBody>
+      </p:sp>
+      <p:sp>
+        <p:nvSpPr>
+          <p:cNvPr id="25" name="TextBox 24"/>
+          <p:cNvSpPr txBox="1"/>
+          <p:nvPr/>
+        </p:nvSpPr>
+        <p:spPr>
+          <a:xfrm>
+            <a:off x="1554480" y="5120639"/>
+            <a:ext cx="5029200" cy="365760"/>
+          </a:xfrm>
+          <a:prstGeom prst="rect">
+            <a:avLst/>
+          </a:prstGeom>
+          <a:noFill/>
+        </p:spPr>
+        <p:txBody>
+          <a:bodyPr wrap="square">
+            <a:spAutoFit/>
+          </a:bodyPr>
+          <a:lstStyle/>
+          <a:p>
+            <a:pPr algn="l"/>
+            <a:r>
+              <a:rPr sz="1500" b="1">
+                <a:solidFill>
+                  <a:srgbClr val="2DD4BF"/>
+                </a:solidFill>
+                <a:latin typeface="Calibri"/>
+              </a:rPr>
+              <a:t>/api/sectors</a:t>
+            </a:r>
+          </a:p>
+        </p:txBody>
+      </p:sp>
+      <p:sp>
+        <p:nvSpPr>
+          <p:cNvPr id="26" name="TextBox 25"/>
+          <p:cNvSpPr txBox="1"/>
+          <p:nvPr/>
+        </p:nvSpPr>
+        <p:spPr>
+          <a:xfrm>
+            <a:off x="6675120" y="5120639"/>
+            <a:ext cx="4846320" cy="365760"/>
+          </a:xfrm>
+          <a:prstGeom prst="rect">
+            <a:avLst/>
+          </a:prstGeom>
+          <a:noFill/>
+        </p:spPr>
+        <p:txBody>
+          <a:bodyPr wrap="square">
+            <a:spAutoFit/>
+          </a:bodyPr>
+          <a:lstStyle/>
+          <a:p>
+            <a:pPr algn="l"/>
+            <a:r>
+              <a:rPr sz="1400" b="0">
+                <a:solidFill>
+                  <a:srgbClr val="CBD5E1"/>
+                </a:solidFill>
+                <a:latin typeface="Calibri"/>
+              </a:rPr>
+              <a:t>Sector taxonomy with optional age filter</a:t>
+            </a:r>
+          </a:p>
+        </p:txBody>
+      </p:sp>
+      <p:sp>
+        <p:nvSpPr>
+          <p:cNvPr id="27" name="TextBox 26"/>
+          <p:cNvSpPr txBox="1"/>
+          <p:nvPr/>
+        </p:nvSpPr>
+        <p:spPr>
+          <a:xfrm>
+            <a:off x="457200" y="6473952"/>
+            <a:ext cx="9601200" cy="256032"/>
           </a:xfrm>
           <a:prstGeom prst="rect">
             <a:avLst/>
@@ -5316,21 +5895,21 @@
                 </a:solidFill>
                 <a:latin typeface="Calibri"/>
               </a:rPr>
-              <a:t>YojanaConnect  ·  Live: yojnaconnect.prakharkr.online  ·  Confidential pitch</a:t>
-            </a:r>
-          </a:p>
-        </p:txBody>
-      </p:sp>
-      <p:sp>
-        <p:nvSpPr>
-          <p:cNvPr id="15" name="TextBox 14"/>
-          <p:cNvSpPr txBox="1"/>
-          <p:nvPr/>
-        </p:nvSpPr>
-        <p:spPr>
-          <a:xfrm>
-            <a:off x="10789920" y="6446520"/>
-            <a:ext cx="1097280" cy="274320"/>
+              <a:t>YojanaConnect  |  https://yojnaconnect.prakharkr.online/schemes  |  Technical Pitch</a:t>
+            </a:r>
+          </a:p>
+        </p:txBody>
+      </p:sp>
+      <p:sp>
+        <p:nvSpPr>
+          <p:cNvPr id="28" name="TextBox 27"/>
+          <p:cNvSpPr txBox="1"/>
+          <p:nvPr/>
+        </p:nvSpPr>
+        <p:spPr>
+          <a:xfrm>
+            <a:off x="10698480" y="6473952"/>
+            <a:ext cx="1188720" cy="256032"/>
           </a:xfrm>
           <a:prstGeom prst="rect">
             <a:avLst/>
@@ -5351,7 +5930,7 @@
                 </a:solidFill>
                 <a:latin typeface="Calibri"/>
               </a:rPr>
-              <a:t>11 / 16</a:t>
+              <a:t>11/16</a:t>
             </a:r>
           </a:p>
         </p:txBody>
@@ -5469,7 +6048,7 @@
         <p:spPr>
           <a:xfrm>
             <a:off x="457200" y="274320"/>
-            <a:ext cx="10972800" cy="411480"/>
+            <a:ext cx="10972800" cy="365760"/>
           </a:xfrm>
           <a:prstGeom prst="rect">
             <a:avLst/>
@@ -5490,7 +6069,7 @@
                 </a:solidFill>
                 <a:latin typeface="Calibri"/>
               </a:rPr>
-              <a:t>Security · Privacy · Trust Model</a:t>
+              <a:t>Data Model</a:t>
             </a:r>
           </a:p>
         </p:txBody>
@@ -5503,8 +6082,8 @@
         </p:nvSpPr>
         <p:spPr>
           <a:xfrm>
-            <a:off x="457200" y="1097280"/>
-            <a:ext cx="5486400" cy="4754880"/>
+            <a:off x="457200" y="1005840"/>
+            <a:ext cx="5577840" cy="4846320"/>
           </a:xfrm>
           <a:prstGeom prst="roundRect">
             <a:avLst>
@@ -5550,8 +6129,8 @@
         </p:nvSpPr>
         <p:spPr>
           <a:xfrm>
-            <a:off x="731520" y="1280160"/>
-            <a:ext cx="4937760" cy="365760"/>
+            <a:off x="731520" y="1188720"/>
+            <a:ext cx="5029200" cy="365760"/>
           </a:xfrm>
           <a:prstGeom prst="rect">
             <a:avLst/>
@@ -5568,11 +6147,11 @@
             <a:r>
               <a:rPr sz="1800" b="1">
                 <a:solidFill>
-                  <a:srgbClr val="34D399"/>
-                </a:solidFill>
-                <a:latin typeface="Calibri"/>
-              </a:rPr>
-              <a:t>Current Posture</a:t>
+                  <a:srgbClr val="FF8C42"/>
+                </a:solidFill>
+                <a:latin typeface="Calibri"/>
+              </a:rPr>
+              <a:t>schemes</a:t>
             </a:r>
           </a:p>
         </p:txBody>
@@ -5585,8 +6164,8 @@
         </p:nvSpPr>
         <p:spPr>
           <a:xfrm>
-            <a:off x="731520" y="1828800"/>
-            <a:ext cx="4937760" cy="3657600"/>
+            <a:off x="731520" y="1691640"/>
+            <a:ext cx="5029200" cy="3840480"/>
           </a:xfrm>
           <a:prstGeom prst="rect">
             <a:avLst/>
@@ -5601,7 +6180,7 @@
           <a:p>
             <a:pPr algn="l">
               <a:spcAft>
-                <a:spcPts val="600"/>
+                <a:spcPts val="400"/>
               </a:spcAft>
             </a:pPr>
             <a:r>
@@ -5611,13 +6190,13 @@
                 </a:solidFill>
                 <a:latin typeface="Calibri"/>
               </a:rPr>
-              <a:t>✓  Discovery platform — not a benefit processor</a:t>
+              <a:t>id, name, name_hindi, ministry</a:t>
             </a:r>
           </a:p>
           <a:p>
             <a:pPr algn="l">
               <a:spcAft>
-                <a:spcPts val="600"/>
+                <a:spcPts val="400"/>
               </a:spcAft>
             </a:pPr>
             <a:r>
@@ -5627,13 +6206,13 @@
                 </a:solidFill>
                 <a:latin typeface="Calibri"/>
               </a:rPr>
-              <a:t>✓  No Aadhaar / bank / KYC collected today</a:t>
+              <a:t>age_groups (JSON), sectors (JSON)</a:t>
             </a:r>
           </a:p>
           <a:p>
             <a:pPr algn="l">
               <a:spcAft>
-                <a:spcPts val="600"/>
+                <a:spcPts val="400"/>
               </a:spcAft>
             </a:pPr>
             <a:r>
@@ -5643,13 +6222,13 @@
                 </a:solidFill>
                 <a:latin typeface="Calibri"/>
               </a:rPr>
-              <a:t>✓  Apply happens on official government portals</a:t>
+              <a:t>income_limit, categories, benefit</a:t>
             </a:r>
           </a:p>
           <a:p>
             <a:pPr algn="l">
               <a:spcAft>
-                <a:spcPts val="600"/>
+                <a:spcPts val="400"/>
               </a:spcAft>
             </a:pPr>
             <a:r>
@@ -5659,13 +6238,13 @@
                 </a:solidFill>
                 <a:latin typeface="Calibri"/>
               </a:rPr>
-              <a:t>✓  Parameterized SQL — injection-resistant queries</a:t>
+              <a:t>eligibility and documents (JSON)</a:t>
             </a:r>
           </a:p>
           <a:p>
             <a:pPr algn="l">
               <a:spcAft>
-                <a:spcPts val="600"/>
+                <a:spcPts val="400"/>
               </a:spcAft>
             </a:pPr>
             <a:r>
@@ -5675,13 +6254,13 @@
                 </a:solidFill>
                 <a:latin typeface="Calibri"/>
               </a:rPr>
-              <a:t>✓  Secrets via environment variables</a:t>
+              <a:t>how_to_apply, official_link, deadline</a:t>
             </a:r>
           </a:p>
           <a:p>
             <a:pPr algn="l">
               <a:spcAft>
-                <a:spcPts val="600"/>
+                <a:spcPts val="400"/>
               </a:spcAft>
             </a:pPr>
             <a:r>
@@ -5691,7 +6270,23 @@
                 </a:solidFill>
                 <a:latin typeface="Calibri"/>
               </a:rPr>
-              <a:t>✓  HTTPS live deployment behind Nginx</a:t>
+              <a:t>terms_and_conditions, tags</a:t>
+            </a:r>
+          </a:p>
+          <a:p>
+            <a:pPr algn="l">
+              <a:spcAft>
+                <a:spcPts val="400"/>
+              </a:spcAft>
+            </a:pPr>
+            <a:r>
+              <a:rPr sz="1400" b="0">
+                <a:solidFill>
+                  <a:srgbClr val="CBD5E1"/>
+                </a:solidFill>
+                <a:latin typeface="Calibri"/>
+              </a:rPr>
+              <a:t>is_state, state, popularity_score</a:t>
             </a:r>
           </a:p>
         </p:txBody>
@@ -5704,8 +6299,8 @@
         </p:nvSpPr>
         <p:spPr>
           <a:xfrm>
-            <a:off x="6217920" y="1097280"/>
-            <a:ext cx="5486400" cy="4754880"/>
+            <a:off x="6309360" y="1005840"/>
+            <a:ext cx="5394960" cy="2103120"/>
           </a:xfrm>
           <a:prstGeom prst="roundRect">
             <a:avLst>
@@ -5751,8 +6346,8 @@
         </p:nvSpPr>
         <p:spPr>
           <a:xfrm>
-            <a:off x="6492240" y="1280160"/>
-            <a:ext cx="4937760" cy="365760"/>
+            <a:off x="6583680" y="1188720"/>
+            <a:ext cx="4846320" cy="365760"/>
           </a:xfrm>
           <a:prstGeom prst="rect">
             <a:avLst/>
@@ -5769,11 +6364,11 @@
             <a:r>
               <a:rPr sz="1800" b="1">
                 <a:solidFill>
-                  <a:srgbClr val="FF8C42"/>
-                </a:solidFill>
-                <a:latin typeface="Calibri"/>
-              </a:rPr>
-              <a:t>Enterprise Hardening Path</a:t>
+                  <a:srgbClr val="2DD4BF"/>
+                </a:solidFill>
+                <a:latin typeface="Calibri"/>
+              </a:rPr>
+              <a:t>sectors</a:t>
             </a:r>
           </a:p>
         </p:txBody>
@@ -5786,8 +6381,8 @@
         </p:nvSpPr>
         <p:spPr>
           <a:xfrm>
-            <a:off x="6492240" y="1828800"/>
-            <a:ext cx="4937760" cy="3657600"/>
+            <a:off x="6583680" y="1691640"/>
+            <a:ext cx="4846320" cy="1188720"/>
           </a:xfrm>
           <a:prstGeom prst="rect">
             <a:avLst/>
@@ -5802,7 +6397,7 @@
           <a:p>
             <a:pPr algn="l">
               <a:spcAft>
-                <a:spcPts val="600"/>
+                <a:spcPts val="400"/>
               </a:spcAft>
             </a:pPr>
             <a:r>
@@ -5812,13 +6407,13 @@
                 </a:solidFill>
                 <a:latin typeface="Calibri"/>
               </a:rPr>
-              <a:t>Production hardening backlog:</a:t>
+              <a:t>sector_id, name, name_hindi</a:t>
             </a:r>
           </a:p>
           <a:p>
             <a:pPr algn="l">
               <a:spcAft>
-                <a:spcPts val="600"/>
+                <a:spcPts val="400"/>
               </a:spcAft>
             </a:pPr>
             <a:r>
@@ -5828,101 +6423,174 @@
                 </a:solidFill>
                 <a:latin typeface="Calibri"/>
               </a:rPr>
-              <a:t>• Remove debug endpoints from public edge</a:t>
-            </a:r>
-          </a:p>
+              <a:t>age_groups (JSON), icon</a:t>
+            </a:r>
+          </a:p>
+        </p:txBody>
+      </p:sp>
+      <p:sp>
+        <p:nvSpPr>
+          <p:cNvPr id="11" name="Rounded Rectangle 10"/>
+          <p:cNvSpPr/>
+          <p:nvPr/>
+        </p:nvSpPr>
+        <p:spPr>
+          <a:xfrm>
+            <a:off x="6309360" y="3337560"/>
+            <a:ext cx="5394960" cy="2514600"/>
+          </a:xfrm>
+          <a:prstGeom prst="roundRect">
+            <a:avLst>
+              <a:gd name="adj" fmla="val 8000"/>
+            </a:avLst>
+          </a:prstGeom>
+          <a:solidFill>
+            <a:srgbClr val="162A45"/>
+          </a:solidFill>
+          <a:ln>
+            <a:solidFill>
+              <a:srgbClr val="2A3F5F"/>
+            </a:solidFill>
+          </a:ln>
+        </p:spPr>
+        <p:style>
+          <a:lnRef idx="1">
+            <a:schemeClr val="accent1"/>
+          </a:lnRef>
+          <a:fillRef idx="3">
+            <a:schemeClr val="accent1"/>
+          </a:fillRef>
+          <a:effectRef idx="2">
+            <a:schemeClr val="accent1"/>
+          </a:effectRef>
+          <a:fontRef idx="minor">
+            <a:schemeClr val="lt1"/>
+          </a:fontRef>
+        </p:style>
+        <p:txBody>
+          <a:bodyPr rtlCol="0" anchor="ctr"/>
+          <a:lstStyle/>
+          <a:p>
+            <a:pPr algn="ctr"/>
+          </a:p>
+        </p:txBody>
+      </p:sp>
+      <p:sp>
+        <p:nvSpPr>
+          <p:cNvPr id="12" name="TextBox 11"/>
+          <p:cNvSpPr txBox="1"/>
+          <p:nvPr/>
+        </p:nvSpPr>
+        <p:spPr>
+          <a:xfrm>
+            <a:off x="6583680" y="3520440"/>
+            <a:ext cx="4846320" cy="365760"/>
+          </a:xfrm>
+          <a:prstGeom prst="rect">
+            <a:avLst/>
+          </a:prstGeom>
+          <a:noFill/>
+        </p:spPr>
+        <p:txBody>
+          <a:bodyPr wrap="square">
+            <a:spAutoFit/>
+          </a:bodyPr>
+          <a:lstStyle/>
+          <a:p>
+            <a:pPr algn="l"/>
+            <a:r>
+              <a:rPr sz="1600" b="1">
+                <a:solidFill>
+                  <a:srgbClr val="34D399"/>
+                </a:solidFill>
+                <a:latin typeface="Calibri"/>
+              </a:rPr>
+              <a:t>Why JSON columns?</a:t>
+            </a:r>
+          </a:p>
+        </p:txBody>
+      </p:sp>
+      <p:sp>
+        <p:nvSpPr>
+          <p:cNvPr id="13" name="TextBox 12"/>
+          <p:cNvSpPr txBox="1"/>
+          <p:nvPr/>
+        </p:nvSpPr>
+        <p:spPr>
+          <a:xfrm>
+            <a:off x="6583680" y="4023360"/>
+            <a:ext cx="4846320" cy="1554480"/>
+          </a:xfrm>
+          <a:prstGeom prst="rect">
+            <a:avLst/>
+          </a:prstGeom>
+          <a:noFill/>
+        </p:spPr>
+        <p:txBody>
+          <a:bodyPr wrap="square">
+            <a:spAutoFit/>
+          </a:bodyPr>
+          <a:lstStyle/>
           <a:p>
             <a:pPr algn="l">
               <a:spcAft>
-                <a:spcPts val="600"/>
+                <a:spcPts val="400"/>
               </a:spcAft>
             </a:pPr>
             <a:r>
-              <a:rPr sz="1400" b="0">
+              <a:rPr sz="1300" b="0">
                 <a:solidFill>
                   <a:srgbClr val="CBD5E1"/>
                 </a:solidFill>
                 <a:latin typeface="Calibri"/>
               </a:rPr>
-              <a:t>• Suppress stack traces in client errors</a:t>
+              <a:t>Multi-value age and sector tags without heavy joins</a:t>
             </a:r>
           </a:p>
           <a:p>
             <a:pPr algn="l">
               <a:spcAft>
-                <a:spcPts val="600"/>
+                <a:spcPts val="400"/>
               </a:spcAft>
             </a:pPr>
             <a:r>
-              <a:rPr sz="1400" b="0">
+              <a:rPr sz="1300" b="0">
                 <a:solidFill>
                   <a:srgbClr val="CBD5E1"/>
                 </a:solidFill>
                 <a:latin typeface="Calibri"/>
               </a:rPr>
-              <a:t>• Tighten CORS to known origins</a:t>
+              <a:t>Fast iteration when scheme metadata changes</a:t>
             </a:r>
           </a:p>
           <a:p>
             <a:pPr algn="l">
               <a:spcAft>
-                <a:spcPts val="600"/>
+                <a:spcPts val="400"/>
               </a:spcAft>
             </a:pPr>
             <a:r>
-              <a:rPr sz="1400" b="0">
+              <a:rPr sz="1300" b="0">
                 <a:solidFill>
                   <a:srgbClr val="CBD5E1"/>
                 </a:solidFill>
                 <a:latin typeface="Calibri"/>
               </a:rPr>
-              <a:t>• Rate-limit public GET APIs</a:t>
-            </a:r>
-          </a:p>
-          <a:p>
-            <a:pPr algn="l">
-              <a:spcAft>
-                <a:spcPts val="600"/>
-              </a:spcAft>
-            </a:pPr>
-            <a:r>
-              <a:rPr sz="1400" b="0">
-                <a:solidFill>
-                  <a:srgbClr val="CBD5E1"/>
-                </a:solidFill>
-                <a:latin typeface="Calibri"/>
-              </a:rPr>
-              <a:t>• Add WAF / CDN + audit logging</a:t>
-            </a:r>
-          </a:p>
-          <a:p>
-            <a:pPr algn="l">
-              <a:spcAft>
-                <a:spcPts val="600"/>
-              </a:spcAft>
-            </a:pPr>
-            <a:r>
-              <a:rPr sz="1400" b="0">
-                <a:solidFill>
-                  <a:srgbClr val="CBD5E1"/>
-                </a:solidFill>
-                <a:latin typeface="Calibri"/>
-              </a:rPr>
-              <a:t>• Auth only when bookmarks/admin ship</a:t>
-            </a:r>
-          </a:p>
-        </p:txBody>
-      </p:sp>
-      <p:sp>
-        <p:nvSpPr>
-          <p:cNvPr id="11" name="TextBox 10"/>
-          <p:cNvSpPr txBox="1"/>
-          <p:nvPr/>
-        </p:nvSpPr>
-        <p:spPr>
-          <a:xfrm>
-            <a:off x="457200" y="6446520"/>
-            <a:ext cx="9144000" cy="274320"/>
+              <a:t>Queryable with MySQL JSON_CONTAINS</a:t>
+            </a:r>
+          </a:p>
+        </p:txBody>
+      </p:sp>
+      <p:sp>
+        <p:nvSpPr>
+          <p:cNvPr id="14" name="TextBox 13"/>
+          <p:cNvSpPr txBox="1"/>
+          <p:nvPr/>
+        </p:nvSpPr>
+        <p:spPr>
+          <a:xfrm>
+            <a:off x="457200" y="6473952"/>
+            <a:ext cx="9601200" cy="256032"/>
           </a:xfrm>
           <a:prstGeom prst="rect">
             <a:avLst/>
@@ -5942,21 +6610,21 @@
                 </a:solidFill>
                 <a:latin typeface="Calibri"/>
               </a:rPr>
-              <a:t>YojanaConnect  ·  Live: yojnaconnect.prakharkr.online  ·  Confidential pitch</a:t>
-            </a:r>
-          </a:p>
-        </p:txBody>
-      </p:sp>
-      <p:sp>
-        <p:nvSpPr>
-          <p:cNvPr id="12" name="TextBox 11"/>
-          <p:cNvSpPr txBox="1"/>
-          <p:nvPr/>
-        </p:nvSpPr>
-        <p:spPr>
-          <a:xfrm>
-            <a:off x="10789920" y="6446520"/>
-            <a:ext cx="1097280" cy="274320"/>
+              <a:t>YojanaConnect  |  https://yojnaconnect.prakharkr.online/schemes  |  Technical Pitch</a:t>
+            </a:r>
+          </a:p>
+        </p:txBody>
+      </p:sp>
+      <p:sp>
+        <p:nvSpPr>
+          <p:cNvPr id="15" name="TextBox 14"/>
+          <p:cNvSpPr txBox="1"/>
+          <p:nvPr/>
+        </p:nvSpPr>
+        <p:spPr>
+          <a:xfrm>
+            <a:off x="10698480" y="6473952"/>
+            <a:ext cx="1188720" cy="256032"/>
           </a:xfrm>
           <a:prstGeom prst="rect">
             <a:avLst/>
@@ -5977,7 +6645,7 @@
                 </a:solidFill>
                 <a:latin typeface="Calibri"/>
               </a:rPr>
-              <a:t>12 / 16</a:t>
+              <a:t>12/16</a:t>
             </a:r>
           </a:p>
         </p:txBody>
@@ -6095,7 +6763,7 @@
         <p:spPr>
           <a:xfrm>
             <a:off x="457200" y="274320"/>
-            <a:ext cx="10972800" cy="411480"/>
+            <a:ext cx="10972800" cy="365760"/>
           </a:xfrm>
           <a:prstGeom prst="rect">
             <a:avLst/>
@@ -6116,7 +6784,7 @@
                 </a:solidFill>
                 <a:latin typeface="Calibri"/>
               </a:rPr>
-              <a:t>Scale &amp; Reliability Path</a:t>
+              <a:t>Security, Privacy, Trust</a:t>
             </a:r>
           </a:p>
         </p:txBody>
@@ -6129,8 +6797,8 @@
         </p:nvSpPr>
         <p:spPr>
           <a:xfrm>
-            <a:off x="365760" y="1371600"/>
-            <a:ext cx="2788920" cy="4023360"/>
+            <a:off x="457200" y="1051560"/>
+            <a:ext cx="5486400" cy="4754880"/>
           </a:xfrm>
           <a:prstGeom prst="roundRect">
             <a:avLst>
@@ -6176,8 +6844,8 @@
         </p:nvSpPr>
         <p:spPr>
           <a:xfrm>
-            <a:off x="594360" y="1645920"/>
-            <a:ext cx="2286000" cy="365760"/>
+            <a:off x="731520" y="1234440"/>
+            <a:ext cx="4937760" cy="365760"/>
           </a:xfrm>
           <a:prstGeom prst="rect">
             <a:avLst/>
@@ -6192,13 +6860,13 @@
           <a:p>
             <a:pPr algn="l"/>
             <a:r>
-              <a:rPr sz="1600" b="1">
-                <a:solidFill>
-                  <a:srgbClr val="FF8C42"/>
-                </a:solidFill>
-                <a:latin typeface="Calibri"/>
-              </a:rPr>
-              <a:t>NOW</a:t>
+              <a:rPr sz="1800" b="1">
+                <a:solidFill>
+                  <a:srgbClr val="34D399"/>
+                </a:solidFill>
+                <a:latin typeface="Calibri"/>
+              </a:rPr>
+              <a:t>Current Posture</a:t>
             </a:r>
           </a:p>
         </p:txBody>
@@ -6211,78 +6879,127 @@
         </p:nvSpPr>
         <p:spPr>
           <a:xfrm>
-            <a:off x="594360" y="2286000"/>
-            <a:ext cx="2286000" cy="914400"/>
-          </a:xfrm>
-          <a:prstGeom prst="rect">
-            <a:avLst/>
-          </a:prstGeom>
-          <a:noFill/>
-        </p:spPr>
-        <p:txBody>
-          <a:bodyPr wrap="square">
-            <a:spAutoFit/>
-          </a:bodyPr>
-          <a:lstStyle/>
-          <a:p>
-            <a:pPr algn="l"/>
-            <a:r>
-              <a:rPr sz="1600" b="1">
-                <a:solidFill>
-                  <a:srgbClr val="F8FAFC"/>
-                </a:solidFill>
-                <a:latin typeface="Calibri"/>
-              </a:rPr>
-              <a:t>SPA + Node API + MySQL</a:t>
-            </a:r>
-          </a:p>
-        </p:txBody>
-      </p:sp>
-      <p:sp>
-        <p:nvSpPr>
-          <p:cNvPr id="8" name="TextBox 7"/>
-          <p:cNvSpPr txBox="1"/>
-          <p:nvPr/>
-        </p:nvSpPr>
-        <p:spPr>
-          <a:xfrm>
-            <a:off x="594360" y="3383280"/>
-            <a:ext cx="2286000" cy="1645920"/>
-          </a:xfrm>
-          <a:prstGeom prst="rect">
-            <a:avLst/>
-          </a:prstGeom>
-          <a:noFill/>
-        </p:spPr>
-        <p:txBody>
-          <a:bodyPr wrap="square">
-            <a:spAutoFit/>
-          </a:bodyPr>
-          <a:lstStyle/>
-          <a:p>
-            <a:pPr algn="l"/>
-            <a:r>
-              <a:rPr sz="1300" b="0">
-                <a:solidFill>
-                  <a:srgbClr val="94A3B8"/>
-                </a:solidFill>
-                <a:latin typeface="Calibri"/>
-              </a:rPr>
-              <a:t>Single region, read-heavy catalog, connection pool</a:t>
-            </a:r>
-          </a:p>
-        </p:txBody>
-      </p:sp>
-      <p:sp>
-        <p:nvSpPr>
-          <p:cNvPr id="9" name="Rounded Rectangle 8"/>
+            <a:off x="731520" y="1783080"/>
+            <a:ext cx="4937760" cy="3657600"/>
+          </a:xfrm>
+          <a:prstGeom prst="rect">
+            <a:avLst/>
+          </a:prstGeom>
+          <a:noFill/>
+        </p:spPr>
+        <p:txBody>
+          <a:bodyPr wrap="square">
+            <a:spAutoFit/>
+          </a:bodyPr>
+          <a:lstStyle/>
+          <a:p>
+            <a:pPr algn="l">
+              <a:spcAft>
+                <a:spcPts val="400"/>
+              </a:spcAft>
+            </a:pPr>
+            <a:r>
+              <a:rPr sz="1400" b="0">
+                <a:solidFill>
+                  <a:srgbClr val="CBD5E1"/>
+                </a:solidFill>
+                <a:latin typeface="Calibri"/>
+              </a:rPr>
+              <a:t>Discovery platform, not a benefit processor</a:t>
+            </a:r>
+          </a:p>
+          <a:p>
+            <a:pPr algn="l">
+              <a:spcAft>
+                <a:spcPts val="400"/>
+              </a:spcAft>
+            </a:pPr>
+            <a:r>
+              <a:rPr sz="1400" b="0">
+                <a:solidFill>
+                  <a:srgbClr val="CBD5E1"/>
+                </a:solidFill>
+                <a:latin typeface="Calibri"/>
+              </a:rPr>
+              <a:t>No Aadhaar, bank, or KYC data collected</a:t>
+            </a:r>
+          </a:p>
+          <a:p>
+            <a:pPr algn="l">
+              <a:spcAft>
+                <a:spcPts val="400"/>
+              </a:spcAft>
+            </a:pPr>
+            <a:r>
+              <a:rPr sz="1400" b="0">
+                <a:solidFill>
+                  <a:srgbClr val="CBD5E1"/>
+                </a:solidFill>
+                <a:latin typeface="Calibri"/>
+              </a:rPr>
+              <a:t>Applications happen on official portals</a:t>
+            </a:r>
+          </a:p>
+          <a:p>
+            <a:pPr algn="l">
+              <a:spcAft>
+                <a:spcPts val="400"/>
+              </a:spcAft>
+            </a:pPr>
+            <a:r>
+              <a:rPr sz="1400" b="0">
+                <a:solidFill>
+                  <a:srgbClr val="CBD5E1"/>
+                </a:solidFill>
+                <a:latin typeface="Calibri"/>
+              </a:rPr>
+              <a:t>Parameterized SQL against injection risk</a:t>
+            </a:r>
+          </a:p>
+          <a:p>
+            <a:pPr algn="l">
+              <a:spcAft>
+                <a:spcPts val="400"/>
+              </a:spcAft>
+            </a:pPr>
+            <a:r>
+              <a:rPr sz="1400" b="0">
+                <a:solidFill>
+                  <a:srgbClr val="CBD5E1"/>
+                </a:solidFill>
+                <a:latin typeface="Calibri"/>
+              </a:rPr>
+              <a:t>Secrets loaded from environment variables</a:t>
+            </a:r>
+          </a:p>
+          <a:p>
+            <a:pPr algn="l">
+              <a:spcAft>
+                <a:spcPts val="400"/>
+              </a:spcAft>
+            </a:pPr>
+            <a:r>
+              <a:rPr sz="1400" b="0">
+                <a:solidFill>
+                  <a:srgbClr val="CBD5E1"/>
+                </a:solidFill>
+                <a:latin typeface="Calibri"/>
+              </a:rPr>
+              <a:t>HTTPS production deployment behind Nginx</a:t>
+            </a:r>
+          </a:p>
+        </p:txBody>
+      </p:sp>
+      <p:sp>
+        <p:nvSpPr>
+          <p:cNvPr id="8" name="Rounded Rectangle 7"/>
           <p:cNvSpPr/>
           <p:nvPr/>
         </p:nvSpPr>
         <p:spPr>
           <a:xfrm>
-            <a:off x="3291840" y="1371600"/>
-            <a:ext cx="2788920" cy="4023360"/>
+            <a:off x="6217920" y="1051560"/>
+            <a:ext cx="5486400" cy="4754880"/>
           </a:xfrm>
           <a:prstGeom prst="roundRect">
             <a:avLst>
@@ -6322,35 +7039,154 @@
       </p:sp>
       <p:sp>
         <p:nvSpPr>
+          <p:cNvPr id="9" name="TextBox 8"/>
+          <p:cNvSpPr txBox="1"/>
+          <p:nvPr/>
+        </p:nvSpPr>
+        <p:spPr>
+          <a:xfrm>
+            <a:off x="6492240" y="1234440"/>
+            <a:ext cx="4937760" cy="365760"/>
+          </a:xfrm>
+          <a:prstGeom prst="rect">
+            <a:avLst/>
+          </a:prstGeom>
+          <a:noFill/>
+        </p:spPr>
+        <p:txBody>
+          <a:bodyPr wrap="square">
+            <a:spAutoFit/>
+          </a:bodyPr>
+          <a:lstStyle/>
+          <a:p>
+            <a:pPr algn="l"/>
+            <a:r>
+              <a:rPr sz="1800" b="1">
+                <a:solidFill>
+                  <a:srgbClr val="FF8C42"/>
+                </a:solidFill>
+                <a:latin typeface="Calibri"/>
+              </a:rPr>
+              <a:t>Hardening Path</a:t>
+            </a:r>
+          </a:p>
+        </p:txBody>
+      </p:sp>
+      <p:sp>
+        <p:nvSpPr>
           <p:cNvPr id="10" name="TextBox 9"/>
           <p:cNvSpPr txBox="1"/>
           <p:nvPr/>
         </p:nvSpPr>
         <p:spPr>
           <a:xfrm>
-            <a:off x="3520440" y="1645920"/>
-            <a:ext cx="2286000" cy="365760"/>
-          </a:xfrm>
-          <a:prstGeom prst="rect">
-            <a:avLst/>
-          </a:prstGeom>
-          <a:noFill/>
-        </p:spPr>
-        <p:txBody>
-          <a:bodyPr wrap="square">
-            <a:spAutoFit/>
-          </a:bodyPr>
-          <a:lstStyle/>
-          <a:p>
-            <a:pPr algn="l"/>
-            <a:r>
-              <a:rPr sz="1600" b="1">
-                <a:solidFill>
-                  <a:srgbClr val="FF8C42"/>
-                </a:solidFill>
-                <a:latin typeface="Calibri"/>
-              </a:rPr>
-              <a:t>NEXT</a:t>
+            <a:off x="6492240" y="1783080"/>
+            <a:ext cx="4937760" cy="3657600"/>
+          </a:xfrm>
+          <a:prstGeom prst="rect">
+            <a:avLst/>
+          </a:prstGeom>
+          <a:noFill/>
+        </p:spPr>
+        <p:txBody>
+          <a:bodyPr wrap="square">
+            <a:spAutoFit/>
+          </a:bodyPr>
+          <a:lstStyle/>
+          <a:p>
+            <a:pPr algn="l">
+              <a:spcAft>
+                <a:spcPts val="400"/>
+              </a:spcAft>
+            </a:pPr>
+            <a:r>
+              <a:rPr sz="1400" b="0">
+                <a:solidFill>
+                  <a:srgbClr val="CBD5E1"/>
+                </a:solidFill>
+                <a:latin typeface="Calibri"/>
+              </a:rPr>
+              <a:t>Remove public debug endpoints</a:t>
+            </a:r>
+          </a:p>
+          <a:p>
+            <a:pPr algn="l">
+              <a:spcAft>
+                <a:spcPts val="400"/>
+              </a:spcAft>
+            </a:pPr>
+            <a:r>
+              <a:rPr sz="1400" b="0">
+                <a:solidFill>
+                  <a:srgbClr val="CBD5E1"/>
+                </a:solidFill>
+                <a:latin typeface="Calibri"/>
+              </a:rPr>
+              <a:t>Hide stack traces from client errors</a:t>
+            </a:r>
+          </a:p>
+          <a:p>
+            <a:pPr algn="l">
+              <a:spcAft>
+                <a:spcPts val="400"/>
+              </a:spcAft>
+            </a:pPr>
+            <a:r>
+              <a:rPr sz="1400" b="0">
+                <a:solidFill>
+                  <a:srgbClr val="CBD5E1"/>
+                </a:solidFill>
+                <a:latin typeface="Calibri"/>
+              </a:rPr>
+              <a:t>Tighten CORS to known origins</a:t>
+            </a:r>
+          </a:p>
+          <a:p>
+            <a:pPr algn="l">
+              <a:spcAft>
+                <a:spcPts val="400"/>
+              </a:spcAft>
+            </a:pPr>
+            <a:r>
+              <a:rPr sz="1400" b="0">
+                <a:solidFill>
+                  <a:srgbClr val="CBD5E1"/>
+                </a:solidFill>
+                <a:latin typeface="Calibri"/>
+              </a:rPr>
+              <a:t>Rate-limit public GET APIs</a:t>
+            </a:r>
+          </a:p>
+          <a:p>
+            <a:pPr algn="l">
+              <a:spcAft>
+                <a:spcPts val="400"/>
+              </a:spcAft>
+            </a:pPr>
+            <a:r>
+              <a:rPr sz="1400" b="0">
+                <a:solidFill>
+                  <a:srgbClr val="CBD5E1"/>
+                </a:solidFill>
+                <a:latin typeface="Calibri"/>
+              </a:rPr>
+              <a:t>Add WAF/CDN and audit logging</a:t>
+            </a:r>
+          </a:p>
+          <a:p>
+            <a:pPr algn="l">
+              <a:spcAft>
+                <a:spcPts val="400"/>
+              </a:spcAft>
+            </a:pPr>
+            <a:r>
+              <a:rPr sz="1400" b="0">
+                <a:solidFill>
+                  <a:srgbClr val="CBD5E1"/>
+                </a:solidFill>
+                <a:latin typeface="Calibri"/>
+              </a:rPr>
+              <a:t>Add auth when bookmarks or admin ship</a:t>
             </a:r>
           </a:p>
         </p:txBody>
@@ -6363,29 +7199,28 @@
         </p:nvSpPr>
         <p:spPr>
           <a:xfrm>
-            <a:off x="3520440" y="2286000"/>
-            <a:ext cx="2286000" cy="914400"/>
-          </a:xfrm>
-          <a:prstGeom prst="rect">
-            <a:avLst/>
-          </a:prstGeom>
-          <a:noFill/>
-        </p:spPr>
-        <p:txBody>
-          <a:bodyPr wrap="square">
-            <a:spAutoFit/>
-          </a:bodyPr>
-          <a:lstStyle/>
-          <a:p>
-            <a:pPr algn="l"/>
-            <a:r>
-              <a:rPr sz="1600" b="1">
-                <a:solidFill>
-                  <a:srgbClr val="F8FAFC"/>
-                </a:solidFill>
-                <a:latin typeface="Calibri"/>
-              </a:rPr>
-              <a:t>Cache + CDN</a:t>
+            <a:off x="457200" y="6473952"/>
+            <a:ext cx="9601200" cy="256032"/>
+          </a:xfrm>
+          <a:prstGeom prst="rect">
+            <a:avLst/>
+          </a:prstGeom>
+          <a:noFill/>
+        </p:spPr>
+        <p:txBody>
+          <a:bodyPr wrap="none">
+            <a:spAutoFit/>
+          </a:bodyPr>
+          <a:lstStyle/>
+          <a:p>
+            <a:r>
+              <a:rPr sz="1000" b="0">
+                <a:solidFill>
+                  <a:srgbClr val="94A3B8"/>
+                </a:solidFill>
+                <a:latin typeface="Calibri"/>
+              </a:rPr>
+              <a:t>YojanaConnect  |  https://yojnaconnect.prakharkr.online/schemes  |  Technical Pitch</a:t>
             </a:r>
           </a:p>
         </p:txBody>
@@ -6398,402 +7233,29 @@
         </p:nvSpPr>
         <p:spPr>
           <a:xfrm>
-            <a:off x="3520440" y="3383280"/>
-            <a:ext cx="2286000" cy="1645920"/>
-          </a:xfrm>
-          <a:prstGeom prst="rect">
-            <a:avLst/>
-          </a:prstGeom>
-          <a:noFill/>
-        </p:spPr>
-        <p:txBody>
-          <a:bodyPr wrap="square">
-            <a:spAutoFit/>
-          </a:bodyPr>
-          <a:lstStyle/>
-          <a:p>
-            <a:pPr algn="l"/>
-            <a:r>
-              <a:rPr sz="1300" b="0">
+            <a:off x="10698480" y="6473952"/>
+            <a:ext cx="1188720" cy="256032"/>
+          </a:xfrm>
+          <a:prstGeom prst="rect">
+            <a:avLst/>
+          </a:prstGeom>
+          <a:noFill/>
+        </p:spPr>
+        <p:txBody>
+          <a:bodyPr wrap="none">
+            <a:spAutoFit/>
+          </a:bodyPr>
+          <a:lstStyle/>
+          <a:p>
+            <a:pPr algn="r"/>
+            <a:r>
+              <a:rPr sz="1000" b="0">
                 <a:solidFill>
                   <a:srgbClr val="94A3B8"/>
                 </a:solidFill>
                 <a:latin typeface="Calibri"/>
               </a:rPr>
-              <a:t>Redis for popular lists, Cloudflare/Nginx static cache</a:t>
-            </a:r>
-          </a:p>
-        </p:txBody>
-      </p:sp>
-      <p:sp>
-        <p:nvSpPr>
-          <p:cNvPr id="13" name="Rounded Rectangle 12"/>
-          <p:cNvSpPr/>
-          <p:nvPr/>
-        </p:nvSpPr>
-        <p:spPr>
-          <a:xfrm>
-            <a:off x="6217920" y="1371600"/>
-            <a:ext cx="2788920" cy="4023360"/>
-          </a:xfrm>
-          <a:prstGeom prst="roundRect">
-            <a:avLst>
-              <a:gd name="adj" fmla="val 8000"/>
-            </a:avLst>
-          </a:prstGeom>
-          <a:solidFill>
-            <a:srgbClr val="162A45"/>
-          </a:solidFill>
-          <a:ln>
-            <a:solidFill>
-              <a:srgbClr val="2A3F5F"/>
-            </a:solidFill>
-          </a:ln>
-        </p:spPr>
-        <p:style>
-          <a:lnRef idx="1">
-            <a:schemeClr val="accent1"/>
-          </a:lnRef>
-          <a:fillRef idx="3">
-            <a:schemeClr val="accent1"/>
-          </a:fillRef>
-          <a:effectRef idx="2">
-            <a:schemeClr val="accent1"/>
-          </a:effectRef>
-          <a:fontRef idx="minor">
-            <a:schemeClr val="lt1"/>
-          </a:fontRef>
-        </p:style>
-        <p:txBody>
-          <a:bodyPr rtlCol="0" anchor="ctr"/>
-          <a:lstStyle/>
-          <a:p>
-            <a:pPr algn="ctr"/>
-          </a:p>
-        </p:txBody>
-      </p:sp>
-      <p:sp>
-        <p:nvSpPr>
-          <p:cNvPr id="14" name="TextBox 13"/>
-          <p:cNvSpPr txBox="1"/>
-          <p:nvPr/>
-        </p:nvSpPr>
-        <p:spPr>
-          <a:xfrm>
-            <a:off x="6446520" y="1645920"/>
-            <a:ext cx="2286000" cy="365760"/>
-          </a:xfrm>
-          <a:prstGeom prst="rect">
-            <a:avLst/>
-          </a:prstGeom>
-          <a:noFill/>
-        </p:spPr>
-        <p:txBody>
-          <a:bodyPr wrap="square">
-            <a:spAutoFit/>
-          </a:bodyPr>
-          <a:lstStyle/>
-          <a:p>
-            <a:pPr algn="l"/>
-            <a:r>
-              <a:rPr sz="1600" b="1">
-                <a:solidFill>
-                  <a:srgbClr val="FF8C42"/>
-                </a:solidFill>
-                <a:latin typeface="Calibri"/>
-              </a:rPr>
-              <a:t>SCALE</a:t>
-            </a:r>
-          </a:p>
-        </p:txBody>
-      </p:sp>
-      <p:sp>
-        <p:nvSpPr>
-          <p:cNvPr id="15" name="TextBox 14"/>
-          <p:cNvSpPr txBox="1"/>
-          <p:nvPr/>
-        </p:nvSpPr>
-        <p:spPr>
-          <a:xfrm>
-            <a:off x="6446520" y="2286000"/>
-            <a:ext cx="2286000" cy="914400"/>
-          </a:xfrm>
-          <a:prstGeom prst="rect">
-            <a:avLst/>
-          </a:prstGeom>
-          <a:noFill/>
-        </p:spPr>
-        <p:txBody>
-          <a:bodyPr wrap="square">
-            <a:spAutoFit/>
-          </a:bodyPr>
-          <a:lstStyle/>
-          <a:p>
-            <a:pPr algn="l"/>
-            <a:r>
-              <a:rPr sz="1600" b="1">
-                <a:solidFill>
-                  <a:srgbClr val="F8FAFC"/>
-                </a:solidFill>
-                <a:latin typeface="Calibri"/>
-              </a:rPr>
-              <a:t>Horizontal API</a:t>
-            </a:r>
-          </a:p>
-        </p:txBody>
-      </p:sp>
-      <p:sp>
-        <p:nvSpPr>
-          <p:cNvPr id="16" name="TextBox 15"/>
-          <p:cNvSpPr txBox="1"/>
-          <p:nvPr/>
-        </p:nvSpPr>
-        <p:spPr>
-          <a:xfrm>
-            <a:off x="6446520" y="3383280"/>
-            <a:ext cx="2286000" cy="1645920"/>
-          </a:xfrm>
-          <a:prstGeom prst="rect">
-            <a:avLst/>
-          </a:prstGeom>
-          <a:noFill/>
-        </p:spPr>
-        <p:txBody>
-          <a:bodyPr wrap="square">
-            <a:spAutoFit/>
-          </a:bodyPr>
-          <a:lstStyle/>
-          <a:p>
-            <a:pPr algn="l"/>
-            <a:r>
-              <a:rPr sz="1300" b="0">
-                <a:solidFill>
-                  <a:srgbClr val="94A3B8"/>
-                </a:solidFill>
-                <a:latin typeface="Calibri"/>
-              </a:rPr>
-              <a:t>Stateless replicas behind LB; MySQL replica reads</a:t>
-            </a:r>
-          </a:p>
-        </p:txBody>
-      </p:sp>
-      <p:sp>
-        <p:nvSpPr>
-          <p:cNvPr id="17" name="Rounded Rectangle 16"/>
-          <p:cNvSpPr/>
-          <p:nvPr/>
-        </p:nvSpPr>
-        <p:spPr>
-          <a:xfrm>
-            <a:off x="9144000" y="1371600"/>
-            <a:ext cx="2788920" cy="4023360"/>
-          </a:xfrm>
-          <a:prstGeom prst="roundRect">
-            <a:avLst>
-              <a:gd name="adj" fmla="val 8000"/>
-            </a:avLst>
-          </a:prstGeom>
-          <a:solidFill>
-            <a:srgbClr val="162A45"/>
-          </a:solidFill>
-          <a:ln>
-            <a:solidFill>
-              <a:srgbClr val="2A3F5F"/>
-            </a:solidFill>
-          </a:ln>
-        </p:spPr>
-        <p:style>
-          <a:lnRef idx="1">
-            <a:schemeClr val="accent1"/>
-          </a:lnRef>
-          <a:fillRef idx="3">
-            <a:schemeClr val="accent1"/>
-          </a:fillRef>
-          <a:effectRef idx="2">
-            <a:schemeClr val="accent1"/>
-          </a:effectRef>
-          <a:fontRef idx="minor">
-            <a:schemeClr val="lt1"/>
-          </a:fontRef>
-        </p:style>
-        <p:txBody>
-          <a:bodyPr rtlCol="0" anchor="ctr"/>
-          <a:lstStyle/>
-          <a:p>
-            <a:pPr algn="ctr"/>
-          </a:p>
-        </p:txBody>
-      </p:sp>
-      <p:sp>
-        <p:nvSpPr>
-          <p:cNvPr id="18" name="TextBox 17"/>
-          <p:cNvSpPr txBox="1"/>
-          <p:nvPr/>
-        </p:nvSpPr>
-        <p:spPr>
-          <a:xfrm>
-            <a:off x="9372600" y="1645920"/>
-            <a:ext cx="2286000" cy="365760"/>
-          </a:xfrm>
-          <a:prstGeom prst="rect">
-            <a:avLst/>
-          </a:prstGeom>
-          <a:noFill/>
-        </p:spPr>
-        <p:txBody>
-          <a:bodyPr wrap="square">
-            <a:spAutoFit/>
-          </a:bodyPr>
-          <a:lstStyle/>
-          <a:p>
-            <a:pPr algn="l"/>
-            <a:r>
-              <a:rPr sz="1600" b="1">
-                <a:solidFill>
-                  <a:srgbClr val="FF8C42"/>
-                </a:solidFill>
-                <a:latin typeface="Calibri"/>
-              </a:rPr>
-              <a:t>GOV</a:t>
-            </a:r>
-          </a:p>
-        </p:txBody>
-      </p:sp>
-      <p:sp>
-        <p:nvSpPr>
-          <p:cNvPr id="19" name="TextBox 18"/>
-          <p:cNvSpPr txBox="1"/>
-          <p:nvPr/>
-        </p:nvSpPr>
-        <p:spPr>
-          <a:xfrm>
-            <a:off x="9372600" y="2286000"/>
-            <a:ext cx="2286000" cy="914400"/>
-          </a:xfrm>
-          <a:prstGeom prst="rect">
-            <a:avLst/>
-          </a:prstGeom>
-          <a:noFill/>
-        </p:spPr>
-        <p:txBody>
-          <a:bodyPr wrap="square">
-            <a:spAutoFit/>
-          </a:bodyPr>
-          <a:lstStyle/>
-          <a:p>
-            <a:pPr algn="l"/>
-            <a:r>
-              <a:rPr sz="1600" b="1">
-                <a:solidFill>
-                  <a:srgbClr val="F8FAFC"/>
-                </a:solidFill>
-                <a:latin typeface="Calibri"/>
-              </a:rPr>
-              <a:t>Managed hosting</a:t>
-            </a:r>
-          </a:p>
-        </p:txBody>
-      </p:sp>
-      <p:sp>
-        <p:nvSpPr>
-          <p:cNvPr id="20" name="TextBox 19"/>
-          <p:cNvSpPr txBox="1"/>
-          <p:nvPr/>
-        </p:nvSpPr>
-        <p:spPr>
-          <a:xfrm>
-            <a:off x="9372600" y="3383280"/>
-            <a:ext cx="2286000" cy="1645920"/>
-          </a:xfrm>
-          <a:prstGeom prst="rect">
-            <a:avLst/>
-          </a:prstGeom>
-          <a:noFill/>
-        </p:spPr>
-        <p:txBody>
-          <a:bodyPr wrap="square">
-            <a:spAutoFit/>
-          </a:bodyPr>
-          <a:lstStyle/>
-          <a:p>
-            <a:pPr algn="l"/>
-            <a:r>
-              <a:rPr sz="1300" b="0">
-                <a:solidFill>
-                  <a:srgbClr val="94A3B8"/>
-                </a:solidFill>
-                <a:latin typeface="Calibri"/>
-              </a:rPr>
-              <a:t>NIC / state DC / Kubernetes; observability + SLOs</a:t>
-            </a:r>
-          </a:p>
-        </p:txBody>
-      </p:sp>
-      <p:sp>
-        <p:nvSpPr>
-          <p:cNvPr id="21" name="TextBox 20"/>
-          <p:cNvSpPr txBox="1"/>
-          <p:nvPr/>
-        </p:nvSpPr>
-        <p:spPr>
-          <a:xfrm>
-            <a:off x="457200" y="6446520"/>
-            <a:ext cx="9144000" cy="274320"/>
-          </a:xfrm>
-          <a:prstGeom prst="rect">
-            <a:avLst/>
-          </a:prstGeom>
-          <a:noFill/>
-        </p:spPr>
-        <p:txBody>
-          <a:bodyPr wrap="none">
-            <a:spAutoFit/>
-          </a:bodyPr>
-          <a:lstStyle/>
-          <a:p>
-            <a:r>
-              <a:rPr sz="1000" b="0">
-                <a:solidFill>
-                  <a:srgbClr val="94A3B8"/>
-                </a:solidFill>
-                <a:latin typeface="Calibri"/>
-              </a:rPr>
-              <a:t>YojanaConnect  ·  Live: yojnaconnect.prakharkr.online  ·  Confidential pitch</a:t>
-            </a:r>
-          </a:p>
-        </p:txBody>
-      </p:sp>
-      <p:sp>
-        <p:nvSpPr>
-          <p:cNvPr id="22" name="TextBox 21"/>
-          <p:cNvSpPr txBox="1"/>
-          <p:nvPr/>
-        </p:nvSpPr>
-        <p:spPr>
-          <a:xfrm>
-            <a:off x="10789920" y="6446520"/>
-            <a:ext cx="1097280" cy="274320"/>
-          </a:xfrm>
-          <a:prstGeom prst="rect">
-            <a:avLst/>
-          </a:prstGeom>
-          <a:noFill/>
-        </p:spPr>
-        <p:txBody>
-          <a:bodyPr wrap="none">
-            <a:spAutoFit/>
-          </a:bodyPr>
-          <a:lstStyle/>
-          <a:p>
-            <a:pPr algn="r"/>
-            <a:r>
-              <a:rPr sz="1000" b="0">
-                <a:solidFill>
-                  <a:srgbClr val="94A3B8"/>
-                </a:solidFill>
-                <a:latin typeface="Calibri"/>
-              </a:rPr>
-              <a:t>13 / 16</a:t>
+              <a:t>13/16</a:t>
             </a:r>
           </a:p>
         </p:txBody>
@@ -6911,7 +7373,7 @@
         <p:spPr>
           <a:xfrm>
             <a:off x="457200" y="274320"/>
-            <a:ext cx="10972800" cy="411480"/>
+            <a:ext cx="10972800" cy="365760"/>
           </a:xfrm>
           <a:prstGeom prst="rect">
             <a:avLst/>
@@ -6926,13 +7388,13 @@
           <a:p>
             <a:pPr algn="l"/>
             <a:r>
-              <a:rPr sz="2600" b="1">
+              <a:rPr sz="2800" b="1">
                 <a:solidFill>
                   <a:srgbClr val="F8FAFC"/>
                 </a:solidFill>
                 <a:latin typeface="Calibri"/>
               </a:rPr>
-              <a:t>Differentiation vs Generic Portals</a:t>
+              <a:t>Scale and Reliability Path</a:t>
             </a:r>
           </a:p>
         </p:txBody>
@@ -6945,8 +7407,8 @@
         </p:nvSpPr>
         <p:spPr>
           <a:xfrm>
-            <a:off x="548640" y="1051560"/>
-            <a:ext cx="11064240" cy="685800"/>
+            <a:off x="365760" y="1325880"/>
+            <a:ext cx="2788920" cy="4114800"/>
           </a:xfrm>
           <a:prstGeom prst="roundRect">
             <a:avLst>
@@ -6992,8 +7454,8 @@
         </p:nvSpPr>
         <p:spPr>
           <a:xfrm>
-            <a:off x="822960" y="1234440"/>
-            <a:ext cx="3017520" cy="365760"/>
+            <a:off x="594360" y="1600200"/>
+            <a:ext cx="2286000" cy="320040"/>
           </a:xfrm>
           <a:prstGeom prst="rect">
             <a:avLst/>
@@ -7008,13 +7470,13 @@
           <a:p>
             <a:pPr algn="l"/>
             <a:r>
-              <a:rPr sz="1500" b="1">
-                <a:solidFill>
-                  <a:srgbClr val="2DD4BF"/>
-                </a:solidFill>
-                <a:latin typeface="Calibri"/>
-              </a:rPr>
-              <a:t>Life-stage entry</a:t>
+              <a:rPr sz="1600" b="1">
+                <a:solidFill>
+                  <a:srgbClr val="FF8C42"/>
+                </a:solidFill>
+                <a:latin typeface="Calibri"/>
+              </a:rPr>
+              <a:t>NOW</a:t>
             </a:r>
           </a:p>
         </p:txBody>
@@ -7027,8 +7489,8 @@
         </p:nvSpPr>
         <p:spPr>
           <a:xfrm>
-            <a:off x="4023360" y="1234440"/>
-            <a:ext cx="7315200" cy="365760"/>
+            <a:off x="594360" y="2194560"/>
+            <a:ext cx="2286000" cy="914400"/>
           </a:xfrm>
           <a:prstGeom prst="rect">
             <a:avLst/>
@@ -7043,27 +7505,62 @@
           <a:p>
             <a:pPr algn="l"/>
             <a:r>
-              <a:rPr sz="1400" b="0">
-                <a:solidFill>
-                  <a:srgbClr val="CBD5E1"/>
-                </a:solidFill>
-                <a:latin typeface="Calibri"/>
-              </a:rPr>
-              <a:t>Age → personalized shortlist (not ministry-first browsing)</a:t>
-            </a:r>
-          </a:p>
-        </p:txBody>
-      </p:sp>
-      <p:sp>
-        <p:nvSpPr>
-          <p:cNvPr id="8" name="Rounded Rectangle 7"/>
+              <a:rPr sz="1600" b="1">
+                <a:solidFill>
+                  <a:srgbClr val="F8FAFC"/>
+                </a:solidFill>
+                <a:latin typeface="Calibri"/>
+              </a:rPr>
+              <a:t>SPA + Node API + MySQL</a:t>
+            </a:r>
+          </a:p>
+        </p:txBody>
+      </p:sp>
+      <p:sp>
+        <p:nvSpPr>
+          <p:cNvPr id="8" name="TextBox 7"/>
+          <p:cNvSpPr txBox="1"/>
+          <p:nvPr/>
+        </p:nvSpPr>
+        <p:spPr>
+          <a:xfrm>
+            <a:off x="594360" y="3383280"/>
+            <a:ext cx="2286000" cy="1645920"/>
+          </a:xfrm>
+          <a:prstGeom prst="rect">
+            <a:avLst/>
+          </a:prstGeom>
+          <a:noFill/>
+        </p:spPr>
+        <p:txBody>
+          <a:bodyPr wrap="square">
+            <a:spAutoFit/>
+          </a:bodyPr>
+          <a:lstStyle/>
+          <a:p>
+            <a:pPr algn="l"/>
+            <a:r>
+              <a:rPr sz="1300" b="0">
+                <a:solidFill>
+                  <a:srgbClr val="94A3B8"/>
+                </a:solidFill>
+                <a:latin typeface="Calibri"/>
+              </a:rPr>
+              <a:t>Single region, read-heavy catalog, connection pooling</a:t>
+            </a:r>
+          </a:p>
+        </p:txBody>
+      </p:sp>
+      <p:sp>
+        <p:nvSpPr>
+          <p:cNvPr id="9" name="Rounded Rectangle 8"/>
           <p:cNvSpPr/>
           <p:nvPr/>
         </p:nvSpPr>
         <p:spPr>
           <a:xfrm>
-            <a:off x="548640" y="1828800"/>
-            <a:ext cx="11064240" cy="685800"/>
+            <a:off x="3291840" y="1325880"/>
+            <a:ext cx="2788920" cy="4114800"/>
           </a:xfrm>
           <a:prstGeom prst="roundRect">
             <a:avLst>
@@ -7103,14 +7600,14 @@
       </p:sp>
       <p:sp>
         <p:nvSpPr>
-          <p:cNvPr id="9" name="TextBox 8"/>
-          <p:cNvSpPr txBox="1"/>
-          <p:nvPr/>
-        </p:nvSpPr>
-        <p:spPr>
-          <a:xfrm>
-            <a:off x="822960" y="2011680"/>
-            <a:ext cx="3017520" cy="365760"/>
+          <p:cNvPr id="10" name="TextBox 9"/>
+          <p:cNvSpPr txBox="1"/>
+          <p:nvPr/>
+        </p:nvSpPr>
+        <p:spPr>
+          <a:xfrm>
+            <a:off x="3520440" y="1600200"/>
+            <a:ext cx="2286000" cy="320040"/>
           </a:xfrm>
           <a:prstGeom prst="rect">
             <a:avLst/>
@@ -7125,27 +7622,27 @@
           <a:p>
             <a:pPr algn="l"/>
             <a:r>
-              <a:rPr sz="1500" b="1">
-                <a:solidFill>
-                  <a:srgbClr val="2DD4BF"/>
-                </a:solidFill>
-                <a:latin typeface="Calibri"/>
-              </a:rPr>
-              <a:t>Unified UX</a:t>
-            </a:r>
-          </a:p>
-        </p:txBody>
-      </p:sp>
-      <p:sp>
-        <p:nvSpPr>
-          <p:cNvPr id="10" name="TextBox 9"/>
-          <p:cNvSpPr txBox="1"/>
-          <p:nvPr/>
-        </p:nvSpPr>
-        <p:spPr>
-          <a:xfrm>
-            <a:off x="4023360" y="2011680"/>
-            <a:ext cx="7315200" cy="365760"/>
+              <a:rPr sz="1600" b="1">
+                <a:solidFill>
+                  <a:srgbClr val="FF8C42"/>
+                </a:solidFill>
+                <a:latin typeface="Calibri"/>
+              </a:rPr>
+              <a:t>NEXT</a:t>
+            </a:r>
+          </a:p>
+        </p:txBody>
+      </p:sp>
+      <p:sp>
+        <p:nvSpPr>
+          <p:cNvPr id="11" name="TextBox 10"/>
+          <p:cNvSpPr txBox="1"/>
+          <p:nvPr/>
+        </p:nvSpPr>
+        <p:spPr>
+          <a:xfrm>
+            <a:off x="3520440" y="2194560"/>
+            <a:ext cx="2286000" cy="914400"/>
           </a:xfrm>
           <a:prstGeom prst="rect">
             <a:avLst/>
@@ -7160,27 +7657,62 @@
           <a:p>
             <a:pPr algn="l"/>
             <a:r>
-              <a:rPr sz="1400" b="0">
-                <a:solidFill>
-                  <a:srgbClr val="CBD5E1"/>
-                </a:solidFill>
-                <a:latin typeface="Calibri"/>
-              </a:rPr>
-              <a:t>Eligibility + docs + steps + official link in one flow</a:t>
-            </a:r>
-          </a:p>
-        </p:txBody>
-      </p:sp>
-      <p:sp>
-        <p:nvSpPr>
-          <p:cNvPr id="11" name="Rounded Rectangle 10"/>
+              <a:rPr sz="1600" b="1">
+                <a:solidFill>
+                  <a:srgbClr val="F8FAFC"/>
+                </a:solidFill>
+                <a:latin typeface="Calibri"/>
+              </a:rPr>
+              <a:t>Cache + CDN</a:t>
+            </a:r>
+          </a:p>
+        </p:txBody>
+      </p:sp>
+      <p:sp>
+        <p:nvSpPr>
+          <p:cNvPr id="12" name="TextBox 11"/>
+          <p:cNvSpPr txBox="1"/>
+          <p:nvPr/>
+        </p:nvSpPr>
+        <p:spPr>
+          <a:xfrm>
+            <a:off x="3520440" y="3383280"/>
+            <a:ext cx="2286000" cy="1645920"/>
+          </a:xfrm>
+          <a:prstGeom prst="rect">
+            <a:avLst/>
+          </a:prstGeom>
+          <a:noFill/>
+        </p:spPr>
+        <p:txBody>
+          <a:bodyPr wrap="square">
+            <a:spAutoFit/>
+          </a:bodyPr>
+          <a:lstStyle/>
+          <a:p>
+            <a:pPr algn="l"/>
+            <a:r>
+              <a:rPr sz="1300" b="0">
+                <a:solidFill>
+                  <a:srgbClr val="94A3B8"/>
+                </a:solidFill>
+                <a:latin typeface="Calibri"/>
+              </a:rPr>
+              <a:t>Redis for popular lists, edge cache for static assets</a:t>
+            </a:r>
+          </a:p>
+        </p:txBody>
+      </p:sp>
+      <p:sp>
+        <p:nvSpPr>
+          <p:cNvPr id="13" name="Rounded Rectangle 12"/>
           <p:cNvSpPr/>
           <p:nvPr/>
         </p:nvSpPr>
         <p:spPr>
           <a:xfrm>
-            <a:off x="548640" y="2606040"/>
-            <a:ext cx="11064240" cy="685800"/>
+            <a:off x="6217920" y="1325880"/>
+            <a:ext cx="2788920" cy="4114800"/>
           </a:xfrm>
           <a:prstGeom prst="roundRect">
             <a:avLst>
@@ -7220,14 +7752,14 @@
       </p:sp>
       <p:sp>
         <p:nvSpPr>
-          <p:cNvPr id="12" name="TextBox 11"/>
-          <p:cNvSpPr txBox="1"/>
-          <p:nvPr/>
-        </p:nvSpPr>
-        <p:spPr>
-          <a:xfrm>
-            <a:off x="822960" y="2788920"/>
-            <a:ext cx="3017520" cy="365760"/>
+          <p:cNvPr id="14" name="TextBox 13"/>
+          <p:cNvSpPr txBox="1"/>
+          <p:nvPr/>
+        </p:nvSpPr>
+        <p:spPr>
+          <a:xfrm>
+            <a:off x="6446520" y="1600200"/>
+            <a:ext cx="2286000" cy="320040"/>
           </a:xfrm>
           <a:prstGeom prst="rect">
             <a:avLst/>
@@ -7242,27 +7774,27 @@
           <a:p>
             <a:pPr algn="l"/>
             <a:r>
-              <a:rPr sz="1500" b="1">
-                <a:solidFill>
-                  <a:srgbClr val="2DD4BF"/>
-                </a:solidFill>
-                <a:latin typeface="Calibri"/>
-              </a:rPr>
-              <a:t>Bilingual native</a:t>
-            </a:r>
-          </a:p>
-        </p:txBody>
-      </p:sp>
-      <p:sp>
-        <p:nvSpPr>
-          <p:cNvPr id="13" name="TextBox 12"/>
-          <p:cNvSpPr txBox="1"/>
-          <p:nvPr/>
-        </p:nvSpPr>
-        <p:spPr>
-          <a:xfrm>
-            <a:off x="4023360" y="2788920"/>
-            <a:ext cx="7315200" cy="365760"/>
+              <a:rPr sz="1600" b="1">
+                <a:solidFill>
+                  <a:srgbClr val="FF8C42"/>
+                </a:solidFill>
+                <a:latin typeface="Calibri"/>
+              </a:rPr>
+              <a:t>SCALE</a:t>
+            </a:r>
+          </a:p>
+        </p:txBody>
+      </p:sp>
+      <p:sp>
+        <p:nvSpPr>
+          <p:cNvPr id="15" name="TextBox 14"/>
+          <p:cNvSpPr txBox="1"/>
+          <p:nvPr/>
+        </p:nvSpPr>
+        <p:spPr>
+          <a:xfrm>
+            <a:off x="6446520" y="2194560"/>
+            <a:ext cx="2286000" cy="914400"/>
           </a:xfrm>
           <a:prstGeom prst="rect">
             <a:avLst/>
@@ -7277,27 +7809,62 @@
           <a:p>
             <a:pPr algn="l"/>
             <a:r>
-              <a:rPr sz="1400" b="0">
-                <a:solidFill>
-                  <a:srgbClr val="CBD5E1"/>
-                </a:solidFill>
-                <a:latin typeface="Calibri"/>
-              </a:rPr>
-              <a:t>EN / HI UI + Hindi scheme names in data model</a:t>
-            </a:r>
-          </a:p>
-        </p:txBody>
-      </p:sp>
-      <p:sp>
-        <p:nvSpPr>
-          <p:cNvPr id="14" name="Rounded Rectangle 13"/>
+              <a:rPr sz="1600" b="1">
+                <a:solidFill>
+                  <a:srgbClr val="F8FAFC"/>
+                </a:solidFill>
+                <a:latin typeface="Calibri"/>
+              </a:rPr>
+              <a:t>Horizontal API</a:t>
+            </a:r>
+          </a:p>
+        </p:txBody>
+      </p:sp>
+      <p:sp>
+        <p:nvSpPr>
+          <p:cNvPr id="16" name="TextBox 15"/>
+          <p:cNvSpPr txBox="1"/>
+          <p:nvPr/>
+        </p:nvSpPr>
+        <p:spPr>
+          <a:xfrm>
+            <a:off x="6446520" y="3383280"/>
+            <a:ext cx="2286000" cy="1645920"/>
+          </a:xfrm>
+          <a:prstGeom prst="rect">
+            <a:avLst/>
+          </a:prstGeom>
+          <a:noFill/>
+        </p:spPr>
+        <p:txBody>
+          <a:bodyPr wrap="square">
+            <a:spAutoFit/>
+          </a:bodyPr>
+          <a:lstStyle/>
+          <a:p>
+            <a:pPr algn="l"/>
+            <a:r>
+              <a:rPr sz="1300" b="0">
+                <a:solidFill>
+                  <a:srgbClr val="94A3B8"/>
+                </a:solidFill>
+                <a:latin typeface="Calibri"/>
+              </a:rPr>
+              <a:t>Stateless replicas behind load balancer, DB read replicas</a:t>
+            </a:r>
+          </a:p>
+        </p:txBody>
+      </p:sp>
+      <p:sp>
+        <p:nvSpPr>
+          <p:cNvPr id="17" name="Rounded Rectangle 16"/>
           <p:cNvSpPr/>
           <p:nvPr/>
         </p:nvSpPr>
         <p:spPr>
           <a:xfrm>
-            <a:off x="548640" y="3383280"/>
-            <a:ext cx="11064240" cy="685800"/>
+            <a:off x="9144000" y="1325880"/>
+            <a:ext cx="2788920" cy="4114800"/>
           </a:xfrm>
           <a:prstGeom prst="roundRect">
             <a:avLst>
@@ -7337,14 +7904,14 @@
       </p:sp>
       <p:sp>
         <p:nvSpPr>
-          <p:cNvPr id="15" name="TextBox 14"/>
-          <p:cNvSpPr txBox="1"/>
-          <p:nvPr/>
-        </p:nvSpPr>
-        <p:spPr>
-          <a:xfrm>
-            <a:off x="822960" y="3566160"/>
-            <a:ext cx="3017520" cy="365760"/>
+          <p:cNvPr id="18" name="TextBox 17"/>
+          <p:cNvSpPr txBox="1"/>
+          <p:nvPr/>
+        </p:nvSpPr>
+        <p:spPr>
+          <a:xfrm>
+            <a:off x="9372600" y="1600200"/>
+            <a:ext cx="2286000" cy="320040"/>
           </a:xfrm>
           <a:prstGeom prst="rect">
             <a:avLst/>
@@ -7359,27 +7926,27 @@
           <a:p>
             <a:pPr algn="l"/>
             <a:r>
-              <a:rPr sz="1500" b="1">
-                <a:solidFill>
-                  <a:srgbClr val="2DD4BF"/>
-                </a:solidFill>
-                <a:latin typeface="Calibri"/>
-              </a:rPr>
-              <a:t>In-product guide</a:t>
-            </a:r>
-          </a:p>
-        </p:txBody>
-      </p:sp>
-      <p:sp>
-        <p:nvSpPr>
-          <p:cNvPr id="16" name="TextBox 15"/>
-          <p:cNvSpPr txBox="1"/>
-          <p:nvPr/>
-        </p:nvSpPr>
-        <p:spPr>
-          <a:xfrm>
-            <a:off x="4023360" y="3566160"/>
-            <a:ext cx="7315200" cy="365760"/>
+              <a:rPr sz="1600" b="1">
+                <a:solidFill>
+                  <a:srgbClr val="FF8C42"/>
+                </a:solidFill>
+                <a:latin typeface="Calibri"/>
+              </a:rPr>
+              <a:t>GOV</a:t>
+            </a:r>
+          </a:p>
+        </p:txBody>
+      </p:sp>
+      <p:sp>
+        <p:nvSpPr>
+          <p:cNvPr id="19" name="TextBox 18"/>
+          <p:cNvSpPr txBox="1"/>
+          <p:nvPr/>
+        </p:nvSpPr>
+        <p:spPr>
+          <a:xfrm>
+            <a:off x="9372600" y="2194560"/>
+            <a:ext cx="2286000" cy="914400"/>
           </a:xfrm>
           <a:prstGeom prst="rect">
             <a:avLst/>
@@ -7394,74 +7961,27 @@
           <a:p>
             <a:pPr algn="l"/>
             <a:r>
-              <a:rPr sz="1400" b="0">
-                <a:solidFill>
-                  <a:srgbClr val="CBD5E1"/>
-                </a:solidFill>
-                <a:latin typeface="Calibri"/>
-              </a:rPr>
-              <a:t>YojanaBot for high-frequency scheme FAQs</a:t>
-            </a:r>
-          </a:p>
-        </p:txBody>
-      </p:sp>
-      <p:sp>
-        <p:nvSpPr>
-          <p:cNvPr id="17" name="Rounded Rectangle 16"/>
-          <p:cNvSpPr/>
-          <p:nvPr/>
-        </p:nvSpPr>
-        <p:spPr>
-          <a:xfrm>
-            <a:off x="548640" y="4160520"/>
-            <a:ext cx="11064240" cy="685800"/>
-          </a:xfrm>
-          <a:prstGeom prst="roundRect">
-            <a:avLst>
-              <a:gd name="adj" fmla="val 8000"/>
-            </a:avLst>
-          </a:prstGeom>
-          <a:solidFill>
-            <a:srgbClr val="162A45"/>
-          </a:solidFill>
-          <a:ln>
-            <a:solidFill>
-              <a:srgbClr val="2A3F5F"/>
-            </a:solidFill>
-          </a:ln>
-        </p:spPr>
-        <p:style>
-          <a:lnRef idx="1">
-            <a:schemeClr val="accent1"/>
-          </a:lnRef>
-          <a:fillRef idx="3">
-            <a:schemeClr val="accent1"/>
-          </a:fillRef>
-          <a:effectRef idx="2">
-            <a:schemeClr val="accent1"/>
-          </a:effectRef>
-          <a:fontRef idx="minor">
-            <a:schemeClr val="lt1"/>
-          </a:fontRef>
-        </p:style>
-        <p:txBody>
-          <a:bodyPr rtlCol="0" anchor="ctr"/>
-          <a:lstStyle/>
-          <a:p>
-            <a:pPr algn="ctr"/>
-          </a:p>
-        </p:txBody>
-      </p:sp>
-      <p:sp>
-        <p:nvSpPr>
-          <p:cNvPr id="18" name="TextBox 17"/>
-          <p:cNvSpPr txBox="1"/>
-          <p:nvPr/>
-        </p:nvSpPr>
-        <p:spPr>
-          <a:xfrm>
-            <a:off x="822960" y="4343400"/>
-            <a:ext cx="3017520" cy="365760"/>
+              <a:rPr sz="1600" b="1">
+                <a:solidFill>
+                  <a:srgbClr val="F8FAFC"/>
+                </a:solidFill>
+                <a:latin typeface="Calibri"/>
+              </a:rPr>
+              <a:t>Managed hosting</a:t>
+            </a:r>
+          </a:p>
+        </p:txBody>
+      </p:sp>
+      <p:sp>
+        <p:nvSpPr>
+          <p:cNvPr id="20" name="TextBox 19"/>
+          <p:cNvSpPr txBox="1"/>
+          <p:nvPr/>
+        </p:nvSpPr>
+        <p:spPr>
+          <a:xfrm>
+            <a:off x="9372600" y="3383280"/>
+            <a:ext cx="2286000" cy="1645920"/>
           </a:xfrm>
           <a:prstGeom prst="rect">
             <a:avLst/>
@@ -7476,96 +7996,14 @@
           <a:p>
             <a:pPr algn="l"/>
             <a:r>
-              <a:rPr sz="1500" b="1">
-                <a:solidFill>
-                  <a:srgbClr val="2DD4BF"/>
-                </a:solidFill>
-                <a:latin typeface="Calibri"/>
-              </a:rPr>
-              <a:t>Extensible API</a:t>
-            </a:r>
-          </a:p>
-        </p:txBody>
-      </p:sp>
-      <p:sp>
-        <p:nvSpPr>
-          <p:cNvPr id="19" name="TextBox 18"/>
-          <p:cNvSpPr txBox="1"/>
-          <p:nvPr/>
-        </p:nvSpPr>
-        <p:spPr>
-          <a:xfrm>
-            <a:off x="4023360" y="4343400"/>
-            <a:ext cx="7315200" cy="365760"/>
-          </a:xfrm>
-          <a:prstGeom prst="rect">
-            <a:avLst/>
-          </a:prstGeom>
-          <a:noFill/>
-        </p:spPr>
-        <p:txBody>
-          <a:bodyPr wrap="square">
-            <a:spAutoFit/>
-          </a:bodyPr>
-          <a:lstStyle/>
-          <a:p>
-            <a:pPr algn="l"/>
-            <a:r>
-              <a:rPr sz="1400" b="0">
-                <a:solidFill>
-                  <a:srgbClr val="CBD5E1"/>
-                </a:solidFill>
-                <a:latin typeface="Calibri"/>
-              </a:rPr>
-              <a:t>Same REST can power CSC kiosks / WhatsApp later</a:t>
-            </a:r>
-          </a:p>
-        </p:txBody>
-      </p:sp>
-      <p:sp>
-        <p:nvSpPr>
-          <p:cNvPr id="20" name="Rounded Rectangle 19"/>
-          <p:cNvSpPr/>
-          <p:nvPr/>
-        </p:nvSpPr>
-        <p:spPr>
-          <a:xfrm>
-            <a:off x="548640" y="4937760"/>
-            <a:ext cx="11064240" cy="685800"/>
-          </a:xfrm>
-          <a:prstGeom prst="roundRect">
-            <a:avLst>
-              <a:gd name="adj" fmla="val 8000"/>
-            </a:avLst>
-          </a:prstGeom>
-          <a:solidFill>
-            <a:srgbClr val="162A45"/>
-          </a:solidFill>
-          <a:ln>
-            <a:solidFill>
-              <a:srgbClr val="2A3F5F"/>
-            </a:solidFill>
-          </a:ln>
-        </p:spPr>
-        <p:style>
-          <a:lnRef idx="1">
-            <a:schemeClr val="accent1"/>
-          </a:lnRef>
-          <a:fillRef idx="3">
-            <a:schemeClr val="accent1"/>
-          </a:fillRef>
-          <a:effectRef idx="2">
-            <a:schemeClr val="accent1"/>
-          </a:effectRef>
-          <a:fontRef idx="minor">
-            <a:schemeClr val="lt1"/>
-          </a:fontRef>
-        </p:style>
-        <p:txBody>
-          <a:bodyPr rtlCol="0" anchor="ctr"/>
-          <a:lstStyle/>
-          <a:p>
-            <a:pPr algn="ctr"/>
+              <a:rPr sz="1300" b="0">
+                <a:solidFill>
+                  <a:srgbClr val="94A3B8"/>
+                </a:solidFill>
+                <a:latin typeface="Calibri"/>
+              </a:rPr>
+              <a:t>NIC or state data center, Kubernetes, SLOs and monitoring</a:t>
+            </a:r>
           </a:p>
         </p:txBody>
       </p:sp>
@@ -7577,29 +8015,28 @@
         </p:nvSpPr>
         <p:spPr>
           <a:xfrm>
-            <a:off x="822960" y="5120640"/>
-            <a:ext cx="3017520" cy="365760"/>
-          </a:xfrm>
-          <a:prstGeom prst="rect">
-            <a:avLst/>
-          </a:prstGeom>
-          <a:noFill/>
-        </p:spPr>
-        <p:txBody>
-          <a:bodyPr wrap="square">
-            <a:spAutoFit/>
-          </a:bodyPr>
-          <a:lstStyle/>
-          <a:p>
-            <a:pPr algn="l"/>
-            <a:r>
-              <a:rPr sz="1500" b="1">
-                <a:solidFill>
-                  <a:srgbClr val="2DD4BF"/>
-                </a:solidFill>
-                <a:latin typeface="Calibri"/>
-              </a:rPr>
-              <a:t>TN-ready story</a:t>
+            <a:off x="457200" y="6473952"/>
+            <a:ext cx="9601200" cy="256032"/>
+          </a:xfrm>
+          <a:prstGeom prst="rect">
+            <a:avLst/>
+          </a:prstGeom>
+          <a:noFill/>
+        </p:spPr>
+        <p:txBody>
+          <a:bodyPr wrap="none">
+            <a:spAutoFit/>
+          </a:bodyPr>
+          <a:lstStyle/>
+          <a:p>
+            <a:r>
+              <a:rPr sz="1000" b="0">
+                <a:solidFill>
+                  <a:srgbClr val="94A3B8"/>
+                </a:solidFill>
+                <a:latin typeface="Calibri"/>
+              </a:rPr>
+              <a:t>YojanaConnect  |  https://yojnaconnect.prakharkr.online/schemes  |  Technical Pitch</a:t>
             </a:r>
           </a:p>
         </p:txBody>
@@ -7612,43 +8049,8 @@
         </p:nvSpPr>
         <p:spPr>
           <a:xfrm>
-            <a:off x="4023360" y="5120640"/>
-            <a:ext cx="7315200" cy="365760"/>
-          </a:xfrm>
-          <a:prstGeom prst="rect">
-            <a:avLst/>
-          </a:prstGeom>
-          <a:noFill/>
-        </p:spPr>
-        <p:txBody>
-          <a:bodyPr wrap="square">
-            <a:spAutoFit/>
-          </a:bodyPr>
-          <a:lstStyle/>
-          <a:p>
-            <a:pPr algn="l"/>
-            <a:r>
-              <a:rPr sz="1400" b="0">
-                <a:solidFill>
-                  <a:srgbClr val="CBD5E1"/>
-                </a:solidFill>
-                <a:latin typeface="Calibri"/>
-              </a:rPr>
-              <a:t>State layer + Tamil localization as pilot upgrade</a:t>
-            </a:r>
-          </a:p>
-        </p:txBody>
-      </p:sp>
-      <p:sp>
-        <p:nvSpPr>
-          <p:cNvPr id="23" name="TextBox 22"/>
-          <p:cNvSpPr txBox="1"/>
-          <p:nvPr/>
-        </p:nvSpPr>
-        <p:spPr>
-          <a:xfrm>
-            <a:off x="457200" y="6446520"/>
-            <a:ext cx="9144000" cy="274320"/>
+            <a:off x="10698480" y="6473952"/>
+            <a:ext cx="1188720" cy="256032"/>
           </a:xfrm>
           <a:prstGeom prst="rect">
             <a:avLst/>
@@ -7661,6 +8063,7 @@
           </a:bodyPr>
           <a:lstStyle/>
           <a:p>
+            <a:pPr algn="r"/>
             <a:r>
               <a:rPr sz="1000" b="0">
                 <a:solidFill>
@@ -7668,42 +8071,7 @@
                 </a:solidFill>
                 <a:latin typeface="Calibri"/>
               </a:rPr>
-              <a:t>YojanaConnect  ·  Live: yojnaconnect.prakharkr.online  ·  Confidential pitch</a:t>
-            </a:r>
-          </a:p>
-        </p:txBody>
-      </p:sp>
-      <p:sp>
-        <p:nvSpPr>
-          <p:cNvPr id="24" name="TextBox 23"/>
-          <p:cNvSpPr txBox="1"/>
-          <p:nvPr/>
-        </p:nvSpPr>
-        <p:spPr>
-          <a:xfrm>
-            <a:off x="10789920" y="6446520"/>
-            <a:ext cx="1097280" cy="274320"/>
-          </a:xfrm>
-          <a:prstGeom prst="rect">
-            <a:avLst/>
-          </a:prstGeom>
-          <a:noFill/>
-        </p:spPr>
-        <p:txBody>
-          <a:bodyPr wrap="none">
-            <a:spAutoFit/>
-          </a:bodyPr>
-          <a:lstStyle/>
-          <a:p>
-            <a:pPr algn="r"/>
-            <a:r>
-              <a:rPr sz="1000" b="0">
-                <a:solidFill>
-                  <a:srgbClr val="94A3B8"/>
-                </a:solidFill>
-                <a:latin typeface="Calibri"/>
-              </a:rPr>
-              <a:t>14 / 16</a:t>
+              <a:t>14/16</a:t>
             </a:r>
           </a:p>
         </p:txBody>
@@ -7821,7 +8189,7 @@
         <p:spPr>
           <a:xfrm>
             <a:off x="457200" y="274320"/>
-            <a:ext cx="10972800" cy="411480"/>
+            <a:ext cx="10972800" cy="365760"/>
           </a:xfrm>
           <a:prstGeom prst="rect">
             <a:avLst/>
@@ -7855,8 +8223,8 @@
         </p:nvSpPr>
         <p:spPr>
           <a:xfrm>
-            <a:off x="548640" y="1280160"/>
-            <a:ext cx="3611880" cy="4114800"/>
+            <a:off x="548640" y="1234440"/>
+            <a:ext cx="3611880" cy="4206240"/>
           </a:xfrm>
           <a:prstGeom prst="roundRect">
             <a:avLst>
@@ -7902,8 +8270,8 @@
         </p:nvSpPr>
         <p:spPr>
           <a:xfrm>
-            <a:off x="822960" y="1554480"/>
-            <a:ext cx="3017520" cy="365760"/>
+            <a:off x="822960" y="1508760"/>
+            <a:ext cx="3017520" cy="320040"/>
           </a:xfrm>
           <a:prstGeom prst="rect">
             <a:avLst/>
@@ -7937,7 +8305,7 @@
         </p:nvSpPr>
         <p:spPr>
           <a:xfrm>
-            <a:off x="822960" y="2103120"/>
+            <a:off x="822960" y="2011680"/>
             <a:ext cx="3017520" cy="457200"/>
           </a:xfrm>
           <a:prstGeom prst="rect">
@@ -7972,8 +8340,8 @@
         </p:nvSpPr>
         <p:spPr>
           <a:xfrm>
-            <a:off x="822960" y="2926080"/>
-            <a:ext cx="3017520" cy="2011680"/>
+            <a:off x="822960" y="2834640"/>
+            <a:ext cx="3017520" cy="2103120"/>
           </a:xfrm>
           <a:prstGeom prst="rect">
             <a:avLst/>
@@ -7988,7 +8356,7 @@
           <a:p>
             <a:pPr algn="l">
               <a:spcAft>
-                <a:spcPts val="600"/>
+                <a:spcPts val="400"/>
               </a:spcAft>
             </a:pPr>
             <a:r>
@@ -8004,7 +8372,7 @@
           <a:p>
             <a:pPr algn="l">
               <a:spcAft>
-                <a:spcPts val="600"/>
+                <a:spcPts val="400"/>
               </a:spcAft>
             </a:pPr>
             <a:r>
@@ -8014,13 +8382,13 @@
                 </a:solidFill>
                 <a:latin typeface="Calibri"/>
               </a:rPr>
-              <a:t>Top TN schemes seed</a:t>
+              <a:t>Top TN schemes content</a:t>
             </a:r>
           </a:p>
           <a:p>
             <a:pPr algn="l">
               <a:spcAft>
-                <a:spcPts val="600"/>
+                <a:spcPts val="400"/>
               </a:spcAft>
             </a:pPr>
             <a:r>
@@ -8030,7 +8398,7 @@
                 </a:solidFill>
                 <a:latin typeface="Calibri"/>
               </a:rPr>
-              <a:t>Content QA with dept sources</a:t>
+              <a:t>Department source QA</a:t>
             </a:r>
           </a:p>
         </p:txBody>
@@ -8043,8 +8411,8 @@
         </p:nvSpPr>
         <p:spPr>
           <a:xfrm>
-            <a:off x="4389120" y="1280160"/>
-            <a:ext cx="3611880" cy="4114800"/>
+            <a:off x="4389120" y="1234440"/>
+            <a:ext cx="3611880" cy="4206240"/>
           </a:xfrm>
           <a:prstGeom prst="roundRect">
             <a:avLst>
@@ -8090,8 +8458,8 @@
         </p:nvSpPr>
         <p:spPr>
           <a:xfrm>
-            <a:off x="4663440" y="1554480"/>
-            <a:ext cx="3017520" cy="365760"/>
+            <a:off x="4663440" y="1508760"/>
+            <a:ext cx="3017520" cy="320040"/>
           </a:xfrm>
           <a:prstGeom prst="rect">
             <a:avLst/>
@@ -8125,7 +8493,7 @@
         </p:nvSpPr>
         <p:spPr>
           <a:xfrm>
-            <a:off x="4663440" y="2103120"/>
+            <a:off x="4663440" y="2011680"/>
             <a:ext cx="3017520" cy="457200"/>
           </a:xfrm>
           <a:prstGeom prst="rect">
@@ -8160,8 +8528,8 @@
         </p:nvSpPr>
         <p:spPr>
           <a:xfrm>
-            <a:off x="4663440" y="2926080"/>
-            <a:ext cx="3017520" cy="2011680"/>
+            <a:off x="4663440" y="2834640"/>
+            <a:ext cx="3017520" cy="2103120"/>
           </a:xfrm>
           <a:prstGeom prst="rect">
             <a:avLst/>
@@ -8176,7 +8544,7 @@
           <a:p>
             <a:pPr algn="l">
               <a:spcAft>
-                <a:spcPts val="600"/>
+                <a:spcPts val="400"/>
               </a:spcAft>
             </a:pPr>
             <a:r>
@@ -8186,13 +8554,13 @@
                 </a:solidFill>
                 <a:latin typeface="Calibri"/>
               </a:rPr>
-              <a:t>1–2 districts / CSC</a:t>
+              <a:t>1 to 2 districts or CSC</a:t>
             </a:r>
           </a:p>
           <a:p>
             <a:pPr algn="l">
               <a:spcAft>
-                <a:spcPts val="600"/>
+                <a:spcPts val="400"/>
               </a:spcAft>
             </a:pPr>
             <a:r>
@@ -8208,7 +8576,7 @@
           <a:p>
             <a:pPr algn="l">
               <a:spcAft>
-                <a:spcPts val="600"/>
+                <a:spcPts val="400"/>
               </a:spcAft>
             </a:pPr>
             <a:r>
@@ -8218,7 +8586,7 @@
                 </a:solidFill>
                 <a:latin typeface="Calibri"/>
               </a:rPr>
-              <a:t>Feedback loop</a:t>
+              <a:t>Citizen feedback loop</a:t>
             </a:r>
           </a:p>
         </p:txBody>
@@ -8231,8 +8599,8 @@
         </p:nvSpPr>
         <p:spPr>
           <a:xfrm>
-            <a:off x="8229600" y="1280160"/>
-            <a:ext cx="3611880" cy="4114800"/>
+            <a:off x="8229600" y="1234440"/>
+            <a:ext cx="3611880" cy="4206240"/>
           </a:xfrm>
           <a:prstGeom prst="roundRect">
             <a:avLst>
@@ -8278,8 +8646,8 @@
         </p:nvSpPr>
         <p:spPr>
           <a:xfrm>
-            <a:off x="8503920" y="1554480"/>
-            <a:ext cx="3017520" cy="365760"/>
+            <a:off x="8503920" y="1508760"/>
+            <a:ext cx="3017520" cy="320040"/>
           </a:xfrm>
           <a:prstGeom prst="rect">
             <a:avLst/>
@@ -8313,7 +8681,7 @@
         </p:nvSpPr>
         <p:spPr>
           <a:xfrm>
-            <a:off x="8503920" y="2103120"/>
+            <a:off x="8503920" y="2011680"/>
             <a:ext cx="3017520" cy="457200"/>
           </a:xfrm>
           <a:prstGeom prst="rect">
@@ -8348,8 +8716,8 @@
         </p:nvSpPr>
         <p:spPr>
           <a:xfrm>
-            <a:off x="8503920" y="2926080"/>
-            <a:ext cx="3017520" cy="2011680"/>
+            <a:off x="8503920" y="2834640"/>
+            <a:ext cx="3017520" cy="2103120"/>
           </a:xfrm>
           <a:prstGeom prst="rect">
             <a:avLst/>
@@ -8364,7 +8732,7 @@
           <a:p>
             <a:pPr algn="l">
               <a:spcAft>
-                <a:spcPts val="600"/>
+                <a:spcPts val="400"/>
               </a:spcAft>
             </a:pPr>
             <a:r>
@@ -8380,7 +8748,7 @@
           <a:p>
             <a:pPr algn="l">
               <a:spcAft>
-                <a:spcPts val="600"/>
+                <a:spcPts val="400"/>
               </a:spcAft>
             </a:pPr>
             <a:r>
@@ -8396,7 +8764,7 @@
           <a:p>
             <a:pPr algn="l">
               <a:spcAft>
-                <a:spcPts val="600"/>
+                <a:spcPts val="400"/>
               </a:spcAft>
             </a:pPr>
             <a:r>
@@ -8406,7 +8774,7 @@
                 </a:solidFill>
                 <a:latin typeface="Calibri"/>
               </a:rPr>
-              <a:t>SLA + hosting on gov infra</a:t>
+              <a:t>Gov hosting and SLA</a:t>
             </a:r>
           </a:p>
         </p:txBody>
@@ -8419,8 +8787,8 @@
         </p:nvSpPr>
         <p:spPr>
           <a:xfrm>
-            <a:off x="457200" y="6446520"/>
-            <a:ext cx="9144000" cy="274320"/>
+            <a:off x="457200" y="6473952"/>
+            <a:ext cx="9601200" cy="256032"/>
           </a:xfrm>
           <a:prstGeom prst="rect">
             <a:avLst/>
@@ -8440,7 +8808,7 @@
                 </a:solidFill>
                 <a:latin typeface="Calibri"/>
               </a:rPr>
-              <a:t>YojanaConnect  ·  Live: yojnaconnect.prakharkr.online  ·  Confidential pitch</a:t>
+              <a:t>YojanaConnect  |  https://yojnaconnect.prakharkr.online/schemes  |  Technical Pitch</a:t>
             </a:r>
           </a:p>
         </p:txBody>
@@ -8453,8 +8821,8 @@
         </p:nvSpPr>
         <p:spPr>
           <a:xfrm>
-            <a:off x="10789920" y="6446520"/>
-            <a:ext cx="1097280" cy="274320"/>
+            <a:off x="10698480" y="6473952"/>
+            <a:ext cx="1188720" cy="256032"/>
           </a:xfrm>
           <a:prstGeom prst="rect">
             <a:avLst/>
@@ -8475,7 +8843,7 @@
                 </a:solidFill>
                 <a:latin typeface="Calibri"/>
               </a:rPr>
-              <a:t>15 / 16</a:t>
+              <a:t>15/16</a:t>
             </a:r>
           </a:p>
         </p:txBody>
@@ -8593,7 +8961,7 @@
         <p:spPr>
           <a:xfrm>
             <a:off x="0" y="0"/>
-            <a:ext cx="164592" cy="6858000"/>
+            <a:ext cx="146304" cy="6858000"/>
           </a:xfrm>
           <a:prstGeom prst="rect">
             <a:avLst/>
@@ -8635,8 +9003,8 @@
         </p:nvSpPr>
         <p:spPr>
           <a:xfrm>
-            <a:off x="640080" y="1463040"/>
-            <a:ext cx="2194560" cy="347472"/>
+            <a:off x="640080" y="1417320"/>
+            <a:ext cx="1828800" cy="329184"/>
           </a:xfrm>
           <a:prstGeom prst="roundRect">
             <a:avLst>
@@ -8689,8 +9057,8 @@
         </p:nvSpPr>
         <p:spPr>
           <a:xfrm>
-            <a:off x="640080" y="2011680"/>
-            <a:ext cx="10515600" cy="822960"/>
+            <a:off x="640080" y="1965960"/>
+            <a:ext cx="10972800" cy="731520"/>
           </a:xfrm>
           <a:prstGeom prst="rect">
             <a:avLst/>
@@ -8705,7 +9073,7 @@
           <a:p>
             <a:pPr algn="l"/>
             <a:r>
-              <a:rPr sz="3400" b="1">
+              <a:rPr sz="3200" b="1">
                 <a:solidFill>
                   <a:srgbClr val="F8FAFC"/>
                 </a:solidFill>
@@ -8724,8 +9092,8 @@
         </p:nvSpPr>
         <p:spPr>
           <a:xfrm>
-            <a:off x="640080" y="3017520"/>
-            <a:ext cx="10515600" cy="2011680"/>
+            <a:off x="640080" y="2926080"/>
+            <a:ext cx="10515600" cy="1828800"/>
           </a:xfrm>
           <a:prstGeom prst="rect">
             <a:avLst/>
@@ -8740,7 +9108,7 @@
           <a:p>
             <a:pPr algn="l">
               <a:spcAft>
-                <a:spcPts val="600"/>
+                <a:spcPts val="400"/>
               </a:spcAft>
             </a:pPr>
             <a:r>
@@ -8750,13 +9118,13 @@
                 </a:solidFill>
                 <a:latin typeface="Calibri"/>
               </a:rPr>
-              <a:t>1. Verified TN scheme content + Tamil language pack</a:t>
+              <a:t>1. Verified Tamil Nadu scheme content and Tamil language pack</a:t>
             </a:r>
           </a:p>
           <a:p>
             <a:pPr algn="l">
               <a:spcAft>
-                <a:spcPts val="600"/>
+                <a:spcPts val="400"/>
               </a:spcAft>
             </a:pPr>
             <a:r>
@@ -8766,13 +9134,13 @@
                 </a:solidFill>
                 <a:latin typeface="Calibri"/>
               </a:rPr>
-              <a:t>2. Preferred hosting guidance (state DC / cloud)</a:t>
+              <a:t>2. Preferred hosting guidance (state data center or cloud)</a:t>
             </a:r>
           </a:p>
           <a:p>
             <a:pPr algn="l">
               <a:spcAft>
-                <a:spcPts val="600"/>
+                <a:spcPts val="400"/>
               </a:spcAft>
             </a:pPr>
             <a:r>
@@ -8782,7 +9150,7 @@
                 </a:solidFill>
                 <a:latin typeface="Calibri"/>
               </a:rPr>
-              <a:t>3. CSC / district discovery pilot with measurable KPIs</a:t>
+              <a:t>3. CSC or district discovery pilot with clear KPIs</a:t>
             </a:r>
           </a:p>
         </p:txBody>
@@ -8795,8 +9163,8 @@
         </p:nvSpPr>
         <p:spPr>
           <a:xfrm>
-            <a:off x="640080" y="5029200"/>
-            <a:ext cx="10515600" cy="365760"/>
+            <a:off x="640080" y="4937760"/>
+            <a:ext cx="10972800" cy="365760"/>
           </a:xfrm>
           <a:prstGeom prst="rect">
             <a:avLst/>
@@ -8830,8 +9198,8 @@
         </p:nvSpPr>
         <p:spPr>
           <a:xfrm>
-            <a:off x="640080" y="5577840"/>
-            <a:ext cx="10515600" cy="320040"/>
+            <a:off x="640080" y="5486400"/>
+            <a:ext cx="10972800" cy="320040"/>
           </a:xfrm>
           <a:prstGeom prst="rect">
             <a:avLst/>
@@ -8852,7 +9220,7 @@
                 </a:solidFill>
                 <a:latin typeface="Calibri"/>
               </a:rPr>
-              <a:t>Thank you — open for architecture deep-dive &amp; live walkthrough</a:t>
+              <a:t>Thank you. Ready for architecture deep-dive and live walkthrough.</a:t>
             </a:r>
           </a:p>
         </p:txBody>
@@ -8865,8 +9233,8 @@
         </p:nvSpPr>
         <p:spPr>
           <a:xfrm>
-            <a:off x="457200" y="6446520"/>
-            <a:ext cx="9144000" cy="274320"/>
+            <a:off x="457200" y="6473952"/>
+            <a:ext cx="9601200" cy="256032"/>
           </a:xfrm>
           <a:prstGeom prst="rect">
             <a:avLst/>
@@ -8886,7 +9254,7 @@
                 </a:solidFill>
                 <a:latin typeface="Calibri"/>
               </a:rPr>
-              <a:t>YojanaConnect  ·  Live: yojnaconnect.prakharkr.online  ·  Confidential pitch</a:t>
+              <a:t>YojanaConnect  |  https://yojnaconnect.prakharkr.online/schemes  |  Technical Pitch</a:t>
             </a:r>
           </a:p>
         </p:txBody>
@@ -8899,8 +9267,8 @@
         </p:nvSpPr>
         <p:spPr>
           <a:xfrm>
-            <a:off x="10789920" y="6446520"/>
-            <a:ext cx="1097280" cy="274320"/>
+            <a:off x="10698480" y="6473952"/>
+            <a:ext cx="1188720" cy="256032"/>
           </a:xfrm>
           <a:prstGeom prst="rect">
             <a:avLst/>
@@ -8921,7 +9289,7 @@
                 </a:solidFill>
                 <a:latin typeface="Calibri"/>
               </a:rPr>
-              <a:t>16 / 16</a:t>
+              <a:t>16/16</a:t>
             </a:r>
           </a:p>
         </p:txBody>
@@ -9039,7 +9407,7 @@
         <p:spPr>
           <a:xfrm>
             <a:off x="548640" y="320040"/>
-            <a:ext cx="9144000" cy="457200"/>
+            <a:ext cx="10972800" cy="457200"/>
           </a:xfrm>
           <a:prstGeom prst="rect">
             <a:avLst/>
@@ -9073,8 +9441,8 @@
         </p:nvSpPr>
         <p:spPr>
           <a:xfrm>
-            <a:off x="548640" y="822960"/>
-            <a:ext cx="9144000" cy="320040"/>
+            <a:off x="548640" y="868680"/>
+            <a:ext cx="10972800" cy="274320"/>
           </a:xfrm>
           <a:prstGeom prst="rect">
             <a:avLst/>
@@ -9095,7 +9463,7 @@
                 </a:solidFill>
                 <a:latin typeface="Calibri"/>
               </a:rPr>
-              <a:t>What we will cover in this technical walkthrough</a:t>
+              <a:t>Technical walkthrough for first-impact pitching</a:t>
             </a:r>
           </a:p>
         </p:txBody>
@@ -9108,7 +9476,7 @@
         </p:nvSpPr>
         <p:spPr>
           <a:xfrm>
-            <a:off x="548640" y="1371600"/>
+            <a:off x="548640" y="1325880"/>
             <a:ext cx="11064240" cy="777240"/>
           </a:xfrm>
           <a:prstGeom prst="roundRect">
@@ -9155,8 +9523,8 @@
         </p:nvSpPr>
         <p:spPr>
           <a:xfrm>
-            <a:off x="777240" y="1536192"/>
-            <a:ext cx="914400" cy="457200"/>
+            <a:off x="822960" y="1508760"/>
+            <a:ext cx="914400" cy="411480"/>
           </a:xfrm>
           <a:prstGeom prst="rect">
             <a:avLst/>
@@ -9190,8 +9558,8 @@
         </p:nvSpPr>
         <p:spPr>
           <a:xfrm>
-            <a:off x="1828800" y="1481328"/>
-            <a:ext cx="8229600" cy="320040"/>
+            <a:off x="1920240" y="1435608"/>
+            <a:ext cx="9144000" cy="320040"/>
           </a:xfrm>
           <a:prstGeom prst="rect">
             <a:avLst/>
@@ -9212,7 +9580,7 @@
                 </a:solidFill>
                 <a:latin typeface="Calibri"/>
               </a:rPr>
-              <a:t>Problem → Solution</a:t>
+              <a:t>Problem to Solution</a:t>
             </a:r>
           </a:p>
         </p:txBody>
@@ -9225,8 +9593,8 @@
         </p:nvSpPr>
         <p:spPr>
           <a:xfrm>
-            <a:off x="1828800" y="1783080"/>
-            <a:ext cx="8686800" cy="274320"/>
+            <a:off x="1920240" y="1737360"/>
+            <a:ext cx="9144000" cy="274320"/>
           </a:xfrm>
           <a:prstGeom prst="rect">
             <a:avLst/>
@@ -9247,7 +9615,7 @@
                 </a:solidFill>
                 <a:latin typeface="Calibri"/>
               </a:rPr>
-              <a:t>Why scheme discovery fails citizens today</a:t>
+              <a:t>Why scheme discovery fails and how we fix it</a:t>
             </a:r>
           </a:p>
         </p:txBody>
@@ -9260,7 +9628,7 @@
         </p:nvSpPr>
         <p:spPr>
           <a:xfrm>
-            <a:off x="548640" y="2240280"/>
+            <a:off x="548640" y="2194560"/>
             <a:ext cx="11064240" cy="777240"/>
           </a:xfrm>
           <a:prstGeom prst="roundRect">
@@ -9307,8 +9675,8 @@
         </p:nvSpPr>
         <p:spPr>
           <a:xfrm>
-            <a:off x="777240" y="2404872"/>
-            <a:ext cx="914400" cy="457200"/>
+            <a:off x="822960" y="2377440"/>
+            <a:ext cx="914400" cy="411480"/>
           </a:xfrm>
           <a:prstGeom prst="rect">
             <a:avLst/>
@@ -9342,8 +9710,8 @@
         </p:nvSpPr>
         <p:spPr>
           <a:xfrm>
-            <a:off x="1828800" y="2350008"/>
-            <a:ext cx="8229600" cy="320040"/>
+            <a:off x="1920240" y="2304288"/>
+            <a:ext cx="9144000" cy="320040"/>
           </a:xfrm>
           <a:prstGeom prst="rect">
             <a:avLst/>
@@ -9364,7 +9732,7 @@
                 </a:solidFill>
                 <a:latin typeface="Calibri"/>
               </a:rPr>
-              <a:t>Live Architecture</a:t>
+              <a:t>Live Product</a:t>
             </a:r>
           </a:p>
         </p:txBody>
@@ -9377,8 +9745,8 @@
         </p:nvSpPr>
         <p:spPr>
           <a:xfrm>
-            <a:off x="1828800" y="2651760"/>
-            <a:ext cx="8686800" cy="274320"/>
+            <a:off x="1920240" y="2606040"/>
+            <a:ext cx="9144000" cy="274320"/>
           </a:xfrm>
           <a:prstGeom prst="rect">
             <a:avLst/>
@@ -9399,7 +9767,7 @@
                 </a:solidFill>
                 <a:latin typeface="Calibri"/>
               </a:rPr>
-              <a:t>3-tier design, data flow, API contracts</a:t>
+              <a:t>159 schemes, bilingual UX, real production URL</a:t>
             </a:r>
           </a:p>
         </p:txBody>
@@ -9412,7 +9780,7 @@
         </p:nvSpPr>
         <p:spPr>
           <a:xfrm>
-            <a:off x="548640" y="3108960"/>
+            <a:off x="548640" y="3063240"/>
             <a:ext cx="11064240" cy="777240"/>
           </a:xfrm>
           <a:prstGeom prst="roundRect">
@@ -9459,8 +9827,8 @@
         </p:nvSpPr>
         <p:spPr>
           <a:xfrm>
-            <a:off x="777240" y="3273552"/>
-            <a:ext cx="914400" cy="457200"/>
+            <a:off x="822960" y="3246120"/>
+            <a:ext cx="914400" cy="411480"/>
           </a:xfrm>
           <a:prstGeom prst="rect">
             <a:avLst/>
@@ -9494,8 +9862,8 @@
         </p:nvSpPr>
         <p:spPr>
           <a:xfrm>
-            <a:off x="1828800" y="3218688"/>
-            <a:ext cx="8229600" cy="320040"/>
+            <a:off x="1920240" y="3172968"/>
+            <a:ext cx="9144000" cy="320040"/>
           </a:xfrm>
           <a:prstGeom prst="rect">
             <a:avLst/>
@@ -9516,7 +9884,7 @@
                 </a:solidFill>
                 <a:latin typeface="Calibri"/>
               </a:rPr>
-              <a:t>Engineering Depth</a:t>
+              <a:t>Architecture</a:t>
             </a:r>
           </a:p>
         </p:txBody>
@@ -9529,8 +9897,8 @@
         </p:nvSpPr>
         <p:spPr>
           <a:xfrm>
-            <a:off x="1828800" y="3520440"/>
-            <a:ext cx="8686800" cy="274320"/>
+            <a:off x="1920240" y="3474720"/>
+            <a:ext cx="9144000" cy="274320"/>
           </a:xfrm>
           <a:prstGeom prst="rect">
             <a:avLst/>
@@ -9551,7 +9919,7 @@
                 </a:solidFill>
                 <a:latin typeface="Calibri"/>
               </a:rPr>
-              <a:t>Stack, schema, filtering engine, i18n, bot</a:t>
+              <a:t>React SPA, Express REST API, MySQL knowledge base</a:t>
             </a:r>
           </a:p>
         </p:txBody>
@@ -9564,7 +9932,7 @@
         </p:nvSpPr>
         <p:spPr>
           <a:xfrm>
-            <a:off x="548640" y="3977639"/>
+            <a:off x="548640" y="3931919"/>
             <a:ext cx="11064240" cy="777240"/>
           </a:xfrm>
           <a:prstGeom prst="roundRect">
@@ -9611,8 +9979,8 @@
         </p:nvSpPr>
         <p:spPr>
           <a:xfrm>
-            <a:off x="777240" y="4142231"/>
-            <a:ext cx="914400" cy="457200"/>
+            <a:off x="822960" y="4114799"/>
+            <a:ext cx="914400" cy="411480"/>
           </a:xfrm>
           <a:prstGeom prst="rect">
             <a:avLst/>
@@ -9646,8 +10014,8 @@
         </p:nvSpPr>
         <p:spPr>
           <a:xfrm>
-            <a:off x="1828800" y="4087367"/>
-            <a:ext cx="8229600" cy="320040"/>
+            <a:off x="1920240" y="4041647"/>
+            <a:ext cx="9144000" cy="320040"/>
           </a:xfrm>
           <a:prstGeom prst="rect">
             <a:avLst/>
@@ -9668,7 +10036,7 @@
                 </a:solidFill>
                 <a:latin typeface="Calibri"/>
               </a:rPr>
-              <a:t>Enterprise Readiness</a:t>
+              <a:t>Engineering Depth</a:t>
             </a:r>
           </a:p>
         </p:txBody>
@@ -9681,8 +10049,8 @@
         </p:nvSpPr>
         <p:spPr>
           <a:xfrm>
-            <a:off x="1828800" y="4389119"/>
-            <a:ext cx="8686800" cy="274320"/>
+            <a:off x="1920240" y="4343399"/>
+            <a:ext cx="9144000" cy="274320"/>
           </a:xfrm>
           <a:prstGeom prst="rect">
             <a:avLst/>
@@ -9703,7 +10071,7 @@
                 </a:solidFill>
                 <a:latin typeface="Calibri"/>
               </a:rPr>
-              <a:t>Security, scale path, ops, TN pilot</a:t>
+              <a:t>Filters, APIs, schema, Node/Express request path</a:t>
             </a:r>
           </a:p>
         </p:txBody>
@@ -9716,7 +10084,7 @@
         </p:nvSpPr>
         <p:spPr>
           <a:xfrm>
-            <a:off x="548640" y="4846320"/>
+            <a:off x="548640" y="4800600"/>
             <a:ext cx="11064240" cy="777240"/>
           </a:xfrm>
           <a:prstGeom prst="roundRect">
@@ -9763,8 +10131,8 @@
         </p:nvSpPr>
         <p:spPr>
           <a:xfrm>
-            <a:off x="777240" y="5010912"/>
-            <a:ext cx="914400" cy="457200"/>
+            <a:off x="822960" y="4983480"/>
+            <a:ext cx="914400" cy="411480"/>
           </a:xfrm>
           <a:prstGeom prst="rect">
             <a:avLst/>
@@ -9798,8 +10166,8 @@
         </p:nvSpPr>
         <p:spPr>
           <a:xfrm>
-            <a:off x="1828800" y="4956048"/>
-            <a:ext cx="8229600" cy="320040"/>
+            <a:off x="1920240" y="4910328"/>
+            <a:ext cx="9144000" cy="320040"/>
           </a:xfrm>
           <a:prstGeom prst="rect">
             <a:avLst/>
@@ -9820,7 +10188,7 @@
                 </a:solidFill>
                 <a:latin typeface="Calibri"/>
               </a:rPr>
-              <a:t>Roadmap &amp; Ask</a:t>
+              <a:t>Trust and Pilot Ask</a:t>
             </a:r>
           </a:p>
         </p:txBody>
@@ -9833,8 +10201,8 @@
         </p:nvSpPr>
         <p:spPr>
           <a:xfrm>
-            <a:off x="1828800" y="5257800"/>
-            <a:ext cx="8686800" cy="274320"/>
+            <a:off x="1920240" y="5212080"/>
+            <a:ext cx="9144000" cy="274320"/>
           </a:xfrm>
           <a:prstGeom prst="rect">
             <a:avLst/>
@@ -9855,7 +10223,7 @@
                 </a:solidFill>
                 <a:latin typeface="Calibri"/>
               </a:rPr>
-              <a:t>What ships next and how to partner</a:t>
+              <a:t>Security, scale path, Tamil Nadu next steps</a:t>
             </a:r>
           </a:p>
         </p:txBody>
@@ -9868,8 +10236,8 @@
         </p:nvSpPr>
         <p:spPr>
           <a:xfrm>
-            <a:off x="457200" y="6446520"/>
-            <a:ext cx="9144000" cy="274320"/>
+            <a:off x="457200" y="6473952"/>
+            <a:ext cx="9601200" cy="256032"/>
           </a:xfrm>
           <a:prstGeom prst="rect">
             <a:avLst/>
@@ -9889,7 +10257,7 @@
                 </a:solidFill>
                 <a:latin typeface="Calibri"/>
               </a:rPr>
-              <a:t>YojanaConnect  ·  Live: yojnaconnect.prakharkr.online  ·  Confidential pitch</a:t>
+              <a:t>YojanaConnect  |  https://yojnaconnect.prakharkr.online/schemes  |  Technical Pitch</a:t>
             </a:r>
           </a:p>
         </p:txBody>
@@ -9902,8 +10270,8 @@
         </p:nvSpPr>
         <p:spPr>
           <a:xfrm>
-            <a:off x="10789920" y="6446520"/>
-            <a:ext cx="1097280" cy="274320"/>
+            <a:off x="10698480" y="6473952"/>
+            <a:ext cx="1188720" cy="256032"/>
           </a:xfrm>
           <a:prstGeom prst="rect">
             <a:avLst/>
@@ -9924,7 +10292,7 @@
                 </a:solidFill>
                 <a:latin typeface="Calibri"/>
               </a:rPr>
-              <a:t>02 / 16</a:t>
+              <a:t>02/16</a:t>
             </a:r>
           </a:p>
         </p:txBody>
@@ -10042,7 +10410,7 @@
         <p:spPr>
           <a:xfrm>
             <a:off x="548640" y="320040"/>
-            <a:ext cx="10972800" cy="457200"/>
+            <a:ext cx="10972800" cy="411480"/>
           </a:xfrm>
           <a:prstGeom prst="rect">
             <a:avLst/>
@@ -10077,7 +10445,7 @@
         <p:spPr>
           <a:xfrm>
             <a:off x="548640" y="868680"/>
-            <a:ext cx="10972800" cy="320040"/>
+            <a:ext cx="10972800" cy="274320"/>
           </a:xfrm>
           <a:prstGeom prst="rect">
             <a:avLst/>
@@ -10092,13 +10460,13 @@
           <a:p>
             <a:pPr algn="l"/>
             <a:r>
-              <a:rPr sz="1500" b="0">
+              <a:rPr sz="1400" b="0">
                 <a:solidFill>
                   <a:srgbClr val="94A3B8"/>
                 </a:solidFill>
                 <a:latin typeface="Calibri"/>
               </a:rPr>
-              <a:t>India runs 400+ welfare schemes — eligibility still fails at the first click</a:t>
+              <a:t>India runs 400+ welfare schemes, but eligible citizens still miss benefits</a:t>
             </a:r>
           </a:p>
         </p:txBody>
@@ -10111,8 +10479,8 @@
         </p:nvSpPr>
         <p:spPr>
           <a:xfrm>
-            <a:off x="548640" y="1463040"/>
-            <a:ext cx="5486400" cy="1874519"/>
+            <a:off x="548640" y="1417320"/>
+            <a:ext cx="5486400" cy="1965960"/>
           </a:xfrm>
           <a:prstGeom prst="roundRect">
             <a:avLst>
@@ -10158,8 +10526,8 @@
         </p:nvSpPr>
         <p:spPr>
           <a:xfrm>
-            <a:off x="868680" y="1783080"/>
-            <a:ext cx="4846320" cy="411480"/>
+            <a:off x="868680" y="1737360"/>
+            <a:ext cx="4846320" cy="365760"/>
           </a:xfrm>
           <a:prstGeom prst="rect">
             <a:avLst/>
@@ -10194,7 +10562,7 @@
         <p:spPr>
           <a:xfrm>
             <a:off x="868680" y="2331720"/>
-            <a:ext cx="4846320" cy="731520"/>
+            <a:ext cx="4846320" cy="777240"/>
           </a:xfrm>
           <a:prstGeom prst="rect">
             <a:avLst/>
@@ -10215,7 +10583,7 @@
                 </a:solidFill>
                 <a:latin typeface="Calibri"/>
               </a:rPr>
-              <a:t>Ministry sites, PDFs, state portals — no unified citizen entry</a:t>
+              <a:t>Ministry sites, PDFs, and state portals with no single citizen entry point</a:t>
             </a:r>
           </a:p>
         </p:txBody>
@@ -10228,8 +10596,8 @@
         </p:nvSpPr>
         <p:spPr>
           <a:xfrm>
-            <a:off x="6309360" y="1463040"/>
-            <a:ext cx="5486400" cy="1874519"/>
+            <a:off x="6309360" y="1417320"/>
+            <a:ext cx="5486400" cy="1965960"/>
           </a:xfrm>
           <a:prstGeom prst="roundRect">
             <a:avLst>
@@ -10275,8 +10643,8 @@
         </p:nvSpPr>
         <p:spPr>
           <a:xfrm>
-            <a:off x="6629400" y="1783080"/>
-            <a:ext cx="4846320" cy="411480"/>
+            <a:off x="6629400" y="1737360"/>
+            <a:ext cx="4846320" cy="365760"/>
           </a:xfrm>
           <a:prstGeom prst="rect">
             <a:avLst/>
@@ -10311,7 +10679,7 @@
         <p:spPr>
           <a:xfrm>
             <a:off x="6629400" y="2331720"/>
-            <a:ext cx="4846320" cy="731520"/>
+            <a:ext cx="4846320" cy="777240"/>
           </a:xfrm>
           <a:prstGeom prst="rect">
             <a:avLst/>
@@ -10332,7 +10700,7 @@
                 </a:solidFill>
                 <a:latin typeface="Calibri"/>
               </a:rPr>
-              <a:t>Bureaucratic language blocks rural / first-time digital users</a:t>
+              <a:t>Hard bureaucratic language blocks first-time and rural digital users</a:t>
             </a:r>
           </a:p>
         </p:txBody>
@@ -10346,7 +10714,7 @@
         <p:spPr>
           <a:xfrm>
             <a:off x="548640" y="3566160"/>
-            <a:ext cx="5486400" cy="1874519"/>
+            <a:ext cx="5486400" cy="1965960"/>
           </a:xfrm>
           <a:prstGeom prst="roundRect">
             <a:avLst>
@@ -10393,7 +10761,7 @@
         <p:spPr>
           <a:xfrm>
             <a:off x="868680" y="3886200"/>
-            <a:ext cx="4846320" cy="411480"/>
+            <a:ext cx="4846320" cy="365760"/>
           </a:xfrm>
           <a:prstGeom prst="rect">
             <a:avLst/>
@@ -10427,8 +10795,8 @@
         </p:nvSpPr>
         <p:spPr>
           <a:xfrm>
-            <a:off x="868680" y="4434840"/>
-            <a:ext cx="4846320" cy="731520"/>
+            <a:off x="868680" y="4480560"/>
+            <a:ext cx="4846320" cy="777240"/>
           </a:xfrm>
           <a:prstGeom prst="rect">
             <a:avLst/>
@@ -10449,7 +10817,7 @@
                 </a:solidFill>
                 <a:latin typeface="Calibri"/>
               </a:rPr>
-              <a:t>English-first UX excludes large Hindi / regional audiences</a:t>
+              <a:t>English-first experiences exclude large Hindi and regional audiences</a:t>
             </a:r>
           </a:p>
         </p:txBody>
@@ -10463,7 +10831,7 @@
         <p:spPr>
           <a:xfrm>
             <a:off x="6309360" y="3566160"/>
-            <a:ext cx="5486400" cy="1874519"/>
+            <a:ext cx="5486400" cy="1965960"/>
           </a:xfrm>
           <a:prstGeom prst="roundRect">
             <a:avLst>
@@ -10510,7 +10878,7 @@
         <p:spPr>
           <a:xfrm>
             <a:off x="6629400" y="3886200"/>
-            <a:ext cx="4846320" cy="411480"/>
+            <a:ext cx="4846320" cy="365760"/>
           </a:xfrm>
           <a:prstGeom prst="rect">
             <a:avLst/>
@@ -10531,7 +10899,7 @@
                 </a:solidFill>
                 <a:latin typeface="Calibri"/>
               </a:rPr>
-              <a:t>Zero Personalization</a:t>
+              <a:t>No Personalization</a:t>
             </a:r>
           </a:p>
         </p:txBody>
@@ -10544,8 +10912,8 @@
         </p:nvSpPr>
         <p:spPr>
           <a:xfrm>
-            <a:off x="6629400" y="4434840"/>
-            <a:ext cx="4846320" cy="731520"/>
+            <a:off x="6629400" y="4480560"/>
+            <a:ext cx="4846320" cy="777240"/>
           </a:xfrm>
           <a:prstGeom prst="rect">
             <a:avLst/>
@@ -10566,7 +10934,7 @@
                 </a:solidFill>
                 <a:latin typeface="Calibri"/>
               </a:rPr>
-              <a:t>Users browse catalogs; systems rarely start from life-stage</a:t>
+              <a:t>Users browse catalogs instead of starting from life stage</a:t>
             </a:r>
           </a:p>
         </p:txBody>
@@ -10579,8 +10947,8 @@
         </p:nvSpPr>
         <p:spPr>
           <a:xfrm>
-            <a:off x="457200" y="6446520"/>
-            <a:ext cx="9144000" cy="274320"/>
+            <a:off x="457200" y="6473952"/>
+            <a:ext cx="9601200" cy="256032"/>
           </a:xfrm>
           <a:prstGeom prst="rect">
             <a:avLst/>
@@ -10600,7 +10968,7 @@
                 </a:solidFill>
                 <a:latin typeface="Calibri"/>
               </a:rPr>
-              <a:t>YojanaConnect  ·  Live: yojnaconnect.prakharkr.online  ·  Confidential pitch</a:t>
+              <a:t>YojanaConnect  |  https://yojnaconnect.prakharkr.online/schemes  |  Technical Pitch</a:t>
             </a:r>
           </a:p>
         </p:txBody>
@@ -10613,8 +10981,8 @@
         </p:nvSpPr>
         <p:spPr>
           <a:xfrm>
-            <a:off x="10789920" y="6446520"/>
-            <a:ext cx="1097280" cy="274320"/>
+            <a:off x="10698480" y="6473952"/>
+            <a:ext cx="1188720" cy="256032"/>
           </a:xfrm>
           <a:prstGeom prst="rect">
             <a:avLst/>
@@ -10635,7 +11003,7 @@
                 </a:solidFill>
                 <a:latin typeface="Calibri"/>
               </a:rPr>
-              <a:t>03 / 16</a:t>
+              <a:t>03/16</a:t>
             </a:r>
           </a:p>
         </p:txBody>
@@ -10753,7 +11121,7 @@
         <p:spPr>
           <a:xfrm>
             <a:off x="548640" y="320040"/>
-            <a:ext cx="10972800" cy="457200"/>
+            <a:ext cx="10972800" cy="411480"/>
           </a:xfrm>
           <a:prstGeom prst="rect">
             <a:avLst/>
@@ -10788,7 +11156,7 @@
         <p:spPr>
           <a:xfrm>
             <a:off x="548640" y="868680"/>
-            <a:ext cx="10972800" cy="365760"/>
+            <a:ext cx="10972800" cy="320040"/>
           </a:xfrm>
           <a:prstGeom prst="rect">
             <a:avLst/>
@@ -10803,13 +11171,13 @@
           <a:p>
             <a:pPr algn="l"/>
             <a:r>
-              <a:rPr sz="1500" b="0">
+              <a:rPr sz="1400" b="0">
                 <a:solidFill>
                   <a:srgbClr val="94A3B8"/>
                 </a:solidFill>
                 <a:latin typeface="Calibri"/>
               </a:rPr>
-              <a:t>From “which yojana am I eligible for?” → shortlist + official apply path in under 60 seconds</a:t>
+              <a:t>From “Which yojana am I eligible for?” to a shortlist and official apply path in under 60 seconds</a:t>
             </a:r>
           </a:p>
         </p:txBody>
@@ -10822,8 +11190,8 @@
         </p:nvSpPr>
         <p:spPr>
           <a:xfrm>
-            <a:off x="411480" y="1645920"/>
-            <a:ext cx="2743200" cy="3474720"/>
+            <a:off x="411480" y="1554480"/>
+            <a:ext cx="2788920" cy="3657600"/>
           </a:xfrm>
           <a:prstGeom prst="roundRect">
             <a:avLst>
@@ -10869,7 +11237,7 @@
         </p:nvSpPr>
         <p:spPr>
           <a:xfrm>
-            <a:off x="640080" y="1920240"/>
+            <a:off x="640080" y="1828800"/>
             <a:ext cx="2286000" cy="457200"/>
           </a:xfrm>
           <a:prstGeom prst="rect">
@@ -10885,7 +11253,7 @@
           <a:p>
             <a:pPr algn="l"/>
             <a:r>
-              <a:rPr sz="3600" b="1">
+              <a:rPr sz="3400" b="1">
                 <a:solidFill>
                   <a:srgbClr val="FF8C42"/>
                 </a:solidFill>
@@ -10904,8 +11272,8 @@
         </p:nvSpPr>
         <p:spPr>
           <a:xfrm>
-            <a:off x="640080" y="2651760"/>
-            <a:ext cx="2286000" cy="457200"/>
+            <a:off x="640080" y="2560320"/>
+            <a:ext cx="2286000" cy="365760"/>
           </a:xfrm>
           <a:prstGeom prst="rect">
             <a:avLst/>
@@ -10939,8 +11307,8 @@
         </p:nvSpPr>
         <p:spPr>
           <a:xfrm>
-            <a:off x="640080" y="3291840"/>
-            <a:ext cx="2286000" cy="1371600"/>
+            <a:off x="640080" y="3200400"/>
+            <a:ext cx="2286000" cy="1645920"/>
           </a:xfrm>
           <a:prstGeom prst="rect">
             <a:avLst/>
@@ -10961,7 +11329,7 @@
                 </a:solidFill>
                 <a:latin typeface="Calibri"/>
               </a:rPr>
-              <a:t>Citizen sets age → Teen / YA / Middle / Senior</a:t>
+              <a:t>Citizen sets age. Mapped to Teen, Young Adult, Middle Age, or Senior.</a:t>
             </a:r>
           </a:p>
         </p:txBody>
@@ -10974,8 +11342,8 @@
         </p:nvSpPr>
         <p:spPr>
           <a:xfrm>
-            <a:off x="3337560" y="1645920"/>
-            <a:ext cx="2743200" cy="3474720"/>
+            <a:off x="3337560" y="1554480"/>
+            <a:ext cx="2788920" cy="3657600"/>
           </a:xfrm>
           <a:prstGeom prst="roundRect">
             <a:avLst>
@@ -11021,7 +11389,7 @@
         </p:nvSpPr>
         <p:spPr>
           <a:xfrm>
-            <a:off x="3566160" y="1920240"/>
+            <a:off x="3566160" y="1828800"/>
             <a:ext cx="2286000" cy="457200"/>
           </a:xfrm>
           <a:prstGeom prst="rect">
@@ -11037,7 +11405,7 @@
           <a:p>
             <a:pPr algn="l"/>
             <a:r>
-              <a:rPr sz="3600" b="1">
+              <a:rPr sz="3400" b="1">
                 <a:solidFill>
                   <a:srgbClr val="FF8C42"/>
                 </a:solidFill>
@@ -11056,8 +11424,8 @@
         </p:nvSpPr>
         <p:spPr>
           <a:xfrm>
-            <a:off x="3566160" y="2651760"/>
-            <a:ext cx="2286000" cy="457200"/>
+            <a:off x="3566160" y="2560320"/>
+            <a:ext cx="2286000" cy="365760"/>
           </a:xfrm>
           <a:prstGeom prst="rect">
             <a:avLst/>
@@ -11091,8 +11459,8 @@
         </p:nvSpPr>
         <p:spPr>
           <a:xfrm>
-            <a:off x="3566160" y="3291840"/>
-            <a:ext cx="2286000" cy="1371600"/>
+            <a:off x="3566160" y="3200400"/>
+            <a:ext cx="2286000" cy="1645920"/>
           </a:xfrm>
           <a:prstGeom prst="rect">
             <a:avLst/>
@@ -11113,7 +11481,7 @@
                 </a:solidFill>
                 <a:latin typeface="Calibri"/>
               </a:rPr>
-              <a:t>Sector · Income · Keyword · Central/State</a:t>
+              <a:t>Sector, income, keyword, and central/state filters refine results.</a:t>
             </a:r>
           </a:p>
         </p:txBody>
@@ -11126,8 +11494,8 @@
         </p:nvSpPr>
         <p:spPr>
           <a:xfrm>
-            <a:off x="6263640" y="1645920"/>
-            <a:ext cx="2743200" cy="3474720"/>
+            <a:off x="6263640" y="1554480"/>
+            <a:ext cx="2788920" cy="3657600"/>
           </a:xfrm>
           <a:prstGeom prst="roundRect">
             <a:avLst>
@@ -11173,7 +11541,7 @@
         </p:nvSpPr>
         <p:spPr>
           <a:xfrm>
-            <a:off x="6492240" y="1920240"/>
+            <a:off x="6492240" y="1828800"/>
             <a:ext cx="2286000" cy="457200"/>
           </a:xfrm>
           <a:prstGeom prst="rect">
@@ -11189,7 +11557,7 @@
           <a:p>
             <a:pPr algn="l"/>
             <a:r>
-              <a:rPr sz="3600" b="1">
+              <a:rPr sz="3400" b="1">
                 <a:solidFill>
                   <a:srgbClr val="FF8C42"/>
                 </a:solidFill>
@@ -11208,8 +11576,8 @@
         </p:nvSpPr>
         <p:spPr>
           <a:xfrm>
-            <a:off x="6492240" y="2651760"/>
-            <a:ext cx="2286000" cy="457200"/>
+            <a:off x="6492240" y="2560320"/>
+            <a:ext cx="2286000" cy="365760"/>
           </a:xfrm>
           <a:prstGeom prst="rect">
             <a:avLst/>
@@ -11243,8 +11611,8 @@
         </p:nvSpPr>
         <p:spPr>
           <a:xfrm>
-            <a:off x="6492240" y="3291840"/>
-            <a:ext cx="2286000" cy="1371600"/>
+            <a:off x="6492240" y="3200400"/>
+            <a:ext cx="2286000" cy="1645920"/>
           </a:xfrm>
           <a:prstGeom prst="rect">
             <a:avLst/>
@@ -11265,7 +11633,7 @@
                 </a:solidFill>
                 <a:latin typeface="Calibri"/>
               </a:rPr>
-              <a:t>Eligibility · Docs · Steps · Terms</a:t>
+              <a:t>Eligibility, documents, steps, and terms shown on one page.</a:t>
             </a:r>
           </a:p>
         </p:txBody>
@@ -11278,8 +11646,8 @@
         </p:nvSpPr>
         <p:spPr>
           <a:xfrm>
-            <a:off x="9189720" y="1645920"/>
-            <a:ext cx="2743200" cy="3474720"/>
+            <a:off x="9189720" y="1554480"/>
+            <a:ext cx="2788920" cy="3657600"/>
           </a:xfrm>
           <a:prstGeom prst="roundRect">
             <a:avLst>
@@ -11325,7 +11693,7 @@
         </p:nvSpPr>
         <p:spPr>
           <a:xfrm>
-            <a:off x="9418320" y="1920240"/>
+            <a:off x="9418320" y="1828800"/>
             <a:ext cx="2286000" cy="457200"/>
           </a:xfrm>
           <a:prstGeom prst="rect">
@@ -11341,7 +11709,7 @@
           <a:p>
             <a:pPr algn="l"/>
             <a:r>
-              <a:rPr sz="3600" b="1">
+              <a:rPr sz="3400" b="1">
                 <a:solidFill>
                   <a:srgbClr val="FF8C42"/>
                 </a:solidFill>
@@ -11360,8 +11728,8 @@
         </p:nvSpPr>
         <p:spPr>
           <a:xfrm>
-            <a:off x="9418320" y="2651760"/>
-            <a:ext cx="2286000" cy="457200"/>
+            <a:off x="9418320" y="2560320"/>
+            <a:ext cx="2286000" cy="365760"/>
           </a:xfrm>
           <a:prstGeom prst="rect">
             <a:avLst/>
@@ -11395,8 +11763,8 @@
         </p:nvSpPr>
         <p:spPr>
           <a:xfrm>
-            <a:off x="9418320" y="3291840"/>
-            <a:ext cx="2286000" cy="1371600"/>
+            <a:off x="9418320" y="3200400"/>
+            <a:ext cx="2286000" cy="1645920"/>
           </a:xfrm>
           <a:prstGeom prst="rect">
             <a:avLst/>
@@ -11417,7 +11785,7 @@
                 </a:solidFill>
                 <a:latin typeface="Calibri"/>
               </a:rPr>
-              <a:t>Apply Now → government portal (no PII)</a:t>
+              <a:t>Apply Now opens the government portal. No Aadhaar stored by us.</a:t>
             </a:r>
           </a:p>
         </p:txBody>
@@ -11430,8 +11798,8 @@
         </p:nvSpPr>
         <p:spPr>
           <a:xfrm>
-            <a:off x="457200" y="6446520"/>
-            <a:ext cx="9144000" cy="274320"/>
+            <a:off x="457200" y="6473952"/>
+            <a:ext cx="9601200" cy="256032"/>
           </a:xfrm>
           <a:prstGeom prst="rect">
             <a:avLst/>
@@ -11451,7 +11819,7 @@
                 </a:solidFill>
                 <a:latin typeface="Calibri"/>
               </a:rPr>
-              <a:t>YojanaConnect  ·  Live: yojnaconnect.prakharkr.online  ·  Confidential pitch</a:t>
+              <a:t>YojanaConnect  |  https://yojnaconnect.prakharkr.online/schemes  |  Technical Pitch</a:t>
             </a:r>
           </a:p>
         </p:txBody>
@@ -11464,8 +11832,8 @@
         </p:nvSpPr>
         <p:spPr>
           <a:xfrm>
-            <a:off x="10789920" y="6446520"/>
-            <a:ext cx="1097280" cy="274320"/>
+            <a:off x="10698480" y="6473952"/>
+            <a:ext cx="1188720" cy="256032"/>
           </a:xfrm>
           <a:prstGeom prst="rect">
             <a:avLst/>
@@ -11486,7 +11854,7 @@
                 </a:solidFill>
                 <a:latin typeface="Calibri"/>
               </a:rPr>
-              <a:t>04 / 16</a:t>
+              <a:t>04/16</a:t>
             </a:r>
           </a:p>
         </p:txBody>
@@ -11604,7 +11972,7 @@
         <p:spPr>
           <a:xfrm>
             <a:off x="457200" y="274320"/>
-            <a:ext cx="7315200" cy="411480"/>
+            <a:ext cx="7315200" cy="365760"/>
           </a:xfrm>
           <a:prstGeom prst="rect">
             <a:avLst/>
@@ -12165,7 +12533,7 @@
         </p:nvSpPr>
         <p:spPr>
           <a:xfrm>
-            <a:off x="457200" y="2651760"/>
+            <a:off x="457200" y="2697480"/>
             <a:ext cx="7315200" cy="3200400"/>
           </a:xfrm>
           <a:prstGeom prst="rect">
@@ -12181,7 +12549,7 @@
           <a:p>
             <a:pPr algn="l">
               <a:spcAft>
-                <a:spcPts val="600"/>
+                <a:spcPts val="400"/>
               </a:spcAft>
             </a:pPr>
             <a:r>
@@ -12191,13 +12559,13 @@
                 </a:solidFill>
                 <a:latin typeface="Calibri"/>
               </a:rPr>
-              <a:t>✓ Age-personalized scheme grid with popularity ranking</a:t>
+              <a:t>Age-personalized scheme grid with popularity ranking</a:t>
             </a:r>
           </a:p>
           <a:p>
             <a:pPr algn="l">
               <a:spcAft>
-                <a:spcPts val="600"/>
+                <a:spcPts val="400"/>
               </a:spcAft>
             </a:pPr>
             <a:r>
@@ -12207,13 +12575,13 @@
                 </a:solidFill>
                 <a:latin typeface="Calibri"/>
               </a:rPr>
-              <a:t>✓ Sector + income + keyword filters with live counts</a:t>
+              <a:t>Sector, income, and keyword filters with live counts</a:t>
             </a:r>
           </a:p>
           <a:p>
             <a:pPr algn="l">
               <a:spcAft>
-                <a:spcPts val="600"/>
+                <a:spcPts val="400"/>
               </a:spcAft>
             </a:pPr>
             <a:r>
@@ -12223,13 +12591,13 @@
                 </a:solidFill>
                 <a:latin typeface="Calibri"/>
               </a:rPr>
-              <a:t>✓ Detail pages: eligibility, documents, how-to-apply</a:t>
+              <a:t>Detail pages: eligibility, documents, how-to-apply</a:t>
             </a:r>
           </a:p>
           <a:p>
             <a:pPr algn="l">
               <a:spcAft>
-                <a:spcPts val="600"/>
+                <a:spcPts val="400"/>
               </a:spcAft>
             </a:pPr>
             <a:r>
@@ -12239,13 +12607,13 @@
                 </a:solidFill>
                 <a:latin typeface="Calibri"/>
               </a:rPr>
-              <a:t>✓ WhatsApp share + official Apply Now handoff</a:t>
+              <a:t>WhatsApp share and official Apply Now handoff</a:t>
             </a:r>
           </a:p>
           <a:p>
             <a:pPr algn="l">
               <a:spcAft>
-                <a:spcPts val="600"/>
+                <a:spcPts val="400"/>
               </a:spcAft>
             </a:pPr>
             <a:r>
@@ -12255,13 +12623,13 @@
                 </a:solidFill>
                 <a:latin typeface="Calibri"/>
               </a:rPr>
-              <a:t>✓ YojanaBot guided assistant + EN / हिन्दी i18n</a:t>
+              <a:t>YojanaBot guided assistant and English / Hindi UI</a:t>
             </a:r>
           </a:p>
           <a:p>
             <a:pPr algn="l">
               <a:spcAft>
-                <a:spcPts val="600"/>
+                <a:spcPts val="400"/>
               </a:spcAft>
             </a:pPr>
             <a:r>
@@ -12271,7 +12639,7 @@
                 </a:solidFill>
                 <a:latin typeface="Calibri"/>
               </a:rPr>
-              <a:t>✓ Responsive SPA — mobile-first civic UX</a:t>
+              <a:t>Responsive SPA built for mobile-first civic use</a:t>
             </a:r>
           </a:p>
         </p:txBody>
@@ -12284,8 +12652,8 @@
         </p:nvSpPr>
         <p:spPr>
           <a:xfrm>
-            <a:off x="457200" y="6446520"/>
-            <a:ext cx="9144000" cy="274320"/>
+            <a:off x="457200" y="6473952"/>
+            <a:ext cx="9601200" cy="256032"/>
           </a:xfrm>
           <a:prstGeom prst="rect">
             <a:avLst/>
@@ -12305,7 +12673,7 @@
                 </a:solidFill>
                 <a:latin typeface="Calibri"/>
               </a:rPr>
-              <a:t>YojanaConnect  ·  Live: yojnaconnect.prakharkr.online  ·  Confidential pitch</a:t>
+              <a:t>YojanaConnect  |  https://yojnaconnect.prakharkr.online/schemes  |  Technical Pitch</a:t>
             </a:r>
           </a:p>
         </p:txBody>
@@ -12318,8 +12686,8 @@
         </p:nvSpPr>
         <p:spPr>
           <a:xfrm>
-            <a:off x="10789920" y="6446520"/>
-            <a:ext cx="1097280" cy="274320"/>
+            <a:off x="10698480" y="6473952"/>
+            <a:ext cx="1188720" cy="256032"/>
           </a:xfrm>
           <a:prstGeom prst="rect">
             <a:avLst/>
@@ -12340,7 +12708,7 @@
                 </a:solidFill>
                 <a:latin typeface="Calibri"/>
               </a:rPr>
-              <a:t>05 / 16</a:t>
+              <a:t>05/16</a:t>
             </a:r>
           </a:p>
         </p:txBody>
@@ -12728,8 +13096,8 @@
         </p:nvSpPr>
         <p:spPr>
           <a:xfrm>
-            <a:off x="457200" y="6446520"/>
-            <a:ext cx="9144000" cy="274320"/>
+            <a:off x="457200" y="6473952"/>
+            <a:ext cx="9601200" cy="256032"/>
           </a:xfrm>
           <a:prstGeom prst="rect">
             <a:avLst/>
@@ -12749,7 +13117,7 @@
                 </a:solidFill>
                 <a:latin typeface="Calibri"/>
               </a:rPr>
-              <a:t>YojanaConnect  ·  Live: yojnaconnect.prakharkr.online  ·  Confidential pitch</a:t>
+              <a:t>YojanaConnect  |  https://yojnaconnect.prakharkr.online/schemes  |  Technical Pitch</a:t>
             </a:r>
           </a:p>
         </p:txBody>
@@ -12762,8 +13130,8 @@
         </p:nvSpPr>
         <p:spPr>
           <a:xfrm>
-            <a:off x="10789920" y="6446520"/>
-            <a:ext cx="1097280" cy="274320"/>
+            <a:off x="10698480" y="6473952"/>
+            <a:ext cx="1188720" cy="256032"/>
           </a:xfrm>
           <a:prstGeom prst="rect">
             <a:avLst/>
@@ -12784,7 +13152,7 @@
                 </a:solidFill>
                 <a:latin typeface="Calibri"/>
               </a:rPr>
-              <a:t>06 / 16</a:t>
+              <a:t>06/16</a:t>
             </a:r>
           </a:p>
         </p:txBody>
@@ -12902,7 +13270,7 @@
         <p:spPr>
           <a:xfrm>
             <a:off x="457200" y="274320"/>
-            <a:ext cx="10972800" cy="411480"/>
+            <a:ext cx="10972800" cy="365760"/>
           </a:xfrm>
           <a:prstGeom prst="rect">
             <a:avLst/>
@@ -12936,7 +13304,7 @@
         </p:nvSpPr>
         <p:spPr>
           <a:xfrm>
-            <a:off x="457200" y="731520"/>
+            <a:off x="457200" y="777240"/>
             <a:ext cx="10972800" cy="274320"/>
           </a:xfrm>
           <a:prstGeom prst="rect">
@@ -12958,7 +13326,7 @@
                 </a:solidFill>
                 <a:latin typeface="Calibri"/>
               </a:rPr>
-              <a:t>Classic 3-tier — optimized for clarity, auditability, and gov IT familiarity</a:t>
+              <a:t>Classic 3-tier design: clear, maintainable, familiar to government IT teams</a:t>
             </a:r>
           </a:p>
         </p:txBody>
@@ -12971,8 +13339,8 @@
         </p:nvSpPr>
         <p:spPr>
           <a:xfrm>
-            <a:off x="1371600" y="1234440"/>
-            <a:ext cx="9418320" cy="1371600"/>
+            <a:off x="1280160" y="1280160"/>
+            <a:ext cx="9601200" cy="1371600"/>
           </a:xfrm>
           <a:prstGeom prst="roundRect">
             <a:avLst>
@@ -13018,8 +13386,8 @@
         </p:nvSpPr>
         <p:spPr>
           <a:xfrm>
-            <a:off x="1645920" y="1417320"/>
-            <a:ext cx="2743200" cy="365760"/>
+            <a:off x="1554480" y="1508760"/>
+            <a:ext cx="2926080" cy="365760"/>
           </a:xfrm>
           <a:prstGeom prst="rect">
             <a:avLst/>
@@ -13053,8 +13421,8 @@
         </p:nvSpPr>
         <p:spPr>
           <a:xfrm>
-            <a:off x="4572000" y="1417320"/>
-            <a:ext cx="5852160" cy="1097280"/>
+            <a:off x="4663440" y="1508760"/>
+            <a:ext cx="5852160" cy="1051560"/>
           </a:xfrm>
           <a:prstGeom prst="rect">
             <a:avLst/>
@@ -13069,7 +13437,7 @@
           <a:p>
             <a:pPr algn="l">
               <a:spcAft>
-                <a:spcPts val="600"/>
+                <a:spcPts val="400"/>
               </a:spcAft>
             </a:pPr>
             <a:r>
@@ -13079,13 +13447,13 @@
                 </a:solidFill>
                 <a:latin typeface="Calibri"/>
               </a:rPr>
-              <a:t>React 19 · TypeScript · Vite</a:t>
+              <a:t>React 19, TypeScript, Vite</a:t>
             </a:r>
           </a:p>
           <a:p>
             <a:pPr algn="l">
               <a:spcAft>
-                <a:spcPts val="600"/>
+                <a:spcPts val="400"/>
               </a:spcAft>
             </a:pPr>
             <a:r>
@@ -13095,13 +13463,13 @@
                 </a:solidFill>
                 <a:latin typeface="Calibri"/>
               </a:rPr>
-              <a:t>TanStack Query · Wouter · i18next</a:t>
+              <a:t>TanStack Query, Wouter, i18next</a:t>
             </a:r>
           </a:p>
           <a:p>
             <a:pPr algn="l">
               <a:spcAft>
-                <a:spcPts val="600"/>
+                <a:spcPts val="400"/>
               </a:spcAft>
             </a:pPr>
             <a:r>
@@ -13111,7 +13479,7 @@
                 </a:solidFill>
                 <a:latin typeface="Calibri"/>
               </a:rPr>
-              <a:t>Tailwind v4 · Radix / shadcn</a:t>
+              <a:t>Tailwind CSS v4, Radix / shadcn UI</a:t>
             </a:r>
           </a:p>
         </p:txBody>
@@ -13124,8 +13492,8 @@
         </p:nvSpPr>
         <p:spPr>
           <a:xfrm>
-            <a:off x="1371600" y="2788920"/>
-            <a:ext cx="9418320" cy="1371600"/>
+            <a:off x="1280160" y="2834640"/>
+            <a:ext cx="9601200" cy="1371600"/>
           </a:xfrm>
           <a:prstGeom prst="roundRect">
             <a:avLst>
@@ -13171,8 +13539,8 @@
         </p:nvSpPr>
         <p:spPr>
           <a:xfrm>
-            <a:off x="1645920" y="2971800"/>
-            <a:ext cx="2743200" cy="365760"/>
+            <a:off x="1554480" y="3063240"/>
+            <a:ext cx="2926080" cy="365760"/>
           </a:xfrm>
           <a:prstGeom prst="rect">
             <a:avLst/>
@@ -13206,8 +13574,8 @@
         </p:nvSpPr>
         <p:spPr>
           <a:xfrm>
-            <a:off x="4572000" y="2971800"/>
-            <a:ext cx="5852160" cy="1097280"/>
+            <a:off x="4663440" y="3063240"/>
+            <a:ext cx="5852160" cy="1051560"/>
           </a:xfrm>
           <a:prstGeom prst="rect">
             <a:avLst/>
@@ -13222,7 +13590,7 @@
           <a:p>
             <a:pPr algn="l">
               <a:spcAft>
-                <a:spcPts val="600"/>
+                <a:spcPts val="400"/>
               </a:spcAft>
             </a:pPr>
             <a:r>
@@ -13232,13 +13600,13 @@
                 </a:solidFill>
                 <a:latin typeface="Calibri"/>
               </a:rPr>
-              <a:t>Node.js · Express 5 REST</a:t>
+              <a:t>Node.js and Express 5 REST API</a:t>
             </a:r>
           </a:p>
           <a:p>
             <a:pPr algn="l">
               <a:spcAft>
-                <a:spcPts val="600"/>
+                <a:spcPts val="400"/>
               </a:spcAft>
             </a:pPr>
             <a:r>
@@ -13248,13 +13616,13 @@
                 </a:solidFill>
                 <a:latin typeface="Calibri"/>
               </a:rPr>
-              <a:t>Controllers · parameterized SQL</a:t>
+              <a:t>Controllers with parameterized SQL</a:t>
             </a:r>
           </a:p>
           <a:p>
             <a:pPr algn="l">
               <a:spcAft>
-                <a:spcPts val="600"/>
+                <a:spcPts val="400"/>
               </a:spcAft>
             </a:pPr>
             <a:r>
@@ -13264,7 +13632,7 @@
                 </a:solidFill>
                 <a:latin typeface="Calibri"/>
               </a:rPr>
-              <a:t>JSON field parsers · CORS</a:t>
+              <a:t>JSON field parsers and CORS</a:t>
             </a:r>
           </a:p>
         </p:txBody>
@@ -13277,8 +13645,8 @@
         </p:nvSpPr>
         <p:spPr>
           <a:xfrm>
-            <a:off x="1371600" y="4343400"/>
-            <a:ext cx="9418320" cy="1371600"/>
+            <a:off x="1280160" y="4389120"/>
+            <a:ext cx="9601200" cy="1371600"/>
           </a:xfrm>
           <a:prstGeom prst="roundRect">
             <a:avLst>
@@ -13324,8 +13692,8 @@
         </p:nvSpPr>
         <p:spPr>
           <a:xfrm>
-            <a:off x="1645920" y="4526280"/>
-            <a:ext cx="2743200" cy="365760"/>
+            <a:off x="1554480" y="4617720"/>
+            <a:ext cx="2926080" cy="365760"/>
           </a:xfrm>
           <a:prstGeom prst="rect">
             <a:avLst/>
@@ -13359,8 +13727,8 @@
         </p:nvSpPr>
         <p:spPr>
           <a:xfrm>
-            <a:off x="4572000" y="4526280"/>
-            <a:ext cx="5852160" cy="1097280"/>
+            <a:off x="4663440" y="4617720"/>
+            <a:ext cx="5852160" cy="1051560"/>
           </a:xfrm>
           <a:prstGeom prst="rect">
             <a:avLst/>
@@ -13375,7 +13743,7 @@
           <a:p>
             <a:pPr algn="l">
               <a:spcAft>
-                <a:spcPts val="600"/>
+                <a:spcPts val="400"/>
               </a:spcAft>
             </a:pPr>
             <a:r>
@@ -13385,13 +13753,13 @@
                 </a:solidFill>
                 <a:latin typeface="Calibri"/>
               </a:rPr>
-              <a:t>MySQL 8+</a:t>
+              <a:t>MySQL 8+ scheme knowledge base</a:t>
             </a:r>
           </a:p>
           <a:p>
             <a:pPr algn="l">
               <a:spcAft>
-                <a:spcPts val="600"/>
+                <a:spcPts val="400"/>
               </a:spcAft>
             </a:pPr>
             <a:r>
@@ -13401,13 +13769,13 @@
                 </a:solidFill>
                 <a:latin typeface="Calibri"/>
               </a:rPr>
-              <a:t>JSON columns for age/sectors</a:t>
+              <a:t>JSON columns for age groups and sectors</a:t>
             </a:r>
           </a:p>
           <a:p>
             <a:pPr algn="l">
               <a:spcAft>
-                <a:spcPts val="600"/>
+                <a:spcPts val="400"/>
               </a:spcAft>
             </a:pPr>
             <a:r>
@@ -13417,23 +13785,7 @@
                 </a:solidFill>
                 <a:latin typeface="Calibri"/>
               </a:rPr>
-              <a:t>Popularity score ranking</a:t>
-            </a:r>
-          </a:p>
-          <a:p>
-            <a:pPr algn="l">
-              <a:spcAft>
-                <a:spcPts val="600"/>
-              </a:spcAft>
-            </a:pPr>
-            <a:r>
-              <a:rPr sz="1400" b="0">
-                <a:solidFill>
-                  <a:srgbClr val="CBD5E1"/>
-                </a:solidFill>
-                <a:latin typeface="Calibri"/>
-              </a:rPr>
-              <a:t>Connection pooling</a:t>
+              <a:t>Popularity score ranking and pooling</a:t>
             </a:r>
           </a:p>
         </p:txBody>
@@ -13446,8 +13798,8 @@
         </p:nvSpPr>
         <p:spPr>
           <a:xfrm>
-            <a:off x="457200" y="6446520"/>
-            <a:ext cx="9144000" cy="274320"/>
+            <a:off x="457200" y="6473952"/>
+            <a:ext cx="9601200" cy="256032"/>
           </a:xfrm>
           <a:prstGeom prst="rect">
             <a:avLst/>
@@ -13467,7 +13819,7 @@
                 </a:solidFill>
                 <a:latin typeface="Calibri"/>
               </a:rPr>
-              <a:t>YojanaConnect  ·  Live: yojnaconnect.prakharkr.online  ·  Confidential pitch</a:t>
+              <a:t>YojanaConnect  |  https://yojnaconnect.prakharkr.online/schemes  |  Technical Pitch</a:t>
             </a:r>
           </a:p>
         </p:txBody>
@@ -13480,8 +13832,8 @@
         </p:nvSpPr>
         <p:spPr>
           <a:xfrm>
-            <a:off x="10789920" y="6446520"/>
-            <a:ext cx="1097280" cy="274320"/>
+            <a:off x="10698480" y="6473952"/>
+            <a:ext cx="1188720" cy="256032"/>
           </a:xfrm>
           <a:prstGeom prst="rect">
             <a:avLst/>
@@ -13502,7 +13854,7 @@
                 </a:solidFill>
                 <a:latin typeface="Calibri"/>
               </a:rPr>
-              <a:t>07 / 16</a:t>
+              <a:t>07/16</a:t>
             </a:r>
           </a:p>
         </p:txBody>
@@ -13620,7 +13972,7 @@
         <p:spPr>
           <a:xfrm>
             <a:off x="457200" y="274320"/>
-            <a:ext cx="10972800" cy="411480"/>
+            <a:ext cx="10972800" cy="365760"/>
           </a:xfrm>
           <a:prstGeom prst="rect">
             <a:avLst/>
@@ -13635,27 +13987,62 @@
           <a:p>
             <a:pPr algn="l"/>
             <a:r>
-              <a:rPr sz="2800" b="1">
+              <a:rPr sz="2600" b="1">
                 <a:solidFill>
                   <a:srgbClr val="F8FAFC"/>
                 </a:solidFill>
                 <a:latin typeface="Calibri"/>
               </a:rPr>
-              <a:t>Request Path &amp; Filtering Engine</a:t>
-            </a:r>
-          </a:p>
-        </p:txBody>
-      </p:sp>
-      <p:sp>
-        <p:nvSpPr>
-          <p:cNvPr id="5" name="Rounded Rectangle 4"/>
+              <a:t>How Node.js and Express Work Here</a:t>
+            </a:r>
+          </a:p>
+        </p:txBody>
+      </p:sp>
+      <p:sp>
+        <p:nvSpPr>
+          <p:cNvPr id="5" name="TextBox 4"/>
+          <p:cNvSpPr txBox="1"/>
+          <p:nvPr/>
+        </p:nvSpPr>
+        <p:spPr>
+          <a:xfrm>
+            <a:off x="457200" y="777240"/>
+            <a:ext cx="10972800" cy="274320"/>
+          </a:xfrm>
+          <a:prstGeom prst="rect">
+            <a:avLst/>
+          </a:prstGeom>
+          <a:noFill/>
+        </p:spPr>
+        <p:txBody>
+          <a:bodyPr wrap="square">
+            <a:spAutoFit/>
+          </a:bodyPr>
+          <a:lstStyle/>
+          <a:p>
+            <a:pPr algn="l"/>
+            <a:r>
+              <a:rPr sz="1400" b="0">
+                <a:solidFill>
+                  <a:srgbClr val="94A3B8"/>
+                </a:solidFill>
+                <a:latin typeface="Calibri"/>
+              </a:rPr>
+              <a:t>Express is the bridge between the citizen UI and the scheme database</a:t>
+            </a:r>
+          </a:p>
+        </p:txBody>
+      </p:sp>
+      <p:sp>
+        <p:nvSpPr>
+          <p:cNvPr id="6" name="Rounded Rectangle 5"/>
           <p:cNvSpPr/>
           <p:nvPr/>
         </p:nvSpPr>
         <p:spPr>
           <a:xfrm>
-            <a:off x="1097280" y="1097280"/>
-            <a:ext cx="9875520" cy="640080"/>
+            <a:off x="1097280" y="1234440"/>
+            <a:ext cx="9966960" cy="621792"/>
           </a:xfrm>
           <a:prstGeom prst="roundRect">
             <a:avLst>
@@ -13695,14 +14082,14 @@
       </p:sp>
       <p:sp>
         <p:nvSpPr>
-          <p:cNvPr id="6" name="TextBox 5"/>
-          <p:cNvSpPr txBox="1"/>
-          <p:nvPr/>
-        </p:nvSpPr>
-        <p:spPr>
-          <a:xfrm>
-            <a:off x="1325880" y="1261872"/>
-            <a:ext cx="548640" cy="365760"/>
+          <p:cNvPr id="7" name="TextBox 6"/>
+          <p:cNvSpPr txBox="1"/>
+          <p:nvPr/>
+        </p:nvSpPr>
+        <p:spPr>
+          <a:xfrm>
+            <a:off x="1325880" y="1380744"/>
+            <a:ext cx="640080" cy="365760"/>
           </a:xfrm>
           <a:prstGeom prst="rect">
             <a:avLst/>
@@ -13730,13 +14117,13 @@
       </p:sp>
       <p:sp>
         <p:nvSpPr>
-          <p:cNvPr id="7" name="TextBox 6"/>
-          <p:cNvSpPr txBox="1"/>
-          <p:nvPr/>
-        </p:nvSpPr>
-        <p:spPr>
-          <a:xfrm>
-            <a:off x="2011680" y="1261872"/>
+          <p:cNvPr id="8" name="TextBox 7"/>
+          <p:cNvSpPr txBox="1"/>
+          <p:nvPr/>
+        </p:nvSpPr>
+        <p:spPr>
+          <a:xfrm>
+            <a:off x="2103120" y="1380744"/>
             <a:ext cx="8595360" cy="365760"/>
           </a:xfrm>
           <a:prstGeom prst="rect">
@@ -13758,21 +14145,21 @@
                 </a:solidFill>
                 <a:latin typeface="Calibri"/>
               </a:rPr>
-              <a:t>Browser → React SPA (ageGroup in localStorage)</a:t>
-            </a:r>
-          </a:p>
-        </p:txBody>
-      </p:sp>
-      <p:sp>
-        <p:nvSpPr>
-          <p:cNvPr id="8" name="Rounded Rectangle 7"/>
+              <a:t>Citizen selects age in React UI</a:t>
+            </a:r>
+          </a:p>
+        </p:txBody>
+      </p:sp>
+      <p:sp>
+        <p:nvSpPr>
+          <p:cNvPr id="9" name="Rounded Rectangle 8"/>
           <p:cNvSpPr/>
           <p:nvPr/>
         </p:nvSpPr>
         <p:spPr>
           <a:xfrm>
-            <a:off x="1097280" y="1874520"/>
-            <a:ext cx="9875520" cy="640080"/>
+            <a:off x="1097280" y="1965960"/>
+            <a:ext cx="9966960" cy="621792"/>
           </a:xfrm>
           <a:prstGeom prst="roundRect">
             <a:avLst>
@@ -13812,14 +14199,14 @@
       </p:sp>
       <p:sp>
         <p:nvSpPr>
-          <p:cNvPr id="9" name="TextBox 8"/>
-          <p:cNvSpPr txBox="1"/>
-          <p:nvPr/>
-        </p:nvSpPr>
-        <p:spPr>
-          <a:xfrm>
-            <a:off x="1325880" y="2039112"/>
-            <a:ext cx="548640" cy="365760"/>
+          <p:cNvPr id="10" name="TextBox 9"/>
+          <p:cNvSpPr txBox="1"/>
+          <p:nvPr/>
+        </p:nvSpPr>
+        <p:spPr>
+          <a:xfrm>
+            <a:off x="1325880" y="2112264"/>
+            <a:ext cx="640080" cy="365760"/>
           </a:xfrm>
           <a:prstGeom prst="rect">
             <a:avLst/>
@@ -13847,13 +14234,13 @@
       </p:sp>
       <p:sp>
         <p:nvSpPr>
-          <p:cNvPr id="10" name="TextBox 9"/>
-          <p:cNvSpPr txBox="1"/>
-          <p:nvPr/>
-        </p:nvSpPr>
-        <p:spPr>
-          <a:xfrm>
-            <a:off x="2011680" y="2039112"/>
+          <p:cNvPr id="11" name="TextBox 10"/>
+          <p:cNvSpPr txBox="1"/>
+          <p:nvPr/>
+        </p:nvSpPr>
+        <p:spPr>
+          <a:xfrm>
+            <a:off x="2103120" y="2112264"/>
             <a:ext cx="8595360" cy="365760"/>
           </a:xfrm>
           <a:prstGeom prst="rect">
@@ -13875,21 +14262,21 @@
                 </a:solidFill>
                 <a:latin typeface="Calibri"/>
               </a:rPr>
-              <a:t>GET /api/schemes?ageGroup&amp;sector&amp;incomeLimit&amp;search</a:t>
-            </a:r>
-          </a:p>
-        </p:txBody>
-      </p:sp>
-      <p:sp>
-        <p:nvSpPr>
-          <p:cNvPr id="11" name="Rounded Rectangle 10"/>
+              <a:t>Frontend calls GET /api/schemes?ageGroup=youngAdult</a:t>
+            </a:r>
+          </a:p>
+        </p:txBody>
+      </p:sp>
+      <p:sp>
+        <p:nvSpPr>
+          <p:cNvPr id="12" name="Rounded Rectangle 11"/>
           <p:cNvSpPr/>
           <p:nvPr/>
         </p:nvSpPr>
         <p:spPr>
           <a:xfrm>
-            <a:off x="1097280" y="2651760"/>
-            <a:ext cx="9875520" cy="640080"/>
+            <a:off x="1097280" y="2697480"/>
+            <a:ext cx="9966960" cy="621792"/>
           </a:xfrm>
           <a:prstGeom prst="roundRect">
             <a:avLst>
@@ -13929,14 +14316,14 @@
       </p:sp>
       <p:sp>
         <p:nvSpPr>
-          <p:cNvPr id="12" name="TextBox 11"/>
-          <p:cNvSpPr txBox="1"/>
-          <p:nvPr/>
-        </p:nvSpPr>
-        <p:spPr>
-          <a:xfrm>
-            <a:off x="1325880" y="2816352"/>
-            <a:ext cx="548640" cy="365760"/>
+          <p:cNvPr id="13" name="TextBox 12"/>
+          <p:cNvSpPr txBox="1"/>
+          <p:nvPr/>
+        </p:nvSpPr>
+        <p:spPr>
+          <a:xfrm>
+            <a:off x="1325880" y="2843784"/>
+            <a:ext cx="640080" cy="365760"/>
           </a:xfrm>
           <a:prstGeom prst="rect">
             <a:avLst/>
@@ -13964,13 +14351,13 @@
       </p:sp>
       <p:sp>
         <p:nvSpPr>
-          <p:cNvPr id="13" name="TextBox 12"/>
-          <p:cNvSpPr txBox="1"/>
-          <p:nvPr/>
-        </p:nvSpPr>
-        <p:spPr>
-          <a:xfrm>
-            <a:off x="2011680" y="2816352"/>
+          <p:cNvPr id="14" name="TextBox 13"/>
+          <p:cNvSpPr txBox="1"/>
+          <p:nvPr/>
+        </p:nvSpPr>
+        <p:spPr>
+          <a:xfrm>
+            <a:off x="2103120" y="2843784"/>
             <a:ext cx="8595360" cy="365760"/>
           </a:xfrm>
           <a:prstGeom prst="rect">
@@ -13992,21 +14379,21 @@
                 </a:solidFill>
                 <a:latin typeface="Calibri"/>
               </a:rPr>
-              <a:t>Express controller builds parameterized WHERE clause</a:t>
-            </a:r>
-          </a:p>
-        </p:txBody>
-      </p:sp>
-      <p:sp>
-        <p:nvSpPr>
-          <p:cNvPr id="14" name="Rounded Rectangle 13"/>
+              <a:t>Express route sends request to schemes controller</a:t>
+            </a:r>
+          </a:p>
+        </p:txBody>
+      </p:sp>
+      <p:sp>
+        <p:nvSpPr>
+          <p:cNvPr id="15" name="Rounded Rectangle 14"/>
           <p:cNvSpPr/>
           <p:nvPr/>
         </p:nvSpPr>
         <p:spPr>
           <a:xfrm>
             <a:off x="1097280" y="3429000"/>
-            <a:ext cx="9875520" cy="640080"/>
+            <a:ext cx="9966960" cy="621792"/>
           </a:xfrm>
           <a:prstGeom prst="roundRect">
             <a:avLst>
@@ -14046,14 +14433,14 @@
       </p:sp>
       <p:sp>
         <p:nvSpPr>
-          <p:cNvPr id="15" name="TextBox 14"/>
-          <p:cNvSpPr txBox="1"/>
-          <p:nvPr/>
-        </p:nvSpPr>
-        <p:spPr>
-          <a:xfrm>
-            <a:off x="1325880" y="3593592"/>
-            <a:ext cx="548640" cy="365760"/>
+          <p:cNvPr id="16" name="TextBox 15"/>
+          <p:cNvSpPr txBox="1"/>
+          <p:nvPr/>
+        </p:nvSpPr>
+        <p:spPr>
+          <a:xfrm>
+            <a:off x="1325880" y="3575304"/>
+            <a:ext cx="640080" cy="365760"/>
           </a:xfrm>
           <a:prstGeom prst="rect">
             <a:avLst/>
@@ -14081,13 +14468,13 @@
       </p:sp>
       <p:sp>
         <p:nvSpPr>
-          <p:cNvPr id="16" name="TextBox 15"/>
-          <p:cNvSpPr txBox="1"/>
-          <p:nvPr/>
-        </p:nvSpPr>
-        <p:spPr>
-          <a:xfrm>
-            <a:off x="2011680" y="3593592"/>
+          <p:cNvPr id="17" name="TextBox 16"/>
+          <p:cNvSpPr txBox="1"/>
+          <p:nvPr/>
+        </p:nvSpPr>
+        <p:spPr>
+          <a:xfrm>
+            <a:off x="2103120" y="3575304"/>
             <a:ext cx="8595360" cy="365760"/>
           </a:xfrm>
           <a:prstGeom prst="rect">
@@ -14109,21 +14496,21 @@
                 </a:solidFill>
                 <a:latin typeface="Calibri"/>
               </a:rPr>
-              <a:t>MySQL: JSON_CONTAINS(age_groups) + income brackets + LIKE</a:t>
-            </a:r>
-          </a:p>
-        </p:txBody>
-      </p:sp>
-      <p:sp>
-        <p:nvSpPr>
-          <p:cNvPr id="17" name="Rounded Rectangle 16"/>
+              <a:t>Controller builds safe SQL filters and queries MySQL</a:t>
+            </a:r>
+          </a:p>
+        </p:txBody>
+      </p:sp>
+      <p:sp>
+        <p:nvSpPr>
+          <p:cNvPr id="18" name="Rounded Rectangle 17"/>
           <p:cNvSpPr/>
           <p:nvPr/>
         </p:nvSpPr>
         <p:spPr>
           <a:xfrm>
-            <a:off x="1097280" y="4206240"/>
-            <a:ext cx="9875520" cy="640080"/>
+            <a:off x="1097280" y="4160520"/>
+            <a:ext cx="9966960" cy="621792"/>
           </a:xfrm>
           <a:prstGeom prst="roundRect">
             <a:avLst>
@@ -14163,14 +14550,14 @@
       </p:sp>
       <p:sp>
         <p:nvSpPr>
-          <p:cNvPr id="18" name="TextBox 17"/>
-          <p:cNvSpPr txBox="1"/>
-          <p:nvPr/>
-        </p:nvSpPr>
-        <p:spPr>
-          <a:xfrm>
-            <a:off x="1325880" y="4370832"/>
-            <a:ext cx="548640" cy="365760"/>
+          <p:cNvPr id="19" name="TextBox 18"/>
+          <p:cNvSpPr txBox="1"/>
+          <p:nvPr/>
+        </p:nvSpPr>
+        <p:spPr>
+          <a:xfrm>
+            <a:off x="1325880" y="4306824"/>
+            <a:ext cx="640080" cy="365760"/>
           </a:xfrm>
           <a:prstGeom prst="rect">
             <a:avLst/>
@@ -14198,13 +14585,13 @@
       </p:sp>
       <p:sp>
         <p:nvSpPr>
-          <p:cNvPr id="19" name="TextBox 18"/>
-          <p:cNvSpPr txBox="1"/>
-          <p:nvPr/>
-        </p:nvSpPr>
-        <p:spPr>
-          <a:xfrm>
-            <a:off x="2011680" y="4370832"/>
+          <p:cNvPr id="20" name="TextBox 19"/>
+          <p:cNvSpPr txBox="1"/>
+          <p:nvPr/>
+        </p:nvSpPr>
+        <p:spPr>
+          <a:xfrm>
+            <a:off x="2103120" y="4306824"/>
             <a:ext cx="8595360" cy="365760"/>
           </a:xfrm>
           <a:prstGeom prst="rect">
@@ -14226,21 +14613,21 @@
                 </a:solidFill>
                 <a:latin typeface="Calibri"/>
               </a:rPr>
-              <a:t>ORDER BY popularity_score → JSON parse → SchemeCards</a:t>
-            </a:r>
-          </a:p>
-        </p:txBody>
-      </p:sp>
-      <p:sp>
-        <p:nvSpPr>
-          <p:cNvPr id="20" name="Rounded Rectangle 19"/>
+              <a:t>API returns JSON scheme list to the browser</a:t>
+            </a:r>
+          </a:p>
+        </p:txBody>
+      </p:sp>
+      <p:sp>
+        <p:nvSpPr>
+          <p:cNvPr id="21" name="Rounded Rectangle 20"/>
           <p:cNvSpPr/>
           <p:nvPr/>
         </p:nvSpPr>
         <p:spPr>
           <a:xfrm>
-            <a:off x="1097280" y="4983480"/>
-            <a:ext cx="9875520" cy="640080"/>
+            <a:off x="1097280" y="4892040"/>
+            <a:ext cx="9966960" cy="621792"/>
           </a:xfrm>
           <a:prstGeom prst="roundRect">
             <a:avLst>
@@ -14280,14 +14667,14 @@
       </p:sp>
       <p:sp>
         <p:nvSpPr>
-          <p:cNvPr id="21" name="TextBox 20"/>
-          <p:cNvSpPr txBox="1"/>
-          <p:nvPr/>
-        </p:nvSpPr>
-        <p:spPr>
-          <a:xfrm>
-            <a:off x="1325880" y="5148072"/>
-            <a:ext cx="548640" cy="365760"/>
+          <p:cNvPr id="22" name="TextBox 21"/>
+          <p:cNvSpPr txBox="1"/>
+          <p:nvPr/>
+        </p:nvSpPr>
+        <p:spPr>
+          <a:xfrm>
+            <a:off x="1325880" y="5038344"/>
+            <a:ext cx="640080" cy="365760"/>
           </a:xfrm>
           <a:prstGeom prst="rect">
             <a:avLst/>
@@ -14315,13 +14702,13 @@
       </p:sp>
       <p:sp>
         <p:nvSpPr>
-          <p:cNvPr id="22" name="TextBox 21"/>
-          <p:cNvSpPr txBox="1"/>
-          <p:nvPr/>
-        </p:nvSpPr>
-        <p:spPr>
-          <a:xfrm>
-            <a:off x="2011680" y="5148072"/>
+          <p:cNvPr id="23" name="TextBox 22"/>
+          <p:cNvSpPr txBox="1"/>
+          <p:nvPr/>
+        </p:nvSpPr>
+        <p:spPr>
+          <a:xfrm>
+            <a:off x="2103120" y="5038344"/>
             <a:ext cx="8595360" cy="365760"/>
           </a:xfrm>
           <a:prstGeom prst="rect">
@@ -14343,21 +14730,21 @@
                 </a:solidFill>
                 <a:latin typeface="Calibri"/>
               </a:rPr>
-              <a:t>Detail: /api/schemes/:id → Apply Now = official_link</a:t>
-            </a:r>
-          </a:p>
-        </p:txBody>
-      </p:sp>
-      <p:sp>
-        <p:nvSpPr>
-          <p:cNvPr id="23" name="TextBox 22"/>
-          <p:cNvSpPr txBox="1"/>
-          <p:nvPr/>
-        </p:nvSpPr>
-        <p:spPr>
-          <a:xfrm>
-            <a:off x="457200" y="6446520"/>
-            <a:ext cx="9144000" cy="274320"/>
+              <a:t>React renders cards; Apply Now opens official portal</a:t>
+            </a:r>
+          </a:p>
+        </p:txBody>
+      </p:sp>
+      <p:sp>
+        <p:nvSpPr>
+          <p:cNvPr id="24" name="TextBox 23"/>
+          <p:cNvSpPr txBox="1"/>
+          <p:nvPr/>
+        </p:nvSpPr>
+        <p:spPr>
+          <a:xfrm>
+            <a:off x="457200" y="6473952"/>
+            <a:ext cx="9601200" cy="256032"/>
           </a:xfrm>
           <a:prstGeom prst="rect">
             <a:avLst/>
@@ -14377,21 +14764,21 @@
                 </a:solidFill>
                 <a:latin typeface="Calibri"/>
               </a:rPr>
-              <a:t>YojanaConnect  ·  Live: yojnaconnect.prakharkr.online  ·  Confidential pitch</a:t>
-            </a:r>
-          </a:p>
-        </p:txBody>
-      </p:sp>
-      <p:sp>
-        <p:nvSpPr>
-          <p:cNvPr id="24" name="TextBox 23"/>
-          <p:cNvSpPr txBox="1"/>
-          <p:nvPr/>
-        </p:nvSpPr>
-        <p:spPr>
-          <a:xfrm>
-            <a:off x="10789920" y="6446520"/>
-            <a:ext cx="1097280" cy="274320"/>
+              <a:t>YojanaConnect  |  https://yojnaconnect.prakharkr.online/schemes  |  Technical Pitch</a:t>
+            </a:r>
+          </a:p>
+        </p:txBody>
+      </p:sp>
+      <p:sp>
+        <p:nvSpPr>
+          <p:cNvPr id="25" name="TextBox 24"/>
+          <p:cNvSpPr txBox="1"/>
+          <p:nvPr/>
+        </p:nvSpPr>
+        <p:spPr>
+          <a:xfrm>
+            <a:off x="10698480" y="6473952"/>
+            <a:ext cx="1188720" cy="256032"/>
           </a:xfrm>
           <a:prstGeom prst="rect">
             <a:avLst/>
@@ -14412,7 +14799,7 @@
                 </a:solidFill>
                 <a:latin typeface="Calibri"/>
               </a:rPr>
-              <a:t>08 / 16</a:t>
+              <a:t>08/16</a:t>
             </a:r>
           </a:p>
         </p:txBody>
@@ -14530,7 +14917,7 @@
         <p:spPr>
           <a:xfrm>
             <a:off x="457200" y="274320"/>
-            <a:ext cx="10972800" cy="411480"/>
+            <a:ext cx="10972800" cy="365760"/>
           </a:xfrm>
           <a:prstGeom prst="rect">
             <a:avLst/>
@@ -14551,7 +14938,7 @@
                 </a:solidFill>
                 <a:latin typeface="Calibri"/>
               </a:rPr>
-              <a:t>Technology Stack — Production Choices</a:t>
+              <a:t>Request Path and Filtering Engine</a:t>
             </a:r>
           </a:p>
         </p:txBody>
@@ -14564,8 +14951,8 @@
         </p:nvSpPr>
         <p:spPr>
           <a:xfrm>
-            <a:off x="411480" y="1051560"/>
-            <a:ext cx="3703320" cy="4937760"/>
+            <a:off x="1005840" y="1097280"/>
+            <a:ext cx="10149840" cy="658368"/>
           </a:xfrm>
           <a:prstGeom prst="roundRect">
             <a:avLst>
@@ -14611,8 +14998,8 @@
         </p:nvSpPr>
         <p:spPr>
           <a:xfrm>
-            <a:off x="640080" y="1234440"/>
-            <a:ext cx="3200400" cy="365760"/>
+            <a:off x="1234440" y="1261872"/>
+            <a:ext cx="548640" cy="365760"/>
           </a:xfrm>
           <a:prstGeom prst="rect">
             <a:avLst/>
@@ -14627,13 +15014,13 @@
           <a:p>
             <a:pPr algn="l"/>
             <a:r>
-              <a:rPr sz="1800" b="1">
+              <a:rPr sz="1600" b="1">
                 <a:solidFill>
                   <a:srgbClr val="FF8C42"/>
                 </a:solidFill>
                 <a:latin typeface="Calibri"/>
               </a:rPr>
-              <a:t>Frontend</a:t>
+              <a:t>01</a:t>
             </a:r>
           </a:p>
         </p:txBody>
@@ -14646,8 +15033,8 @@
         </p:nvSpPr>
         <p:spPr>
           <a:xfrm>
-            <a:off x="731520" y="1783080"/>
-            <a:ext cx="3108960" cy="365760"/>
+            <a:off x="1965960" y="1261872"/>
+            <a:ext cx="8869680" cy="365760"/>
           </a:xfrm>
           <a:prstGeom prst="rect">
             <a:avLst/>
@@ -14662,272 +15049,27 @@
           <a:p>
             <a:pPr algn="l"/>
             <a:r>
-              <a:rPr sz="1400" b="0">
-                <a:solidFill>
-                  <a:srgbClr val="CBD5E1"/>
-                </a:solidFill>
-                <a:latin typeface="Calibri"/>
-              </a:rPr>
-              <a:t>▸  React 19</a:t>
-            </a:r>
-          </a:p>
-        </p:txBody>
-      </p:sp>
-      <p:sp>
-        <p:nvSpPr>
-          <p:cNvPr id="8" name="TextBox 7"/>
-          <p:cNvSpPr txBox="1"/>
-          <p:nvPr/>
-        </p:nvSpPr>
-        <p:spPr>
-          <a:xfrm>
-            <a:off x="731520" y="2240280"/>
-            <a:ext cx="3108960" cy="365760"/>
-          </a:xfrm>
-          <a:prstGeom prst="rect">
-            <a:avLst/>
-          </a:prstGeom>
-          <a:noFill/>
-        </p:spPr>
-        <p:txBody>
-          <a:bodyPr wrap="square">
-            <a:spAutoFit/>
-          </a:bodyPr>
-          <a:lstStyle/>
-          <a:p>
-            <a:pPr algn="l"/>
-            <a:r>
-              <a:rPr sz="1400" b="0">
-                <a:solidFill>
-                  <a:srgbClr val="CBD5E1"/>
-                </a:solidFill>
-                <a:latin typeface="Calibri"/>
-              </a:rPr>
-              <a:t>▸  TypeScript</a:t>
-            </a:r>
-          </a:p>
-        </p:txBody>
-      </p:sp>
-      <p:sp>
-        <p:nvSpPr>
-          <p:cNvPr id="9" name="TextBox 8"/>
-          <p:cNvSpPr txBox="1"/>
-          <p:nvPr/>
-        </p:nvSpPr>
-        <p:spPr>
-          <a:xfrm>
-            <a:off x="731520" y="2697480"/>
-            <a:ext cx="3108960" cy="365760"/>
-          </a:xfrm>
-          <a:prstGeom prst="rect">
-            <a:avLst/>
-          </a:prstGeom>
-          <a:noFill/>
-        </p:spPr>
-        <p:txBody>
-          <a:bodyPr wrap="square">
-            <a:spAutoFit/>
-          </a:bodyPr>
-          <a:lstStyle/>
-          <a:p>
-            <a:pPr algn="l"/>
-            <a:r>
-              <a:rPr sz="1400" b="0">
-                <a:solidFill>
-                  <a:srgbClr val="CBD5E1"/>
-                </a:solidFill>
-                <a:latin typeface="Calibri"/>
-              </a:rPr>
-              <a:t>▸  Vite</a:t>
-            </a:r>
-          </a:p>
-        </p:txBody>
-      </p:sp>
-      <p:sp>
-        <p:nvSpPr>
-          <p:cNvPr id="10" name="TextBox 9"/>
-          <p:cNvSpPr txBox="1"/>
-          <p:nvPr/>
-        </p:nvSpPr>
-        <p:spPr>
-          <a:xfrm>
-            <a:off x="731520" y="3154680"/>
-            <a:ext cx="3108960" cy="365760"/>
-          </a:xfrm>
-          <a:prstGeom prst="rect">
-            <a:avLst/>
-          </a:prstGeom>
-          <a:noFill/>
-        </p:spPr>
-        <p:txBody>
-          <a:bodyPr wrap="square">
-            <a:spAutoFit/>
-          </a:bodyPr>
-          <a:lstStyle/>
-          <a:p>
-            <a:pPr algn="l"/>
-            <a:r>
-              <a:rPr sz="1400" b="0">
-                <a:solidFill>
-                  <a:srgbClr val="CBD5E1"/>
-                </a:solidFill>
-                <a:latin typeface="Calibri"/>
-              </a:rPr>
-              <a:t>▸  TanStack Query</a:t>
-            </a:r>
-          </a:p>
-        </p:txBody>
-      </p:sp>
-      <p:sp>
-        <p:nvSpPr>
-          <p:cNvPr id="11" name="TextBox 10"/>
-          <p:cNvSpPr txBox="1"/>
-          <p:nvPr/>
-        </p:nvSpPr>
-        <p:spPr>
-          <a:xfrm>
-            <a:off x="731520" y="3611880"/>
-            <a:ext cx="3108960" cy="365760"/>
-          </a:xfrm>
-          <a:prstGeom prst="rect">
-            <a:avLst/>
-          </a:prstGeom>
-          <a:noFill/>
-        </p:spPr>
-        <p:txBody>
-          <a:bodyPr wrap="square">
-            <a:spAutoFit/>
-          </a:bodyPr>
-          <a:lstStyle/>
-          <a:p>
-            <a:pPr algn="l"/>
-            <a:r>
-              <a:rPr sz="1400" b="0">
-                <a:solidFill>
-                  <a:srgbClr val="CBD5E1"/>
-                </a:solidFill>
-                <a:latin typeface="Calibri"/>
-              </a:rPr>
-              <a:t>▸  Wouter</a:t>
-            </a:r>
-          </a:p>
-        </p:txBody>
-      </p:sp>
-      <p:sp>
-        <p:nvSpPr>
-          <p:cNvPr id="12" name="TextBox 11"/>
-          <p:cNvSpPr txBox="1"/>
-          <p:nvPr/>
-        </p:nvSpPr>
-        <p:spPr>
-          <a:xfrm>
-            <a:off x="731520" y="4069080"/>
-            <a:ext cx="3108960" cy="365760"/>
-          </a:xfrm>
-          <a:prstGeom prst="rect">
-            <a:avLst/>
-          </a:prstGeom>
-          <a:noFill/>
-        </p:spPr>
-        <p:txBody>
-          <a:bodyPr wrap="square">
-            <a:spAutoFit/>
-          </a:bodyPr>
-          <a:lstStyle/>
-          <a:p>
-            <a:pPr algn="l"/>
-            <a:r>
-              <a:rPr sz="1400" b="0">
-                <a:solidFill>
-                  <a:srgbClr val="CBD5E1"/>
-                </a:solidFill>
-                <a:latin typeface="Calibri"/>
-              </a:rPr>
-              <a:t>▸  i18next</a:t>
-            </a:r>
-          </a:p>
-        </p:txBody>
-      </p:sp>
-      <p:sp>
-        <p:nvSpPr>
-          <p:cNvPr id="13" name="TextBox 12"/>
-          <p:cNvSpPr txBox="1"/>
-          <p:nvPr/>
-        </p:nvSpPr>
-        <p:spPr>
-          <a:xfrm>
-            <a:off x="731520" y="4526280"/>
-            <a:ext cx="3108960" cy="365760"/>
-          </a:xfrm>
-          <a:prstGeom prst="rect">
-            <a:avLst/>
-          </a:prstGeom>
-          <a:noFill/>
-        </p:spPr>
-        <p:txBody>
-          <a:bodyPr wrap="square">
-            <a:spAutoFit/>
-          </a:bodyPr>
-          <a:lstStyle/>
-          <a:p>
-            <a:pPr algn="l"/>
-            <a:r>
-              <a:rPr sz="1400" b="0">
-                <a:solidFill>
-                  <a:srgbClr val="CBD5E1"/>
-                </a:solidFill>
-                <a:latin typeface="Calibri"/>
-              </a:rPr>
-              <a:t>▸  Framer Motion</a:t>
-            </a:r>
-          </a:p>
-        </p:txBody>
-      </p:sp>
-      <p:sp>
-        <p:nvSpPr>
-          <p:cNvPr id="14" name="TextBox 13"/>
-          <p:cNvSpPr txBox="1"/>
-          <p:nvPr/>
-        </p:nvSpPr>
-        <p:spPr>
-          <a:xfrm>
-            <a:off x="731520" y="4983480"/>
-            <a:ext cx="3108960" cy="365760"/>
-          </a:xfrm>
-          <a:prstGeom prst="rect">
-            <a:avLst/>
-          </a:prstGeom>
-          <a:noFill/>
-        </p:spPr>
-        <p:txBody>
-          <a:bodyPr wrap="square">
-            <a:spAutoFit/>
-          </a:bodyPr>
-          <a:lstStyle/>
-          <a:p>
-            <a:pPr algn="l"/>
-            <a:r>
-              <a:rPr sz="1400" b="0">
-                <a:solidFill>
-                  <a:srgbClr val="CBD5E1"/>
-                </a:solidFill>
-                <a:latin typeface="Calibri"/>
-              </a:rPr>
-              <a:t>▸  Tailwind CSS v4</a:t>
-            </a:r>
-          </a:p>
-        </p:txBody>
-      </p:sp>
-      <p:sp>
-        <p:nvSpPr>
-          <p:cNvPr id="15" name="Rounded Rectangle 14"/>
+              <a:rPr sz="1500" b="0">
+                <a:solidFill>
+                  <a:srgbClr val="F8FAFC"/>
+                </a:solidFill>
+                <a:latin typeface="Calibri"/>
+              </a:rPr>
+              <a:t>Browser stores ageGroup in localStorage after age selection</a:t>
+            </a:r>
+          </a:p>
+        </p:txBody>
+      </p:sp>
+      <p:sp>
+        <p:nvSpPr>
+          <p:cNvPr id="8" name="Rounded Rectangle 7"/>
           <p:cNvSpPr/>
           <p:nvPr/>
         </p:nvSpPr>
         <p:spPr>
           <a:xfrm>
-            <a:off x="4297680" y="1051560"/>
-            <a:ext cx="3703320" cy="4937760"/>
+            <a:off x="1005840" y="1874520"/>
+            <a:ext cx="10149840" cy="658368"/>
           </a:xfrm>
           <a:prstGeom prst="roundRect">
             <a:avLst>
@@ -14967,14 +15109,14 @@
       </p:sp>
       <p:sp>
         <p:nvSpPr>
-          <p:cNvPr id="16" name="TextBox 15"/>
-          <p:cNvSpPr txBox="1"/>
-          <p:nvPr/>
-        </p:nvSpPr>
-        <p:spPr>
-          <a:xfrm>
-            <a:off x="4526280" y="1234440"/>
-            <a:ext cx="3200400" cy="365760"/>
+          <p:cNvPr id="9" name="TextBox 8"/>
+          <p:cNvSpPr txBox="1"/>
+          <p:nvPr/>
+        </p:nvSpPr>
+        <p:spPr>
+          <a:xfrm>
+            <a:off x="1234440" y="2039112"/>
+            <a:ext cx="548640" cy="365760"/>
           </a:xfrm>
           <a:prstGeom prst="rect">
             <a:avLst/>
@@ -14989,27 +15131,27 @@
           <a:p>
             <a:pPr algn="l"/>
             <a:r>
-              <a:rPr sz="1800" b="1">
+              <a:rPr sz="1600" b="1">
                 <a:solidFill>
                   <a:srgbClr val="FF8C42"/>
                 </a:solidFill>
                 <a:latin typeface="Calibri"/>
               </a:rPr>
-              <a:t>Backend</a:t>
-            </a:r>
-          </a:p>
-        </p:txBody>
-      </p:sp>
-      <p:sp>
-        <p:nvSpPr>
-          <p:cNvPr id="17" name="TextBox 16"/>
-          <p:cNvSpPr txBox="1"/>
-          <p:nvPr/>
-        </p:nvSpPr>
-        <p:spPr>
-          <a:xfrm>
-            <a:off x="4617720" y="1783080"/>
-            <a:ext cx="3108960" cy="365760"/>
+              <a:t>02</a:t>
+            </a:r>
+          </a:p>
+        </p:txBody>
+      </p:sp>
+      <p:sp>
+        <p:nvSpPr>
+          <p:cNvPr id="10" name="TextBox 9"/>
+          <p:cNvSpPr txBox="1"/>
+          <p:nvPr/>
+        </p:nvSpPr>
+        <p:spPr>
+          <a:xfrm>
+            <a:off x="1965960" y="2039112"/>
+            <a:ext cx="8869680" cy="365760"/>
           </a:xfrm>
           <a:prstGeom prst="rect">
             <a:avLst/>
@@ -15024,272 +15166,27 @@
           <a:p>
             <a:pPr algn="l"/>
             <a:r>
-              <a:rPr sz="1400" b="0">
-                <a:solidFill>
-                  <a:srgbClr val="CBD5E1"/>
-                </a:solidFill>
-                <a:latin typeface="Calibri"/>
-              </a:rPr>
-              <a:t>▸  Node.js</a:t>
-            </a:r>
-          </a:p>
-        </p:txBody>
-      </p:sp>
-      <p:sp>
-        <p:nvSpPr>
-          <p:cNvPr id="18" name="TextBox 17"/>
-          <p:cNvSpPr txBox="1"/>
-          <p:nvPr/>
-        </p:nvSpPr>
-        <p:spPr>
-          <a:xfrm>
-            <a:off x="4617720" y="2240280"/>
-            <a:ext cx="3108960" cy="365760"/>
-          </a:xfrm>
-          <a:prstGeom prst="rect">
-            <a:avLst/>
-          </a:prstGeom>
-          <a:noFill/>
-        </p:spPr>
-        <p:txBody>
-          <a:bodyPr wrap="square">
-            <a:spAutoFit/>
-          </a:bodyPr>
-          <a:lstStyle/>
-          <a:p>
-            <a:pPr algn="l"/>
-            <a:r>
-              <a:rPr sz="1400" b="0">
-                <a:solidFill>
-                  <a:srgbClr val="CBD5E1"/>
-                </a:solidFill>
-                <a:latin typeface="Calibri"/>
-              </a:rPr>
-              <a:t>▸  Express 5</a:t>
-            </a:r>
-          </a:p>
-        </p:txBody>
-      </p:sp>
-      <p:sp>
-        <p:nvSpPr>
-          <p:cNvPr id="19" name="TextBox 18"/>
-          <p:cNvSpPr txBox="1"/>
-          <p:nvPr/>
-        </p:nvSpPr>
-        <p:spPr>
-          <a:xfrm>
-            <a:off x="4617720" y="2697480"/>
-            <a:ext cx="3108960" cy="365760"/>
-          </a:xfrm>
-          <a:prstGeom prst="rect">
-            <a:avLst/>
-          </a:prstGeom>
-          <a:noFill/>
-        </p:spPr>
-        <p:txBody>
-          <a:bodyPr wrap="square">
-            <a:spAutoFit/>
-          </a:bodyPr>
-          <a:lstStyle/>
-          <a:p>
-            <a:pPr algn="l"/>
-            <a:r>
-              <a:rPr sz="1400" b="0">
-                <a:solidFill>
-                  <a:srgbClr val="CBD5E1"/>
-                </a:solidFill>
-                <a:latin typeface="Calibri"/>
-              </a:rPr>
-              <a:t>▸  mysql2 pool</a:t>
-            </a:r>
-          </a:p>
-        </p:txBody>
-      </p:sp>
-      <p:sp>
-        <p:nvSpPr>
-          <p:cNvPr id="20" name="TextBox 19"/>
-          <p:cNvSpPr txBox="1"/>
-          <p:nvPr/>
-        </p:nvSpPr>
-        <p:spPr>
-          <a:xfrm>
-            <a:off x="4617720" y="3154680"/>
-            <a:ext cx="3108960" cy="365760"/>
-          </a:xfrm>
-          <a:prstGeom prst="rect">
-            <a:avLst/>
-          </a:prstGeom>
-          <a:noFill/>
-        </p:spPr>
-        <p:txBody>
-          <a:bodyPr wrap="square">
-            <a:spAutoFit/>
-          </a:bodyPr>
-          <a:lstStyle/>
-          <a:p>
-            <a:pPr algn="l"/>
-            <a:r>
-              <a:rPr sz="1400" b="0">
-                <a:solidFill>
-                  <a:srgbClr val="CBD5E1"/>
-                </a:solidFill>
-                <a:latin typeface="Calibri"/>
-              </a:rPr>
-              <a:t>▸  dotenv</a:t>
-            </a:r>
-          </a:p>
-        </p:txBody>
-      </p:sp>
-      <p:sp>
-        <p:nvSpPr>
-          <p:cNvPr id="21" name="TextBox 20"/>
-          <p:cNvSpPr txBox="1"/>
-          <p:nvPr/>
-        </p:nvSpPr>
-        <p:spPr>
-          <a:xfrm>
-            <a:off x="4617720" y="3611880"/>
-            <a:ext cx="3108960" cy="365760"/>
-          </a:xfrm>
-          <a:prstGeom prst="rect">
-            <a:avLst/>
-          </a:prstGeom>
-          <a:noFill/>
-        </p:spPr>
-        <p:txBody>
-          <a:bodyPr wrap="square">
-            <a:spAutoFit/>
-          </a:bodyPr>
-          <a:lstStyle/>
-          <a:p>
-            <a:pPr algn="l"/>
-            <a:r>
-              <a:rPr sz="1400" b="0">
-                <a:solidFill>
-                  <a:srgbClr val="CBD5E1"/>
-                </a:solidFill>
-                <a:latin typeface="Calibri"/>
-              </a:rPr>
-              <a:t>▸  CORS</a:t>
-            </a:r>
-          </a:p>
-        </p:txBody>
-      </p:sp>
-      <p:sp>
-        <p:nvSpPr>
-          <p:cNvPr id="22" name="TextBox 21"/>
-          <p:cNvSpPr txBox="1"/>
-          <p:nvPr/>
-        </p:nvSpPr>
-        <p:spPr>
-          <a:xfrm>
-            <a:off x="4617720" y="4069080"/>
-            <a:ext cx="3108960" cy="365760"/>
-          </a:xfrm>
-          <a:prstGeom prst="rect">
-            <a:avLst/>
-          </a:prstGeom>
-          <a:noFill/>
-        </p:spPr>
-        <p:txBody>
-          <a:bodyPr wrap="square">
-            <a:spAutoFit/>
-          </a:bodyPr>
-          <a:lstStyle/>
-          <a:p>
-            <a:pPr algn="l"/>
-            <a:r>
-              <a:rPr sz="1400" b="0">
-                <a:solidFill>
-                  <a:srgbClr val="CBD5E1"/>
-                </a:solidFill>
-                <a:latin typeface="Calibri"/>
-              </a:rPr>
-              <a:t>▸  REST JSON API</a:t>
-            </a:r>
-          </a:p>
-        </p:txBody>
-      </p:sp>
-      <p:sp>
-        <p:nvSpPr>
-          <p:cNvPr id="23" name="TextBox 22"/>
-          <p:cNvSpPr txBox="1"/>
-          <p:nvPr/>
-        </p:nvSpPr>
-        <p:spPr>
-          <a:xfrm>
-            <a:off x="4617720" y="4526280"/>
-            <a:ext cx="3108960" cy="365760"/>
-          </a:xfrm>
-          <a:prstGeom prst="rect">
-            <a:avLst/>
-          </a:prstGeom>
-          <a:noFill/>
-        </p:spPr>
-        <p:txBody>
-          <a:bodyPr wrap="square">
-            <a:spAutoFit/>
-          </a:bodyPr>
-          <a:lstStyle/>
-          <a:p>
-            <a:pPr algn="l"/>
-            <a:r>
-              <a:rPr sz="1400" b="0">
-                <a:solidFill>
-                  <a:srgbClr val="CBD5E1"/>
-                </a:solidFill>
-                <a:latin typeface="Calibri"/>
-              </a:rPr>
-              <a:t>▸  pnpm monorepo</a:t>
-            </a:r>
-          </a:p>
-        </p:txBody>
-      </p:sp>
-      <p:sp>
-        <p:nvSpPr>
-          <p:cNvPr id="24" name="TextBox 23"/>
-          <p:cNvSpPr txBox="1"/>
-          <p:nvPr/>
-        </p:nvSpPr>
-        <p:spPr>
-          <a:xfrm>
-            <a:off x="4617720" y="4983480"/>
-            <a:ext cx="3108960" cy="365760"/>
-          </a:xfrm>
-          <a:prstGeom prst="rect">
-            <a:avLst/>
-          </a:prstGeom>
-          <a:noFill/>
-        </p:spPr>
-        <p:txBody>
-          <a:bodyPr wrap="square">
-            <a:spAutoFit/>
-          </a:bodyPr>
-          <a:lstStyle/>
-          <a:p>
-            <a:pPr algn="l"/>
-            <a:r>
-              <a:rPr sz="1400" b="0">
-                <a:solidFill>
-                  <a:srgbClr val="CBD5E1"/>
-                </a:solidFill>
-                <a:latin typeface="Calibri"/>
-              </a:rPr>
-              <a:t>▸  Orval client</a:t>
-            </a:r>
-          </a:p>
-        </p:txBody>
-      </p:sp>
-      <p:sp>
-        <p:nvSpPr>
-          <p:cNvPr id="25" name="Rounded Rectangle 24"/>
+              <a:rPr sz="1500" b="0">
+                <a:solidFill>
+                  <a:srgbClr val="F8FAFC"/>
+                </a:solidFill>
+                <a:latin typeface="Calibri"/>
+              </a:rPr>
+              <a:t>GET /api/schemes with ageGroup, sector, incomeLimit, search</a:t>
+            </a:r>
+          </a:p>
+        </p:txBody>
+      </p:sp>
+      <p:sp>
+        <p:nvSpPr>
+          <p:cNvPr id="11" name="Rounded Rectangle 10"/>
           <p:cNvSpPr/>
           <p:nvPr/>
         </p:nvSpPr>
         <p:spPr>
           <a:xfrm>
-            <a:off x="8183880" y="1051560"/>
-            <a:ext cx="3703320" cy="4937760"/>
+            <a:off x="1005840" y="2651760"/>
+            <a:ext cx="10149840" cy="658368"/>
           </a:xfrm>
           <a:prstGeom prst="roundRect">
             <a:avLst>
@@ -15329,14 +15226,14 @@
       </p:sp>
       <p:sp>
         <p:nvSpPr>
-          <p:cNvPr id="26" name="TextBox 25"/>
-          <p:cNvSpPr txBox="1"/>
-          <p:nvPr/>
-        </p:nvSpPr>
-        <p:spPr>
-          <a:xfrm>
-            <a:off x="8412480" y="1234440"/>
-            <a:ext cx="3200400" cy="365760"/>
+          <p:cNvPr id="12" name="TextBox 11"/>
+          <p:cNvSpPr txBox="1"/>
+          <p:nvPr/>
+        </p:nvSpPr>
+        <p:spPr>
+          <a:xfrm>
+            <a:off x="1234440" y="2816352"/>
+            <a:ext cx="548640" cy="365760"/>
           </a:xfrm>
           <a:prstGeom prst="rect">
             <a:avLst/>
@@ -15351,27 +15248,27 @@
           <a:p>
             <a:pPr algn="l"/>
             <a:r>
-              <a:rPr sz="1800" b="1">
+              <a:rPr sz="1600" b="1">
                 <a:solidFill>
                   <a:srgbClr val="FF8C42"/>
                 </a:solidFill>
                 <a:latin typeface="Calibri"/>
               </a:rPr>
-              <a:t>Data &amp; Ops</a:t>
-            </a:r>
-          </a:p>
-        </p:txBody>
-      </p:sp>
-      <p:sp>
-        <p:nvSpPr>
-          <p:cNvPr id="27" name="TextBox 26"/>
-          <p:cNvSpPr txBox="1"/>
-          <p:nvPr/>
-        </p:nvSpPr>
-        <p:spPr>
-          <a:xfrm>
-            <a:off x="8503920" y="1783080"/>
-            <a:ext cx="3108960" cy="365760"/>
+              <a:t>03</a:t>
+            </a:r>
+          </a:p>
+        </p:txBody>
+      </p:sp>
+      <p:sp>
+        <p:nvSpPr>
+          <p:cNvPr id="13" name="TextBox 12"/>
+          <p:cNvSpPr txBox="1"/>
+          <p:nvPr/>
+        </p:nvSpPr>
+        <p:spPr>
+          <a:xfrm>
+            <a:off x="1965960" y="2816352"/>
+            <a:ext cx="8869680" cy="365760"/>
           </a:xfrm>
           <a:prstGeom prst="rect">
             <a:avLst/>
@@ -15386,27 +15283,74 @@
           <a:p>
             <a:pPr algn="l"/>
             <a:r>
-              <a:rPr sz="1400" b="0">
-                <a:solidFill>
-                  <a:srgbClr val="CBD5E1"/>
-                </a:solidFill>
-                <a:latin typeface="Calibri"/>
-              </a:rPr>
-              <a:t>▸  MySQL 8 JSON</a:t>
-            </a:r>
-          </a:p>
-        </p:txBody>
-      </p:sp>
-      <p:sp>
-        <p:nvSpPr>
-          <p:cNvPr id="28" name="TextBox 27"/>
-          <p:cNvSpPr txBox="1"/>
-          <p:nvPr/>
-        </p:nvSpPr>
-        <p:spPr>
-          <a:xfrm>
-            <a:off x="8503920" y="2240280"/>
-            <a:ext cx="3108960" cy="365760"/>
+              <a:rPr sz="1500" b="0">
+                <a:solidFill>
+                  <a:srgbClr val="F8FAFC"/>
+                </a:solidFill>
+                <a:latin typeface="Calibri"/>
+              </a:rPr>
+              <a:t>Express builds parameterized WHERE clause (no string-concat SQL)</a:t>
+            </a:r>
+          </a:p>
+        </p:txBody>
+      </p:sp>
+      <p:sp>
+        <p:nvSpPr>
+          <p:cNvPr id="14" name="Rounded Rectangle 13"/>
+          <p:cNvSpPr/>
+          <p:nvPr/>
+        </p:nvSpPr>
+        <p:spPr>
+          <a:xfrm>
+            <a:off x="1005840" y="3429000"/>
+            <a:ext cx="10149840" cy="658368"/>
+          </a:xfrm>
+          <a:prstGeom prst="roundRect">
+            <a:avLst>
+              <a:gd name="adj" fmla="val 8000"/>
+            </a:avLst>
+          </a:prstGeom>
+          <a:solidFill>
+            <a:srgbClr val="162A45"/>
+          </a:solidFill>
+          <a:ln>
+            <a:solidFill>
+              <a:srgbClr val="2A3F5F"/>
+            </a:solidFill>
+          </a:ln>
+        </p:spPr>
+        <p:style>
+          <a:lnRef idx="1">
+            <a:schemeClr val="accent1"/>
+          </a:lnRef>
+          <a:fillRef idx="3">
+            <a:schemeClr val="accent1"/>
+          </a:fillRef>
+          <a:effectRef idx="2">
+            <a:schemeClr val="accent1"/>
+          </a:effectRef>
+          <a:fontRef idx="minor">
+            <a:schemeClr val="lt1"/>
+          </a:fontRef>
+        </p:style>
+        <p:txBody>
+          <a:bodyPr rtlCol="0" anchor="ctr"/>
+          <a:lstStyle/>
+          <a:p>
+            <a:pPr algn="ctr"/>
+          </a:p>
+        </p:txBody>
+      </p:sp>
+      <p:sp>
+        <p:nvSpPr>
+          <p:cNvPr id="15" name="TextBox 14"/>
+          <p:cNvSpPr txBox="1"/>
+          <p:nvPr/>
+        </p:nvSpPr>
+        <p:spPr>
+          <a:xfrm>
+            <a:off x="1234440" y="3593592"/>
+            <a:ext cx="548640" cy="365760"/>
           </a:xfrm>
           <a:prstGeom prst="rect">
             <a:avLst/>
@@ -15421,27 +15365,27 @@
           <a:p>
             <a:pPr algn="l"/>
             <a:r>
-              <a:rPr sz="1400" b="0">
-                <a:solidFill>
-                  <a:srgbClr val="CBD5E1"/>
-                </a:solidFill>
-                <a:latin typeface="Calibri"/>
-              </a:rPr>
-              <a:t>▸  Seed SQL</a:t>
-            </a:r>
-          </a:p>
-        </p:txBody>
-      </p:sp>
-      <p:sp>
-        <p:nvSpPr>
-          <p:cNvPr id="29" name="TextBox 28"/>
-          <p:cNvSpPr txBox="1"/>
-          <p:nvPr/>
-        </p:nvSpPr>
-        <p:spPr>
-          <a:xfrm>
-            <a:off x="8503920" y="2697480"/>
-            <a:ext cx="3108960" cy="365760"/>
+              <a:rPr sz="1600" b="1">
+                <a:solidFill>
+                  <a:srgbClr val="FF8C42"/>
+                </a:solidFill>
+                <a:latin typeface="Calibri"/>
+              </a:rPr>
+              <a:t>04</a:t>
+            </a:r>
+          </a:p>
+        </p:txBody>
+      </p:sp>
+      <p:sp>
+        <p:nvSpPr>
+          <p:cNvPr id="16" name="TextBox 15"/>
+          <p:cNvSpPr txBox="1"/>
+          <p:nvPr/>
+        </p:nvSpPr>
+        <p:spPr>
+          <a:xfrm>
+            <a:off x="1965960" y="3593592"/>
+            <a:ext cx="8869680" cy="365760"/>
           </a:xfrm>
           <a:prstGeom prst="rect">
             <a:avLst/>
@@ -15456,27 +15400,74 @@
           <a:p>
             <a:pPr algn="l"/>
             <a:r>
-              <a:rPr sz="1400" b="0">
-                <a:solidFill>
-                  <a:srgbClr val="CBD5E1"/>
-                </a:solidFill>
-                <a:latin typeface="Calibri"/>
-              </a:rPr>
-              <a:t>▸  Nginx reverse proxy</a:t>
-            </a:r>
-          </a:p>
-        </p:txBody>
-      </p:sp>
-      <p:sp>
-        <p:nvSpPr>
-          <p:cNvPr id="30" name="TextBox 29"/>
-          <p:cNvSpPr txBox="1"/>
-          <p:nvPr/>
-        </p:nvSpPr>
-        <p:spPr>
-          <a:xfrm>
-            <a:off x="8503920" y="3154680"/>
-            <a:ext cx="3108960" cy="365760"/>
+              <a:rPr sz="1500" b="0">
+                <a:solidFill>
+                  <a:srgbClr val="F8FAFC"/>
+                </a:solidFill>
+                <a:latin typeface="Calibri"/>
+              </a:rPr>
+              <a:t>MySQL uses JSON_CONTAINS, income brackets, and LIKE search</a:t>
+            </a:r>
+          </a:p>
+        </p:txBody>
+      </p:sp>
+      <p:sp>
+        <p:nvSpPr>
+          <p:cNvPr id="17" name="Rounded Rectangle 16"/>
+          <p:cNvSpPr/>
+          <p:nvPr/>
+        </p:nvSpPr>
+        <p:spPr>
+          <a:xfrm>
+            <a:off x="1005840" y="4206240"/>
+            <a:ext cx="10149840" cy="658368"/>
+          </a:xfrm>
+          <a:prstGeom prst="roundRect">
+            <a:avLst>
+              <a:gd name="adj" fmla="val 8000"/>
+            </a:avLst>
+          </a:prstGeom>
+          <a:solidFill>
+            <a:srgbClr val="162A45"/>
+          </a:solidFill>
+          <a:ln>
+            <a:solidFill>
+              <a:srgbClr val="2A3F5F"/>
+            </a:solidFill>
+          </a:ln>
+        </p:spPr>
+        <p:style>
+          <a:lnRef idx="1">
+            <a:schemeClr val="accent1"/>
+          </a:lnRef>
+          <a:fillRef idx="3">
+            <a:schemeClr val="accent1"/>
+          </a:fillRef>
+          <a:effectRef idx="2">
+            <a:schemeClr val="accent1"/>
+          </a:effectRef>
+          <a:fontRef idx="minor">
+            <a:schemeClr val="lt1"/>
+          </a:fontRef>
+        </p:style>
+        <p:txBody>
+          <a:bodyPr rtlCol="0" anchor="ctr"/>
+          <a:lstStyle/>
+          <a:p>
+            <a:pPr algn="ctr"/>
+          </a:p>
+        </p:txBody>
+      </p:sp>
+      <p:sp>
+        <p:nvSpPr>
+          <p:cNvPr id="18" name="TextBox 17"/>
+          <p:cNvSpPr txBox="1"/>
+          <p:nvPr/>
+        </p:nvSpPr>
+        <p:spPr>
+          <a:xfrm>
+            <a:off x="1234440" y="4370832"/>
+            <a:ext cx="548640" cy="365760"/>
           </a:xfrm>
           <a:prstGeom prst="rect">
             <a:avLst/>
@@ -15491,27 +15482,27 @@
           <a:p>
             <a:pPr algn="l"/>
             <a:r>
-              <a:rPr sz="1400" b="0">
-                <a:solidFill>
-                  <a:srgbClr val="CBD5E1"/>
-                </a:solidFill>
-                <a:latin typeface="Calibri"/>
-              </a:rPr>
-              <a:t>▸  Static SPA build</a:t>
-            </a:r>
-          </a:p>
-        </p:txBody>
-      </p:sp>
-      <p:sp>
-        <p:nvSpPr>
-          <p:cNvPr id="31" name="TextBox 30"/>
-          <p:cNvSpPr txBox="1"/>
-          <p:nvPr/>
-        </p:nvSpPr>
-        <p:spPr>
-          <a:xfrm>
-            <a:off x="8503920" y="3611880"/>
-            <a:ext cx="3108960" cy="365760"/>
+              <a:rPr sz="1600" b="1">
+                <a:solidFill>
+                  <a:srgbClr val="FF8C42"/>
+                </a:solidFill>
+                <a:latin typeface="Calibri"/>
+              </a:rPr>
+              <a:t>05</a:t>
+            </a:r>
+          </a:p>
+        </p:txBody>
+      </p:sp>
+      <p:sp>
+        <p:nvSpPr>
+          <p:cNvPr id="19" name="TextBox 18"/>
+          <p:cNvSpPr txBox="1"/>
+          <p:nvPr/>
+        </p:nvSpPr>
+        <p:spPr>
+          <a:xfrm>
+            <a:off x="1965960" y="4370832"/>
+            <a:ext cx="8869680" cy="365760"/>
           </a:xfrm>
           <a:prstGeom prst="rect">
             <a:avLst/>
@@ -15526,27 +15517,74 @@
           <a:p>
             <a:pPr algn="l"/>
             <a:r>
-              <a:rPr sz="1400" b="0">
-                <a:solidFill>
-                  <a:srgbClr val="CBD5E1"/>
-                </a:solidFill>
-                <a:latin typeface="Calibri"/>
-              </a:rPr>
-              <a:t>▸  Healthz endpoint</a:t>
-            </a:r>
-          </a:p>
-        </p:txBody>
-      </p:sp>
-      <p:sp>
-        <p:nvSpPr>
-          <p:cNvPr id="32" name="TextBox 31"/>
-          <p:cNvSpPr txBox="1"/>
-          <p:nvPr/>
-        </p:nvSpPr>
-        <p:spPr>
-          <a:xfrm>
-            <a:off x="8503920" y="4069080"/>
-            <a:ext cx="3108960" cy="365760"/>
+              <a:rPr sz="1500" b="0">
+                <a:solidFill>
+                  <a:srgbClr val="F8FAFC"/>
+                </a:solidFill>
+                <a:latin typeface="Calibri"/>
+              </a:rPr>
+              <a:t>Results sorted by popularity_score, then JSON fields are parsed</a:t>
+            </a:r>
+          </a:p>
+        </p:txBody>
+      </p:sp>
+      <p:sp>
+        <p:nvSpPr>
+          <p:cNvPr id="20" name="Rounded Rectangle 19"/>
+          <p:cNvSpPr/>
+          <p:nvPr/>
+        </p:nvSpPr>
+        <p:spPr>
+          <a:xfrm>
+            <a:off x="1005840" y="4983480"/>
+            <a:ext cx="10149840" cy="658368"/>
+          </a:xfrm>
+          <a:prstGeom prst="roundRect">
+            <a:avLst>
+              <a:gd name="adj" fmla="val 8000"/>
+            </a:avLst>
+          </a:prstGeom>
+          <a:solidFill>
+            <a:srgbClr val="162A45"/>
+          </a:solidFill>
+          <a:ln>
+            <a:solidFill>
+              <a:srgbClr val="2A3F5F"/>
+            </a:solidFill>
+          </a:ln>
+        </p:spPr>
+        <p:style>
+          <a:lnRef idx="1">
+            <a:schemeClr val="accent1"/>
+          </a:lnRef>
+          <a:fillRef idx="3">
+            <a:schemeClr val="accent1"/>
+          </a:fillRef>
+          <a:effectRef idx="2">
+            <a:schemeClr val="accent1"/>
+          </a:effectRef>
+          <a:fontRef idx="minor">
+            <a:schemeClr val="lt1"/>
+          </a:fontRef>
+        </p:style>
+        <p:txBody>
+          <a:bodyPr rtlCol="0" anchor="ctr"/>
+          <a:lstStyle/>
+          <a:p>
+            <a:pPr algn="ctr"/>
+          </a:p>
+        </p:txBody>
+      </p:sp>
+      <p:sp>
+        <p:nvSpPr>
+          <p:cNvPr id="21" name="TextBox 20"/>
+          <p:cNvSpPr txBox="1"/>
+          <p:nvPr/>
+        </p:nvSpPr>
+        <p:spPr>
+          <a:xfrm>
+            <a:off x="1234440" y="5148072"/>
+            <a:ext cx="548640" cy="365760"/>
           </a:xfrm>
           <a:prstGeom prst="rect">
             <a:avLst/>
@@ -15561,27 +15599,27 @@
           <a:p>
             <a:pPr algn="l"/>
             <a:r>
-              <a:rPr sz="1400" b="0">
-                <a:solidFill>
-                  <a:srgbClr val="CBD5E1"/>
-                </a:solidFill>
-                <a:latin typeface="Calibri"/>
-              </a:rPr>
-              <a:t>▸  Env-based config</a:t>
-            </a:r>
-          </a:p>
-        </p:txBody>
-      </p:sp>
-      <p:sp>
-        <p:nvSpPr>
-          <p:cNvPr id="33" name="TextBox 32"/>
-          <p:cNvSpPr txBox="1"/>
-          <p:nvPr/>
-        </p:nvSpPr>
-        <p:spPr>
-          <a:xfrm>
-            <a:off x="8503920" y="4526280"/>
-            <a:ext cx="3108960" cy="365760"/>
+              <a:rPr sz="1600" b="1">
+                <a:solidFill>
+                  <a:srgbClr val="FF8C42"/>
+                </a:solidFill>
+                <a:latin typeface="Calibri"/>
+              </a:rPr>
+              <a:t>06</a:t>
+            </a:r>
+          </a:p>
+        </p:txBody>
+      </p:sp>
+      <p:sp>
+        <p:nvSpPr>
+          <p:cNvPr id="22" name="TextBox 21"/>
+          <p:cNvSpPr txBox="1"/>
+          <p:nvPr/>
+        </p:nvSpPr>
+        <p:spPr>
+          <a:xfrm>
+            <a:off x="1965960" y="5148072"/>
+            <a:ext cx="8869680" cy="365760"/>
           </a:xfrm>
           <a:prstGeom prst="rect">
             <a:avLst/>
@@ -15596,62 +15634,27 @@
           <a:p>
             <a:pPr algn="l"/>
             <a:r>
-              <a:rPr sz="1400" b="0">
-                <a:solidFill>
-                  <a:srgbClr val="CBD5E1"/>
-                </a:solidFill>
-                <a:latin typeface="Calibri"/>
-              </a:rPr>
-              <a:t>▸  Mobile-first UX</a:t>
-            </a:r>
-          </a:p>
-        </p:txBody>
-      </p:sp>
-      <p:sp>
-        <p:nvSpPr>
-          <p:cNvPr id="34" name="TextBox 33"/>
-          <p:cNvSpPr txBox="1"/>
-          <p:nvPr/>
-        </p:nvSpPr>
-        <p:spPr>
-          <a:xfrm>
-            <a:off x="8503920" y="4983480"/>
-            <a:ext cx="3108960" cy="365760"/>
-          </a:xfrm>
-          <a:prstGeom prst="rect">
-            <a:avLst/>
-          </a:prstGeom>
-          <a:noFill/>
-        </p:spPr>
-        <p:txBody>
-          <a:bodyPr wrap="square">
-            <a:spAutoFit/>
-          </a:bodyPr>
-          <a:lstStyle/>
-          <a:p>
-            <a:pPr algn="l"/>
-            <a:r>
-              <a:rPr sz="1400" b="0">
-                <a:solidFill>
-                  <a:srgbClr val="CBD5E1"/>
-                </a:solidFill>
-                <a:latin typeface="Calibri"/>
-              </a:rPr>
-              <a:t>▸  Live HTTPS</a:t>
-            </a:r>
-          </a:p>
-        </p:txBody>
-      </p:sp>
-      <p:sp>
-        <p:nvSpPr>
-          <p:cNvPr id="35" name="TextBox 34"/>
-          <p:cNvSpPr txBox="1"/>
-          <p:nvPr/>
-        </p:nvSpPr>
-        <p:spPr>
-          <a:xfrm>
-            <a:off x="457200" y="6446520"/>
-            <a:ext cx="9144000" cy="274320"/>
+              <a:rPr sz="1500" b="0">
+                <a:solidFill>
+                  <a:srgbClr val="F8FAFC"/>
+                </a:solidFill>
+                <a:latin typeface="Calibri"/>
+              </a:rPr>
+              <a:t>Detail page uses GET /api/schemes/:id; Apply uses official_link</a:t>
+            </a:r>
+          </a:p>
+        </p:txBody>
+      </p:sp>
+      <p:sp>
+        <p:nvSpPr>
+          <p:cNvPr id="23" name="TextBox 22"/>
+          <p:cNvSpPr txBox="1"/>
+          <p:nvPr/>
+        </p:nvSpPr>
+        <p:spPr>
+          <a:xfrm>
+            <a:off x="457200" y="6473952"/>
+            <a:ext cx="9601200" cy="256032"/>
           </a:xfrm>
           <a:prstGeom prst="rect">
             <a:avLst/>
@@ -15671,21 +15674,21 @@
                 </a:solidFill>
                 <a:latin typeface="Calibri"/>
               </a:rPr>
-              <a:t>YojanaConnect  ·  Live: yojnaconnect.prakharkr.online  ·  Confidential pitch</a:t>
-            </a:r>
-          </a:p>
-        </p:txBody>
-      </p:sp>
-      <p:sp>
-        <p:nvSpPr>
-          <p:cNvPr id="36" name="TextBox 35"/>
-          <p:cNvSpPr txBox="1"/>
-          <p:nvPr/>
-        </p:nvSpPr>
-        <p:spPr>
-          <a:xfrm>
-            <a:off x="10789920" y="6446520"/>
-            <a:ext cx="1097280" cy="274320"/>
+              <a:t>YojanaConnect  |  https://yojnaconnect.prakharkr.online/schemes  |  Technical Pitch</a:t>
+            </a:r>
+          </a:p>
+        </p:txBody>
+      </p:sp>
+      <p:sp>
+        <p:nvSpPr>
+          <p:cNvPr id="24" name="TextBox 23"/>
+          <p:cNvSpPr txBox="1"/>
+          <p:nvPr/>
+        </p:nvSpPr>
+        <p:spPr>
+          <a:xfrm>
+            <a:off x="10698480" y="6473952"/>
+            <a:ext cx="1188720" cy="256032"/>
           </a:xfrm>
           <a:prstGeom prst="rect">
             <a:avLst/>
@@ -15706,7 +15709,7 @@
                 </a:solidFill>
                 <a:latin typeface="Calibri"/>
               </a:rPr>
-              <a:t>09 / 16</a:t>
+              <a:t>09/16</a:t>
             </a:r>
           </a:p>
         </p:txBody>
